--- a/docs/pitch/Aumrti_RTIH_Amaravati_Pitch_Deck.pptx
+++ b/docs/pitch/Aumrti_RTIH_Amaravati_Pitch_Deck.pptx
@@ -4,9 +4,6 @@
   <p:sldMasterIdLst>
     <p:sldMasterId id="2147483648" r:id="rId1"/>
   </p:sldMasterIdLst>
-  <p:notesMasterIdLst>
-    <p:notesMasterId r:id="rId25"/>
-  </p:notesMasterIdLst>
   <p:sldIdLst>
     <p:sldId id="256" r:id="rId2"/>
     <p:sldId id="257" r:id="rId3"/>
@@ -32,8 +29,11 @@
     <p:sldId id="277" r:id="rId23"/>
     <p:sldId id="278" r:id="rId24"/>
   </p:sldIdLst>
-  <p:sldSz cx="12192000" cy="6858000"/>
-  <p:notesSz cx="6858000" cy="12192000"/>
+  <p:notesMasterIdLst>
+    <p:notesMasterId r:id="rId25"/>
+  </p:notesMasterIdLst>
+  <p:sldSz cx="12191695" cy="6858000"/>
+  <p:notesSz cx="6858000" cy="12191695"/>
   <p:defaultTextStyle>
     <a:lvl1pPr marL="0" algn="l" defTabSz="914400" rtl="0" eaLnBrk="1" latinLnBrk="0" hangingPunct="1">
       <a:defRPr sz="1800" kern="1200">
@@ -126,20 +126,13 @@
       </a:defRPr>
     </a:lvl9pPr>
   </p:defaultTextStyle>
-  <p:extLst>
-    <p:ext uri="{EFAFB233-063F-42B5-8137-9DF3F51BA10A}">
-      <p15:sldGuideLst xmlns:p15="http://schemas.microsoft.com/office/powerpoint/2012/main"/>
-    </p:ext>
-  </p:extLst>
 </p:presentation>
 </file>
 
 <file path=ppt/charts/chart1.xml><?xml version="1.0" encoding="utf-8"?>
-<c:chartSpace xmlns:c="http://schemas.openxmlformats.org/drawingml/2006/chart" xmlns:a="http://schemas.openxmlformats.org/drawingml/2006/main" xmlns:r="http://schemas.openxmlformats.org/officeDocument/2006/relationships" xmlns:c16r2="http://schemas.microsoft.com/office/drawing/2015/06/chart">
+<c:chartSpace xmlns:c="http://schemas.openxmlformats.org/drawingml/2006/chart" xmlns:a="http://schemas.openxmlformats.org/drawingml/2006/main" xmlns:r="http://schemas.openxmlformats.org/officeDocument/2006/relationships">
   <c:date1904 val="0"/>
-  <c:lang val="en-US"/>
   <c:roundedCorners val="1"/>
-  <c:style val="2"/>
   <c:chart>
     <c:autoTitleDeleted val="1"/>
     <c:plotArea>
@@ -170,27 +163,19 @@
           </c:spPr>
           <c:invertIfNegative val="0"/>
           <c:dLbls>
-            <c:numFmt formatCode="\₹0.0&quot; L&quot;" sourceLinked="0"/>
-            <c:spPr>
-              <a:noFill/>
-              <a:ln>
-                <a:noFill/>
-              </a:ln>
-              <a:effectLst/>
-            </c:spPr>
+            <c:numFmt formatCode="₹0.0&quot; L&quot;" sourceLinked="0"/>
             <c:txPr>
               <a:bodyPr/>
               <a:lstStyle/>
               <a:p>
                 <a:pPr>
-                  <a:defRPr sz="900" b="0" i="0" u="none" strike="noStrike">
+                  <a:defRPr b="0" i="0" strike="noStrike" sz="900" u="none">
                     <a:solidFill>
                       <a:srgbClr val="1B305A"/>
                     </a:solidFill>
                     <a:latin typeface="Segoe UI"/>
                   </a:defRPr>
                 </a:pPr>
-                <a:endParaRPr lang="en-US"/>
               </a:p>
             </c:txPr>
             <c:showLegendKey val="0"/>
@@ -200,28 +185,25 @@
             <c:showPercent val="0"/>
             <c:showBubbleSize val="0"/>
             <c:showLeaderLines val="0"/>
-            <c:extLst>
-              <c:ext xmlns:c15="http://schemas.microsoft.com/office/drawing/2012/chart" uri="{CE6537A1-D6FC-4f65-9D91-7224C49458BB}">
-                <c15:showLeaderLines val="0"/>
-              </c:ext>
-            </c:extLst>
           </c:dLbls>
           <c:cat>
-            <c:strRef>
+            <c:multiLvlStrRef>
               <c:f>Sheet1!$A$2:$A$4</c:f>
-              <c:strCache>
+              <c:multiLvlStrCache>
                 <c:ptCount val="3"/>
-                <c:pt idx="0">
-                  <c:v>Year 1 · 4 hospitals</c:v>
-                </c:pt>
-                <c:pt idx="1">
-                  <c:v>Year 2 · 14 hospitals</c:v>
-                </c:pt>
-                <c:pt idx="2">
-                  <c:v>Year 3 · 35 hospitals</c:v>
-                </c:pt>
-              </c:strCache>
-            </c:strRef>
+                <c:lvl>
+                  <c:pt idx="0">
+                    <c:v>Year 1 · 4 hospitals</c:v>
+                  </c:pt>
+                  <c:pt idx="1">
+                    <c:v>Year 2 · 14 hospitals</c:v>
+                  </c:pt>
+                  <c:pt idx="2">
+                    <c:v>Year 3 · 35 hospitals</c:v>
+                  </c:pt>
+                </c:lvl>
+              </c:multiLvlStrCache>
+            </c:multiLvlStrRef>
           </c:cat>
           <c:val>
             <c:numRef>
@@ -236,28 +218,41 @@
                   <c:v>58.7</c:v>
                 </c:pt>
                 <c:pt idx="2">
-                  <c:v>140.69999999999999</c:v>
+                  <c:v>140.7</c:v>
                 </c:pt>
               </c:numCache>
             </c:numRef>
           </c:val>
-          <c:extLst>
-            <c:ext xmlns:c16="http://schemas.microsoft.com/office/drawing/2014/chart" uri="{C3380CC4-5D6E-409C-BE32-E72D297353CC}">
-              <c16:uniqueId val="{00000000-B662-4E94-95A5-75338CEDCD31}"/>
-            </c:ext>
-          </c:extLst>
         </c:ser>
         <c:dLbls>
+          <c:numFmt formatCode="₹0.0&quot; L&quot;" sourceLinked="0"/>
+          <c:txPr>
+            <a:bodyPr/>
+            <a:lstStyle/>
+            <a:p>
+              <a:pPr>
+                <a:defRPr b="0" i="0" strike="noStrike" sz="900" u="none">
+                  <a:solidFill>
+                    <a:srgbClr val="1B305A"/>
+                  </a:solidFill>
+                  <a:latin typeface="Segoe UI"/>
+                </a:defRPr>
+              </a:pPr>
+            </a:p>
+          </c:txPr>
           <c:showLegendKey val="0"/>
           <c:showVal val="1"/>
           <c:showCatName val="0"/>
           <c:showSerName val="0"/>
           <c:showPercent val="0"/>
           <c:showBubbleSize val="0"/>
+          <c:showLeaderLines val="0"/>
         </c:dLbls>
         <c:gapWidth val="60"/>
+        <c:overlap val="0"/>
         <c:axId val="2094734554"/>
         <c:axId val="2094734552"/>
+        <c:axId val="2094734556"/>
       </c:barChart>
       <c:catAx>
         <c:axId val="2094734554"/>
@@ -296,7 +291,6 @@
         <c:crosses val="autoZero"/>
         <c:auto val="1"/>
         <c:lblAlgn val="ctr"/>
-        <c:lblOffset val="100"/>
         <c:noMultiLvlLbl val="1"/>
       </c:catAx>
       <c:valAx>
@@ -310,6 +304,28 @@
         <c:majorTickMark val="out"/>
         <c:minorTickMark val="none"/>
         <c:tickLblPos val="low"/>
+        <c:spPr>
+          <a:ln w="12700" cap="flat">
+            <a:noFill/>
+            <a:prstDash val="solid"/>
+            <a:round/>
+          </a:ln>
+        </c:spPr>
+        <c:txPr>
+          <a:bodyPr/>
+          <a:lstStyle/>
+          <a:p>
+            <a:pPr>
+              <a:defRPr sz="1200" b="0" i="0" u="none" strike="noStrike">
+                <a:solidFill>
+                  <a:srgbClr val="000000"/>
+                </a:solidFill>
+                <a:latin typeface="Arial"/>
+              </a:defRPr>
+            </a:pPr>
+            <a:endParaRPr lang="en-US"/>
+          </a:p>
+        </c:txPr>
         <c:crossAx val="2094734554"/>
         <c:crosses val="autoZero"/>
         <c:crossBetween val="between"/>
@@ -326,7 +342,6 @@
     </c:plotArea>
     <c:plotVisOnly val="1"/>
     <c:dispBlanksAs val="span"/>
-    <c:showDLblsOverMax val="1"/>
   </c:chart>
   <c:spPr>
     <a:noFill/>
@@ -363,10 +378,234 @@
           <a:chExt cx="0" cy="0"/>
         </a:xfrm>
       </p:grpSpPr>
+      <p:sp>
+        <p:nvSpPr>
+          <p:cNvPr id="2" name="Header Placeholder 1"/>
+          <p:cNvSpPr>
+            <a:spLocks noGrp="1"/>
+          </p:cNvSpPr>
+          <p:nvPr>
+            <p:ph type="hdr" sz="quarter"/>
+          </p:nvPr>
+        </p:nvSpPr>
+        <p:spPr>
+          <a:xfrm>
+            <a:off x="0" y="0"/>
+            <a:ext cx="2971800" cy="458788"/>
+          </a:xfrm>
+          <a:prstGeom prst="rect">
+            <a:avLst/>
+          </a:prstGeom>
+        </p:spPr>
+        <p:txBody>
+          <a:bodyPr vert="horz" lIns="91440" tIns="45720" rIns="91440" bIns="45720" rtlCol="0"/>
+          <a:lstStyle>
+            <a:lvl1pPr algn="l">
+              <a:defRPr sz="1200"/>
+            </a:lvl1pPr>
+          </a:lstStyle>
+          <a:p>
+            <a:endParaRPr lang="en-US"/>
+          </a:p>
+        </p:txBody>
+      </p:sp>
+      <p:sp>
+        <p:nvSpPr>
+          <p:cNvPr id="3" name="Date Placeholder 2"/>
+          <p:cNvSpPr>
+            <a:spLocks noGrp="1"/>
+          </p:cNvSpPr>
+          <p:nvPr>
+            <p:ph type="dt" idx="1"/>
+          </p:nvPr>
+        </p:nvSpPr>
+        <p:spPr>
+          <a:xfrm>
+            <a:off x="3884613" y="0"/>
+            <a:ext cx="2971800" cy="458788"/>
+          </a:xfrm>
+          <a:prstGeom prst="rect">
+            <a:avLst/>
+          </a:prstGeom>
+        </p:spPr>
+        <p:txBody>
+          <a:bodyPr vert="horz" lIns="91440" tIns="45720" rIns="91440" bIns="45720" rtlCol="0"/>
+          <a:lstStyle>
+            <a:lvl1pPr algn="r">
+              <a:defRPr sz="1200"/>
+            </a:lvl1pPr>
+          </a:lstStyle>
+          <a:p>
+            <a:fld id="{5282F153-3F37-0F45-9E97-73ACFA13230C}" type="datetimeFigureOut">
+              <a:rPr lang="en-US"/>
+              <a:t>7/23/19</a:t>
+            </a:fld>
+            <a:endParaRPr lang="en-US"/>
+          </a:p>
+        </p:txBody>
+      </p:sp>
+      <p:sp>
+        <p:nvSpPr>
+          <p:cNvPr id="4" name="Slide Image Placeholder 3"/>
+          <p:cNvSpPr>
+            <a:spLocks noGrp="1" noRot="1" noChangeAspect="1"/>
+          </p:cNvSpPr>
+          <p:nvPr>
+            <p:ph type="sldImg" idx="2"/>
+          </p:nvPr>
+        </p:nvSpPr>
+        <p:spPr>
+          <a:xfrm>
+            <a:off x="685800" y="1143000"/>
+            <a:ext cx="5486400" cy="3086100"/>
+          </a:xfrm>
+          <a:prstGeom prst="rect">
+            <a:avLst/>
+          </a:prstGeom>
+          <a:noFill/>
+          <a:ln w="12700">
+            <a:solidFill>
+              <a:prstClr val="black"/>
+            </a:solidFill>
+          </a:ln>
+        </p:spPr>
+        <p:txBody>
+          <a:bodyPr vert="horz" lIns="91440" tIns="45720" rIns="91440" bIns="45720" rtlCol="0" anchor="ctr"/>
+          <a:lstStyle/>
+          <a:p>
+            <a:endParaRPr lang="en-US"/>
+          </a:p>
+        </p:txBody>
+      </p:sp>
+      <p:sp>
+        <p:nvSpPr>
+          <p:cNvPr id="5" name="Notes Placeholder 4"/>
+          <p:cNvSpPr>
+            <a:spLocks noGrp="1"/>
+          </p:cNvSpPr>
+          <p:nvPr>
+            <p:ph type="body" sz="quarter" idx="3"/>
+          </p:nvPr>
+        </p:nvSpPr>
+        <p:spPr>
+          <a:xfrm>
+            <a:off x="685800" y="4400550"/>
+            <a:ext cx="5486400" cy="3600450"/>
+          </a:xfrm>
+          <a:prstGeom prst="rect">
+            <a:avLst/>
+          </a:prstGeom>
+        </p:spPr>
+        <p:txBody>
+          <a:bodyPr vert="horz" lIns="91440" tIns="45720" rIns="91440" bIns="45720" rtlCol="0"/>
+          <a:lstStyle/>
+          <a:p>
+            <a:pPr lvl="0"/>
+            <a:r>
+              <a:rPr lang="en-US"/>
+              <a:t>Click to edit Master text styles</a:t>
+            </a:r>
+          </a:p>
+          <a:p>
+            <a:pPr lvl="1"/>
+            <a:r>
+              <a:rPr lang="en-US"/>
+              <a:t>Second level</a:t>
+            </a:r>
+          </a:p>
+          <a:p>
+            <a:pPr lvl="2"/>
+            <a:r>
+              <a:rPr lang="en-US"/>
+              <a:t>Third level</a:t>
+            </a:r>
+          </a:p>
+          <a:p>
+            <a:pPr lvl="3"/>
+            <a:r>
+              <a:rPr lang="en-US"/>
+              <a:t>Fourth level</a:t>
+            </a:r>
+          </a:p>
+          <a:p>
+            <a:pPr lvl="4"/>
+            <a:r>
+              <a:rPr lang="en-US"/>
+              <a:t>Fifth level</a:t>
+            </a:r>
+          </a:p>
+        </p:txBody>
+      </p:sp>
+      <p:sp>
+        <p:nvSpPr>
+          <p:cNvPr id="6" name="Footer Placeholder 5"/>
+          <p:cNvSpPr>
+            <a:spLocks noGrp="1"/>
+          </p:cNvSpPr>
+          <p:nvPr>
+            <p:ph type="ftr" sz="quarter" idx="4"/>
+          </p:nvPr>
+        </p:nvSpPr>
+        <p:spPr>
+          <a:xfrm>
+            <a:off x="0" y="8685213"/>
+            <a:ext cx="2971800" cy="458787"/>
+          </a:xfrm>
+          <a:prstGeom prst="rect">
+            <a:avLst/>
+          </a:prstGeom>
+        </p:spPr>
+        <p:txBody>
+          <a:bodyPr vert="horz" lIns="91440" tIns="45720" rIns="91440" bIns="45720" rtlCol="0" anchor="b"/>
+          <a:lstStyle>
+            <a:lvl1pPr algn="l">
+              <a:defRPr sz="1200"/>
+            </a:lvl1pPr>
+          </a:lstStyle>
+          <a:p>
+            <a:endParaRPr lang="en-US"/>
+          </a:p>
+        </p:txBody>
+      </p:sp>
+      <p:sp>
+        <p:nvSpPr>
+          <p:cNvPr id="7" name="Slide Number Placeholder 6"/>
+          <p:cNvSpPr>
+            <a:spLocks noGrp="1"/>
+          </p:cNvSpPr>
+          <p:nvPr>
+            <p:ph type="sldNum" sz="quarter" idx="5"/>
+          </p:nvPr>
+        </p:nvSpPr>
+        <p:spPr>
+          <a:xfrm>
+            <a:off x="3884613" y="8685213"/>
+            <a:ext cx="2971800" cy="458787"/>
+          </a:xfrm>
+          <a:prstGeom prst="rect">
+            <a:avLst/>
+          </a:prstGeom>
+        </p:spPr>
+        <p:txBody>
+          <a:bodyPr vert="horz" lIns="91440" tIns="45720" rIns="91440" bIns="45720" rtlCol="0" anchor="b"/>
+          <a:lstStyle>
+            <a:lvl1pPr algn="r">
+              <a:defRPr sz="1200"/>
+            </a:lvl1pPr>
+          </a:lstStyle>
+          <a:p>
+            <a:fld id="{CE5E9CC1-C706-0F49-92D6-E571CC5EEA8F}" type="slidenum">
+              <a:rPr lang="en-US"/>
+              <a:t>‹#›</a:t>
+            </a:fld>
+            <a:endParaRPr lang="en-US"/>
+          </a:p>
+        </p:txBody>
+      </p:sp>
     </p:spTree>
     <p:extLst>
       <p:ext uri="{BB962C8B-B14F-4D97-AF65-F5344CB8AC3E}">
-        <p14:creationId xmlns:p14="http://schemas.microsoft.com/office/powerpoint/2010/main" val="2076929787"/>
+        <p14:creationId xmlns:p14="http://schemas.microsoft.com/office/powerpoint/2010/main" val="1024086991"/>
       </p:ext>
     </p:extLst>
   </p:cSld>
@@ -510,6 +749,10 @@
           <a:bodyPr/>
           <a:lstStyle/>
           <a:p>
+            <a:r>
+              <a:rPr lang="en-US" dirty="0"/>
+              <a:t/>
+            </a:r>
             <a:endParaRPr lang="en-US" dirty="0"/>
           </a:p>
         </p:txBody>
@@ -594,6 +837,10 @@
           <a:bodyPr/>
           <a:lstStyle/>
           <a:p>
+            <a:r>
+              <a:rPr lang="en-US" dirty="0"/>
+              <a:t/>
+            </a:r>
             <a:endParaRPr lang="en-US" dirty="0"/>
           </a:p>
         </p:txBody>
@@ -678,6 +925,10 @@
           <a:bodyPr/>
           <a:lstStyle/>
           <a:p>
+            <a:r>
+              <a:rPr lang="en-US" dirty="0"/>
+              <a:t/>
+            </a:r>
             <a:endParaRPr lang="en-US" dirty="0"/>
           </a:p>
         </p:txBody>
@@ -762,6 +1013,10 @@
           <a:bodyPr/>
           <a:lstStyle/>
           <a:p>
+            <a:r>
+              <a:rPr lang="en-US" dirty="0"/>
+              <a:t/>
+            </a:r>
             <a:endParaRPr lang="en-US" dirty="0"/>
           </a:p>
         </p:txBody>
@@ -846,6 +1101,10 @@
           <a:bodyPr/>
           <a:lstStyle/>
           <a:p>
+            <a:r>
+              <a:rPr lang="en-US" dirty="0"/>
+              <a:t/>
+            </a:r>
             <a:endParaRPr lang="en-US" dirty="0"/>
           </a:p>
         </p:txBody>
@@ -930,6 +1189,10 @@
           <a:bodyPr/>
           <a:lstStyle/>
           <a:p>
+            <a:r>
+              <a:rPr lang="en-US" dirty="0"/>
+              <a:t/>
+            </a:r>
             <a:endParaRPr lang="en-US" dirty="0"/>
           </a:p>
         </p:txBody>
@@ -1014,6 +1277,10 @@
           <a:bodyPr/>
           <a:lstStyle/>
           <a:p>
+            <a:r>
+              <a:rPr lang="en-US" dirty="0"/>
+              <a:t/>
+            </a:r>
             <a:endParaRPr lang="en-US" dirty="0"/>
           </a:p>
         </p:txBody>
@@ -1098,6 +1365,10 @@
           <a:bodyPr/>
           <a:lstStyle/>
           <a:p>
+            <a:r>
+              <a:rPr lang="en-US" dirty="0"/>
+              <a:t/>
+            </a:r>
             <a:endParaRPr lang="en-US" dirty="0"/>
           </a:p>
         </p:txBody>
@@ -1182,6 +1453,10 @@
           <a:bodyPr/>
           <a:lstStyle/>
           <a:p>
+            <a:r>
+              <a:rPr lang="en-US" dirty="0"/>
+              <a:t/>
+            </a:r>
             <a:endParaRPr lang="en-US" dirty="0"/>
           </a:p>
         </p:txBody>
@@ -1266,6 +1541,10 @@
           <a:bodyPr/>
           <a:lstStyle/>
           <a:p>
+            <a:r>
+              <a:rPr lang="en-US" dirty="0"/>
+              <a:t/>
+            </a:r>
             <a:endParaRPr lang="en-US" dirty="0"/>
           </a:p>
         </p:txBody>
@@ -1350,6 +1629,10 @@
           <a:bodyPr/>
           <a:lstStyle/>
           <a:p>
+            <a:r>
+              <a:rPr lang="en-US" dirty="0"/>
+              <a:t/>
+            </a:r>
             <a:endParaRPr lang="en-US" dirty="0"/>
           </a:p>
         </p:txBody>
@@ -1434,6 +1717,10 @@
           <a:bodyPr/>
           <a:lstStyle/>
           <a:p>
+            <a:r>
+              <a:rPr lang="en-US" dirty="0"/>
+              <a:t/>
+            </a:r>
             <a:endParaRPr lang="en-US" dirty="0"/>
           </a:p>
         </p:txBody>
@@ -1518,6 +1805,10 @@
           <a:bodyPr/>
           <a:lstStyle/>
           <a:p>
+            <a:r>
+              <a:rPr lang="en-US" dirty="0"/>
+              <a:t/>
+            </a:r>
             <a:endParaRPr lang="en-US" dirty="0"/>
           </a:p>
         </p:txBody>
@@ -1602,6 +1893,10 @@
           <a:bodyPr/>
           <a:lstStyle/>
           <a:p>
+            <a:r>
+              <a:rPr lang="en-US" dirty="0"/>
+              <a:t/>
+            </a:r>
             <a:endParaRPr lang="en-US" dirty="0"/>
           </a:p>
         </p:txBody>
@@ -1686,6 +1981,10 @@
           <a:bodyPr/>
           <a:lstStyle/>
           <a:p>
+            <a:r>
+              <a:rPr lang="en-US" dirty="0"/>
+              <a:t/>
+            </a:r>
             <a:endParaRPr lang="en-US" dirty="0"/>
           </a:p>
         </p:txBody>
@@ -1770,6 +2069,10 @@
           <a:bodyPr/>
           <a:lstStyle/>
           <a:p>
+            <a:r>
+              <a:rPr lang="en-US" dirty="0"/>
+              <a:t/>
+            </a:r>
             <a:endParaRPr lang="en-US" dirty="0"/>
           </a:p>
         </p:txBody>
@@ -1854,6 +2157,10 @@
           <a:bodyPr/>
           <a:lstStyle/>
           <a:p>
+            <a:r>
+              <a:rPr lang="en-US" dirty="0"/>
+              <a:t/>
+            </a:r>
             <a:endParaRPr lang="en-US" dirty="0"/>
           </a:p>
         </p:txBody>
@@ -1938,6 +2245,10 @@
           <a:bodyPr/>
           <a:lstStyle/>
           <a:p>
+            <a:r>
+              <a:rPr lang="en-US" dirty="0"/>
+              <a:t/>
+            </a:r>
             <a:endParaRPr lang="en-US" dirty="0"/>
           </a:p>
         </p:txBody>
@@ -2022,6 +2333,10 @@
           <a:bodyPr/>
           <a:lstStyle/>
           <a:p>
+            <a:r>
+              <a:rPr lang="en-US" dirty="0"/>
+              <a:t/>
+            </a:r>
             <a:endParaRPr lang="en-US" dirty="0"/>
           </a:p>
         </p:txBody>
@@ -2106,6 +2421,10 @@
           <a:bodyPr/>
           <a:lstStyle/>
           <a:p>
+            <a:r>
+              <a:rPr lang="en-US" dirty="0"/>
+              <a:t/>
+            </a:r>
             <a:endParaRPr lang="en-US" dirty="0"/>
           </a:p>
         </p:txBody>
@@ -2190,6 +2509,10 @@
           <a:bodyPr/>
           <a:lstStyle/>
           <a:p>
+            <a:r>
+              <a:rPr lang="en-US" dirty="0"/>
+              <a:t/>
+            </a:r>
             <a:endParaRPr lang="en-US" dirty="0"/>
           </a:p>
         </p:txBody>
@@ -2274,6 +2597,10 @@
           <a:bodyPr/>
           <a:lstStyle/>
           <a:p>
+            <a:r>
+              <a:rPr lang="en-US" dirty="0"/>
+              <a:t/>
+            </a:r>
             <a:endParaRPr lang="en-US" dirty="0"/>
           </a:p>
         </p:txBody>
@@ -2358,6 +2685,10 @@
           <a:bodyPr/>
           <a:lstStyle/>
           <a:p>
+            <a:r>
+              <a:rPr lang="en-US" dirty="0"/>
+              <a:t/>
+            </a:r>
             <a:endParaRPr lang="en-US" dirty="0"/>
           </a:p>
         </p:txBody>
@@ -2431,11 +2762,6 @@
 <file path=ppt/slideMasters/slideMaster1.xml><?xml version="1.0" encoding="utf-8"?>
 <p:sldMaster xmlns:a="http://schemas.openxmlformats.org/drawingml/2006/main" xmlns:r="http://schemas.openxmlformats.org/officeDocument/2006/relationships" xmlns:p="http://schemas.openxmlformats.org/presentationml/2006/main">
   <p:cSld>
-    <p:bg>
-      <p:bgRef idx="1001">
-        <a:schemeClr val="bg1"/>
-      </p:bgRef>
-    </p:bg>
     <p:spTree>
       <p:nvGrpSpPr>
         <p:cNvPr id="1" name=""/>
@@ -2718,7 +3044,6 @@
         <a:solidFill>
           <a:srgbClr val="FFFFFF"/>
         </a:solidFill>
-        <a:effectLst/>
       </p:bgPr>
     </p:bg>
     <p:spTree>
@@ -2737,21 +3062,21 @@
       </p:grpSpPr>
       <p:pic>
         <p:nvPicPr>
-          <p:cNvPr id="2" name="Image 0" descr="D:\Aumrti 06-06-2026\docs\pitch\assets\aumrti-logo.png"/>
+          <p:cNvPr id="2" name="Image 0" descr="D:\Aumrti 06-06-2026\docs\pitch\assets\aumrti-logo.png">    </p:cNvPr>
           <p:cNvPicPr>
             <a:picLocks noChangeAspect="1"/>
           </p:cNvPicPr>
           <p:nvPr/>
         </p:nvPicPr>
         <p:blipFill>
-          <a:blip r:embed="rId3"/>
-          <a:srcRect/>
+          <a:blip r:embed="rId1"/>
+          <a:srcRect l="0" r="0" t="0" b="0"/>
           <a:stretch/>
         </p:blipFill>
         <p:spPr>
           <a:xfrm>
-            <a:off x="265176" y="328624"/>
-            <a:ext cx="1737360" cy="832664"/>
+            <a:off x="566928" y="566928"/>
+            <a:ext cx="1737360" cy="475488"/>
           </a:xfrm>
           <a:prstGeom prst="rect">
             <a:avLst/>
@@ -2779,11 +3104,11 @@
           <a:bodyPr wrap="square" rtlCol="0" anchor="ctr"/>
           <a:lstStyle/>
           <a:p>
-            <a:pPr marL="0" indent="0" algn="r">
-              <a:buNone/>
-            </a:pPr>
-            <a:r>
-              <a:rPr lang="en-US" sz="850" b="1" kern="0" spc="160" dirty="0">
+            <a:pPr algn="r" indent="0" marL="0">
+              <a:buNone/>
+            </a:pPr>
+            <a:r>
+              <a:rPr lang="en-US" sz="850" b="1" spc="160" kern="0" dirty="0">
                 <a:solidFill>
                   <a:srgbClr val="F5A310"/>
                 </a:solidFill>
@@ -2818,7 +3143,7 @@
           <a:bodyPr wrap="square" rtlCol="0" anchor="t"/>
           <a:lstStyle/>
           <a:p>
-            <a:pPr marL="0" indent="0">
+            <a:pPr indent="0" marL="0">
               <a:lnSpc>
                 <a:spcPct val="106000"/>
               </a:lnSpc>
@@ -2880,7 +3205,7 @@
           <a:bodyPr wrap="square" rtlCol="0" anchor="t"/>
           <a:lstStyle/>
           <a:p>
-            <a:pPr marL="0" indent="0">
+            <a:pPr indent="0" marL="0">
               <a:lnSpc>
                 <a:spcPct val="128000"/>
               </a:lnSpc>
@@ -2909,7 +3234,7 @@
         </p:nvSpPr>
         <p:spPr>
           <a:xfrm>
-            <a:off x="2579522" y="4681728"/>
+            <a:off x="566928" y="4681728"/>
             <a:ext cx="1879092" cy="402336"/>
           </a:xfrm>
           <a:prstGeom prst="rect">
@@ -2922,7 +3247,7 @@
           <a:bodyPr wrap="square" rtlCol="0" anchor="ctr"/>
           <a:lstStyle/>
           <a:p>
-            <a:pPr marL="0" indent="0">
+            <a:pPr indent="0" marL="0">
               <a:buNone/>
             </a:pPr>
             <a:r>
@@ -2948,7 +3273,7 @@
         </p:nvSpPr>
         <p:spPr>
           <a:xfrm>
-            <a:off x="2579522" y="5084064"/>
+            <a:off x="566928" y="5084064"/>
             <a:ext cx="1879092" cy="219456"/>
           </a:xfrm>
           <a:prstGeom prst="rect">
@@ -2961,11 +3286,11 @@
           <a:bodyPr wrap="square" rtlCol="0" anchor="t"/>
           <a:lstStyle/>
           <a:p>
-            <a:pPr marL="0" indent="0">
-              <a:buNone/>
-            </a:pPr>
-            <a:r>
-              <a:rPr lang="en-US" sz="850" kern="0" spc="60" dirty="0">
+            <a:pPr indent="0" marL="0">
+              <a:buNone/>
+            </a:pPr>
+            <a:r>
+              <a:rPr lang="en-US" sz="850" spc="60" kern="0" dirty="0">
                 <a:solidFill>
                   <a:srgbClr val="667085"/>
                 </a:solidFill>
@@ -3000,9 +3325,20 @@
           <a:bodyPr wrap="square" rtlCol="0" anchor="ctr"/>
           <a:lstStyle/>
           <a:p>
-            <a:pPr marL="0" indent="0">
-              <a:buNone/>
-            </a:pPr>
+            <a:pPr indent="0" marL="0">
+              <a:buNone/>
+            </a:pPr>
+            <a:r>
+              <a:rPr lang="en-US" sz="2200" b="1" dirty="0">
+                <a:solidFill>
+                  <a:srgbClr val="1B305A"/>
+                </a:solidFill>
+                <a:latin typeface="Segoe UI" pitchFamily="34" charset="0"/>
+                <a:ea typeface="Segoe UI" pitchFamily="34" charset="-122"/>
+                <a:cs typeface="Segoe UI" pitchFamily="34" charset="-120"/>
+              </a:rPr>
+              <a:t>555</a:t>
+            </a:r>
             <a:endParaRPr lang="en-US" sz="2200" dirty="0"/>
           </a:p>
         </p:txBody>
@@ -3028,9 +3364,20 @@
           <a:bodyPr wrap="square" rtlCol="0" anchor="t"/>
           <a:lstStyle/>
           <a:p>
-            <a:pPr marL="0" indent="0">
-              <a:buNone/>
-            </a:pPr>
+            <a:pPr indent="0" marL="0">
+              <a:buNone/>
+            </a:pPr>
+            <a:r>
+              <a:rPr lang="en-US" sz="850" spc="60" kern="0" dirty="0">
+                <a:solidFill>
+                  <a:srgbClr val="667085"/>
+                </a:solidFill>
+                <a:latin typeface="Segoe UI" pitchFamily="34" charset="0"/>
+                <a:ea typeface="Segoe UI" pitchFamily="34" charset="-122"/>
+                <a:cs typeface="Segoe UI" pitchFamily="34" charset="-120"/>
+              </a:rPr>
+              <a:t>TABLES, ONE SCHEMA</a:t>
+            </a:r>
             <a:endParaRPr lang="en-US" sz="850" dirty="0"/>
           </a:p>
         </p:txBody>
@@ -3076,7 +3423,7 @@
           <a:bodyPr wrap="square" rtlCol="0" anchor="ctr"/>
           <a:lstStyle/>
           <a:p>
-            <a:pPr marL="0" indent="0">
+            <a:pPr indent="0" marL="0">
               <a:buNone/>
             </a:pPr>
             <a:r>
@@ -3088,7 +3435,7 @@
                 <a:ea typeface="Segoe UI" pitchFamily="34" charset="-122"/>
                 <a:cs typeface="Segoe UI" pitchFamily="34" charset="-120"/>
               </a:rPr>
-              <a:t>68</a:t>
+              <a:t>70</a:t>
             </a:r>
             <a:endParaRPr lang="en-US" sz="2200" dirty="0"/>
           </a:p>
@@ -3115,11 +3462,11 @@
           <a:bodyPr wrap="square" rtlCol="0" anchor="t"/>
           <a:lstStyle/>
           <a:p>
-            <a:pPr marL="0" indent="0">
-              <a:buNone/>
-            </a:pPr>
-            <a:r>
-              <a:rPr lang="en-US" sz="850" kern="0" spc="60" dirty="0">
+            <a:pPr indent="0" marL="0">
+              <a:buNone/>
+            </a:pPr>
+            <a:r>
+              <a:rPr lang="en-US" sz="850" spc="60" kern="0" dirty="0">
                 <a:solidFill>
                   <a:srgbClr val="667085"/>
                 </a:solidFill>
@@ -3174,7 +3521,7 @@
           <a:bodyPr wrap="square" rtlCol="0" anchor="ctr"/>
           <a:lstStyle/>
           <a:p>
-            <a:pPr marL="0" indent="0">
+            <a:pPr indent="0" marL="0">
               <a:buNone/>
             </a:pPr>
             <a:r>
@@ -3186,7 +3533,7 @@
                 <a:ea typeface="Segoe UI" pitchFamily="34" charset="-122"/>
                 <a:cs typeface="Segoe UI" pitchFamily="34" charset="-120"/>
               </a:rPr>
-              <a:t>23</a:t>
+              <a:t>24</a:t>
             </a:r>
             <a:endParaRPr lang="en-US" sz="2200" dirty="0"/>
           </a:p>
@@ -3213,11 +3560,11 @@
           <a:bodyPr wrap="square" rtlCol="0" anchor="t"/>
           <a:lstStyle/>
           <a:p>
-            <a:pPr marL="0" indent="0">
-              <a:buNone/>
-            </a:pPr>
-            <a:r>
-              <a:rPr lang="en-US" sz="850" kern="0" spc="60" dirty="0">
+            <a:pPr indent="0" marL="0">
+              <a:buNone/>
+            </a:pPr>
+            <a:r>
+              <a:rPr lang="en-US" sz="850" spc="60" kern="0" dirty="0">
                 <a:solidFill>
                   <a:srgbClr val="667085"/>
                 </a:solidFill>
@@ -3292,7 +3639,7 @@
           <a:bodyPr wrap="square" rtlCol="0" anchor="ctr"/>
           <a:lstStyle/>
           <a:p>
-            <a:pPr marL="0" indent="0">
+            <a:pPr indent="0" marL="0">
               <a:buNone/>
             </a:pPr>
             <a:r>
@@ -3331,7 +3678,7 @@
           <a:bodyPr wrap="square" rtlCol="0" anchor="ctr"/>
           <a:lstStyle/>
           <a:p>
-            <a:pPr marL="0" indent="0" algn="r">
+            <a:pPr algn="r" indent="0" marL="0">
               <a:lnSpc>
                 <a:spcPct val="120000"/>
               </a:lnSpc>
@@ -3349,6 +3696,12 @@
               <a:t>Yeswanth Gottumukkala · Founder
 </a:t>
             </a:r>
+            <a:pPr algn="r" indent="0" marL="0">
+              <a:lnSpc>
+                <a:spcPct val="120000"/>
+              </a:lnSpc>
+              <a:buNone/>
+            </a:pPr>
             <a:r>
               <a:rPr lang="en-US" sz="950" dirty="0">
                 <a:solidFill>
@@ -3358,30 +3711,7 @@
                 <a:ea typeface="Segoe UI" pitchFamily="34" charset="-122"/>
                 <a:cs typeface="Segoe UI" pitchFamily="34" charset="-120"/>
               </a:rPr>
-              <a:t>9885447798·   </a:t>
-            </a:r>
-            <a:r>
-              <a:rPr lang="en-US" sz="950" dirty="0">
-                <a:solidFill>
-                  <a:srgbClr val="667085"/>
-                </a:solidFill>
-                <a:latin typeface="Segoe UI" pitchFamily="34" charset="0"/>
-                <a:ea typeface="Segoe UI" pitchFamily="34" charset="-122"/>
-                <a:cs typeface="Segoe UI" pitchFamily="34" charset="-120"/>
-                <a:hlinkClick r:id="rId4"/>
-              </a:rPr>
-              <a:t>aumrti94@gmail.com</a:t>
-            </a:r>
-            <a:r>
-              <a:rPr lang="en-US" sz="950" dirty="0">
-                <a:solidFill>
-                  <a:srgbClr val="667085"/>
-                </a:solidFill>
-                <a:latin typeface="Segoe UI" pitchFamily="34" charset="0"/>
-                <a:ea typeface="Segoe UI" pitchFamily="34" charset="-122"/>
-                <a:cs typeface="Segoe UI" pitchFamily="34" charset="-120"/>
-              </a:rPr>
-              <a:t> ·   www.aumrti.com</a:t>
+              <a:t>[ phone ]   ·   [ email ]   ·   www.aumrti.com</a:t>
             </a:r>
             <a:endParaRPr lang="en-US" sz="1050" dirty="0"/>
           </a:p>
@@ -3403,7 +3733,6 @@
         <a:solidFill>
           <a:srgbClr val="FFFFFF"/>
         </a:solidFill>
-        <a:effectLst/>
       </p:bgPr>
     </p:bg>
     <p:spTree>
@@ -3441,11 +3770,11 @@
           <a:bodyPr wrap="square" rtlCol="0" anchor="ctr"/>
           <a:lstStyle/>
           <a:p>
-            <a:pPr marL="0" indent="0">
-              <a:buNone/>
-            </a:pPr>
-            <a:r>
-              <a:rPr lang="en-US" sz="1000" b="1" kern="0" spc="120" dirty="0">
+            <a:pPr indent="0" marL="0">
+              <a:buNone/>
+            </a:pPr>
+            <a:r>
+              <a:rPr lang="en-US" sz="1000" b="1" spc="120" kern="0" dirty="0">
                 <a:solidFill>
                   <a:srgbClr val="1B305A"/>
                 </a:solidFill>
@@ -3480,11 +3809,11 @@
           <a:bodyPr wrap="square" rtlCol="0" anchor="ctr"/>
           <a:lstStyle/>
           <a:p>
-            <a:pPr marL="0" indent="0">
-              <a:buNone/>
-            </a:pPr>
-            <a:r>
-              <a:rPr lang="en-US" sz="850" b="1" kern="0" spc="160" dirty="0">
+            <a:pPr indent="0" marL="0">
+              <a:buNone/>
+            </a:pPr>
+            <a:r>
+              <a:rPr lang="en-US" sz="850" b="1" spc="160" kern="0" dirty="0">
                 <a:solidFill>
                   <a:srgbClr val="F5A310"/>
                 </a:solidFill>
@@ -3519,7 +3848,7 @@
           <a:bodyPr wrap="square" rtlCol="0" anchor="t"/>
           <a:lstStyle/>
           <a:p>
-            <a:pPr marL="0" indent="0">
+            <a:pPr indent="0" marL="0">
               <a:buNone/>
             </a:pPr>
             <a:r>
@@ -3598,7 +3927,7 @@
           <a:bodyPr wrap="square" rtlCol="0" anchor="t"/>
           <a:lstStyle/>
           <a:p>
-            <a:pPr marL="0" indent="0">
+            <a:pPr indent="0" marL="0">
               <a:lnSpc>
                 <a:spcPct val="120000"/>
               </a:lnSpc>
@@ -3660,7 +3989,7 @@
           <a:bodyPr wrap="square" rtlCol="0" anchor="ctr"/>
           <a:lstStyle/>
           <a:p>
-            <a:pPr marL="0" indent="0">
+            <a:pPr indent="0" marL="0">
               <a:buNone/>
             </a:pPr>
             <a:r>
@@ -3699,7 +4028,7 @@
           <a:bodyPr wrap="square" rtlCol="0" anchor="ctr"/>
           <a:lstStyle/>
           <a:p>
-            <a:pPr marL="0" indent="0" algn="ctr">
+            <a:pPr algn="ctr" indent="0" marL="0">
               <a:buNone/>
             </a:pPr>
             <a:r>
@@ -3738,7 +4067,7 @@
           <a:bodyPr wrap="square" rtlCol="0" anchor="ctr"/>
           <a:lstStyle/>
           <a:p>
-            <a:pPr marL="0" indent="0" algn="r">
+            <a:pPr algn="r" indent="0" marL="0">
               <a:buNone/>
             </a:pPr>
             <a:r>
@@ -3804,7 +4133,7 @@
           <a:bodyPr wrap="square" rtlCol="0" anchor="ctr"/>
           <a:lstStyle/>
           <a:p>
-            <a:pPr marL="0" indent="0">
+            <a:pPr indent="0" marL="0">
               <a:buNone/>
             </a:pPr>
             <a:r>
@@ -3843,7 +4172,7 @@
           <a:bodyPr wrap="square" rtlCol="0" anchor="t"/>
           <a:lstStyle/>
           <a:p>
-            <a:pPr marL="0" indent="0">
+            <a:pPr indent="0" marL="0">
               <a:buNone/>
             </a:pPr>
             <a:r>
@@ -3870,7 +4199,7 @@
         <p:spPr>
           <a:xfrm>
             <a:off x="768096" y="2849880"/>
-            <a:ext cx="3161690" cy="423672"/>
+            <a:ext cx="3161690" cy="359664"/>
           </a:xfrm>
           <a:prstGeom prst="rect">
             <a:avLst/>
@@ -3882,7 +4211,7 @@
           <a:bodyPr wrap="square" rtlCol="0" anchor="t"/>
           <a:lstStyle/>
           <a:p>
-            <a:pPr marL="0" indent="0">
+            <a:pPr indent="0" marL="0">
               <a:lnSpc>
                 <a:spcPct val="114000"/>
               </a:lnSpc>
@@ -3951,7 +4280,7 @@
           <a:bodyPr wrap="square" rtlCol="0" anchor="ctr"/>
           <a:lstStyle/>
           <a:p>
-            <a:pPr marL="0" indent="0">
+            <a:pPr indent="0" marL="0">
               <a:buNone/>
             </a:pPr>
             <a:r>
@@ -3990,7 +4319,7 @@
           <a:bodyPr wrap="square" rtlCol="0" anchor="t"/>
           <a:lstStyle/>
           <a:p>
-            <a:pPr marL="0" indent="0">
+            <a:pPr indent="0" marL="0">
               <a:buNone/>
             </a:pPr>
             <a:r>
@@ -4029,7 +4358,7 @@
           <a:bodyPr wrap="square" rtlCol="0" anchor="t"/>
           <a:lstStyle/>
           <a:p>
-            <a:pPr marL="0" indent="0">
+            <a:pPr indent="0" marL="0">
               <a:lnSpc>
                 <a:spcPct val="114000"/>
               </a:lnSpc>
@@ -4098,7 +4427,7 @@
           <a:bodyPr wrap="square" rtlCol="0" anchor="ctr"/>
           <a:lstStyle/>
           <a:p>
-            <a:pPr marL="0" indent="0">
+            <a:pPr indent="0" marL="0">
               <a:buNone/>
             </a:pPr>
             <a:r>
@@ -4137,7 +4466,7 @@
           <a:bodyPr wrap="square" rtlCol="0" anchor="t"/>
           <a:lstStyle/>
           <a:p>
-            <a:pPr marL="0" indent="0">
+            <a:pPr indent="0" marL="0">
               <a:buNone/>
             </a:pPr>
             <a:r>
@@ -4176,7 +4505,7 @@
           <a:bodyPr wrap="square" rtlCol="0" anchor="t"/>
           <a:lstStyle/>
           <a:p>
-            <a:pPr marL="0" indent="0">
+            <a:pPr indent="0" marL="0">
               <a:lnSpc>
                 <a:spcPct val="114000"/>
               </a:lnSpc>
@@ -4218,7 +4547,7 @@
           <a:bodyPr wrap="square" rtlCol="0" anchor="t"/>
           <a:lstStyle/>
           <a:p>
-            <a:pPr marL="0" indent="0">
+            <a:pPr indent="0" marL="0">
               <a:lnSpc>
                 <a:spcPct val="116000"/>
               </a:lnSpc>
@@ -4260,7 +4589,7 @@
           <a:bodyPr wrap="square" rtlCol="0" anchor="t"/>
           <a:lstStyle/>
           <a:p>
-            <a:pPr marL="0" indent="0">
+            <a:pPr indent="0" marL="0">
               <a:lnSpc>
                 <a:spcPct val="116000"/>
               </a:lnSpc>
@@ -4302,7 +4631,7 @@
           <a:bodyPr wrap="square" rtlCol="0" anchor="t"/>
           <a:lstStyle/>
           <a:p>
-            <a:pPr marL="0" indent="0">
+            <a:pPr indent="0" marL="0">
               <a:lnSpc>
                 <a:spcPct val="116000"/>
               </a:lnSpc>
@@ -4325,7 +4654,7 @@
       </p:sp>
       <p:graphicFrame>
         <p:nvGraphicFramePr>
-          <p:cNvPr id="27" name="Chart 0"/>
+          <p:cNvPr id="27" name="Chart 0" descr=""/>
           <p:cNvGraphicFramePr/>
           <p:nvPr/>
         </p:nvGraphicFramePr>
@@ -4333,9 +4662,9 @@
           <a:off x="566928" y="3931920"/>
           <a:ext cx="5577840" cy="1481328"/>
         </p:xfrm>
-        <a:graphic>
+        <a:graphic xmlns:a="http://schemas.openxmlformats.org/drawingml/2006/main">
           <a:graphicData uri="http://schemas.openxmlformats.org/drawingml/2006/chart">
-            <c:chart xmlns:c="http://schemas.openxmlformats.org/drawingml/2006/chart" xmlns:r="http://schemas.openxmlformats.org/officeDocument/2006/relationships" r:id="rId3"/>
+            <c:chart xmlns:c="http://schemas.openxmlformats.org/drawingml/2006/chart" r:id="rId1"/>
           </a:graphicData>
         </a:graphic>
       </p:graphicFrame>
@@ -4360,7 +4689,7 @@
           <a:bodyPr wrap="square" rtlCol="0" anchor="t"/>
           <a:lstStyle/>
           <a:p>
-            <a:pPr marL="0" indent="0">
+            <a:pPr indent="0" marL="0">
               <a:lnSpc>
                 <a:spcPct val="116000"/>
               </a:lnSpc>
@@ -4429,7 +4758,7 @@
           <a:bodyPr wrap="square" rtlCol="0" anchor="t"/>
           <a:lstStyle/>
           <a:p>
-            <a:pPr marL="0" indent="0">
+            <a:pPr indent="0" marL="0">
               <a:buNone/>
             </a:pPr>
             <a:r>
@@ -4581,7 +4910,6 @@
         <a:solidFill>
           <a:srgbClr val="FFFFFF"/>
         </a:solidFill>
-        <a:effectLst/>
       </p:bgPr>
     </p:bg>
     <p:spTree>
@@ -4619,11 +4947,11 @@
           <a:bodyPr wrap="square" rtlCol="0" anchor="ctr"/>
           <a:lstStyle/>
           <a:p>
-            <a:pPr marL="0" indent="0">
-              <a:buNone/>
-            </a:pPr>
-            <a:r>
-              <a:rPr lang="en-US" sz="1000" b="1" kern="0" spc="120" dirty="0">
+            <a:pPr indent="0" marL="0">
+              <a:buNone/>
+            </a:pPr>
+            <a:r>
+              <a:rPr lang="en-US" sz="1000" b="1" spc="120" kern="0" dirty="0">
                 <a:solidFill>
                   <a:srgbClr val="1B305A"/>
                 </a:solidFill>
@@ -4658,11 +4986,11 @@
           <a:bodyPr wrap="square" rtlCol="0" anchor="ctr"/>
           <a:lstStyle/>
           <a:p>
-            <a:pPr marL="0" indent="0">
-              <a:buNone/>
-            </a:pPr>
-            <a:r>
-              <a:rPr lang="en-US" sz="850" b="1" kern="0" spc="160" dirty="0">
+            <a:pPr indent="0" marL="0">
+              <a:buNone/>
+            </a:pPr>
+            <a:r>
+              <a:rPr lang="en-US" sz="850" b="1" spc="160" kern="0" dirty="0">
                 <a:solidFill>
                   <a:srgbClr val="F5A310"/>
                 </a:solidFill>
@@ -4697,7 +5025,7 @@
           <a:bodyPr wrap="square" rtlCol="0" anchor="t"/>
           <a:lstStyle/>
           <a:p>
-            <a:pPr marL="0" indent="0">
+            <a:pPr indent="0" marL="0">
               <a:buNone/>
             </a:pPr>
             <a:r>
@@ -4776,7 +5104,7 @@
           <a:bodyPr wrap="square" rtlCol="0" anchor="t"/>
           <a:lstStyle/>
           <a:p>
-            <a:pPr marL="0" indent="0">
+            <a:pPr indent="0" marL="0">
               <a:lnSpc>
                 <a:spcPct val="120000"/>
               </a:lnSpc>
@@ -4838,7 +5166,7 @@
           <a:bodyPr wrap="square" rtlCol="0" anchor="ctr"/>
           <a:lstStyle/>
           <a:p>
-            <a:pPr marL="0" indent="0">
+            <a:pPr indent="0" marL="0">
               <a:buNone/>
             </a:pPr>
             <a:r>
@@ -4877,7 +5205,7 @@
           <a:bodyPr wrap="square" rtlCol="0" anchor="ctr"/>
           <a:lstStyle/>
           <a:p>
-            <a:pPr marL="0" indent="0" algn="ctr">
+            <a:pPr algn="ctr" indent="0" marL="0">
               <a:buNone/>
             </a:pPr>
             <a:r>
@@ -4916,7 +5244,7 @@
           <a:bodyPr wrap="square" rtlCol="0" anchor="ctr"/>
           <a:lstStyle/>
           <a:p>
-            <a:pPr marL="0" indent="0" algn="r">
+            <a:pPr algn="r" indent="0" marL="0">
               <a:buNone/>
             </a:pPr>
             <a:r>
@@ -4982,11 +5310,11 @@
           <a:bodyPr wrap="square" rtlCol="0" anchor="ctr"/>
           <a:lstStyle/>
           <a:p>
-            <a:pPr marL="0" indent="0">
-              <a:buNone/>
-            </a:pPr>
-            <a:r>
-              <a:rPr lang="en-US" sz="840" b="1" kern="0" spc="160" dirty="0">
+            <a:pPr indent="0" marL="0">
+              <a:buNone/>
+            </a:pPr>
+            <a:r>
+              <a:rPr lang="en-US" sz="840" b="1" spc="160" kern="0" dirty="0">
                 <a:solidFill>
                   <a:srgbClr val="667085"/>
                 </a:solidFill>
@@ -5021,7 +5349,7 @@
           <a:bodyPr wrap="square" rtlCol="0" anchor="ctr"/>
           <a:lstStyle/>
           <a:p>
-            <a:pPr marL="0" indent="0">
+            <a:pPr indent="0" marL="0">
               <a:buNone/>
             </a:pPr>
             <a:r>
@@ -5033,7 +5361,7 @@
                 <a:ea typeface="Segoe UI" pitchFamily="34" charset="-122"/>
                 <a:cs typeface="Segoe UI" pitchFamily="34" charset="-120"/>
               </a:rPr>
-              <a:t>₹10,562 Cr / year</a:t>
+              <a:t>₹354 Cr / year</a:t>
             </a:r>
             <a:endParaRPr lang="en-US" sz="2000" dirty="0"/>
           </a:p>
@@ -5060,7 +5388,7 @@
           <a:bodyPr wrap="square" rtlCol="0" anchor="t"/>
           <a:lstStyle/>
           <a:p>
-            <a:pPr marL="0" indent="0">
+            <a:pPr indent="0" marL="0">
               <a:lnSpc>
                 <a:spcPct val="116000"/>
               </a:lnSpc>
@@ -5102,7 +5430,7 @@
           <a:bodyPr wrap="square" rtlCol="0" anchor="t"/>
           <a:lstStyle/>
           <a:p>
-            <a:pPr marL="0" indent="0">
+            <a:pPr indent="0" marL="0">
               <a:lnSpc>
                 <a:spcPct val="114000"/>
               </a:lnSpc>
@@ -5171,11 +5499,11 @@
           <a:bodyPr wrap="square" rtlCol="0" anchor="ctr"/>
           <a:lstStyle/>
           <a:p>
-            <a:pPr marL="0" indent="0">
-              <a:buNone/>
-            </a:pPr>
-            <a:r>
-              <a:rPr lang="en-US" sz="840" b="1" kern="0" spc="160" dirty="0">
+            <a:pPr indent="0" marL="0">
+              <a:buNone/>
+            </a:pPr>
+            <a:r>
+              <a:rPr lang="en-US" sz="840" b="1" spc="160" kern="0" dirty="0">
                 <a:solidFill>
                   <a:srgbClr val="667085"/>
                 </a:solidFill>
@@ -5210,7 +5538,7 @@
           <a:bodyPr wrap="square" rtlCol="0" anchor="ctr"/>
           <a:lstStyle/>
           <a:p>
-            <a:pPr marL="0" indent="0">
+            <a:pPr indent="0" marL="0">
               <a:buNone/>
             </a:pPr>
             <a:r>
@@ -5249,7 +5577,7 @@
           <a:bodyPr wrap="square" rtlCol="0" anchor="t"/>
           <a:lstStyle/>
           <a:p>
-            <a:pPr marL="0" indent="0">
+            <a:pPr indent="0" marL="0">
               <a:lnSpc>
                 <a:spcPct val="116000"/>
               </a:lnSpc>
@@ -5291,12 +5619,23 @@
           <a:bodyPr wrap="square" rtlCol="0" anchor="t"/>
           <a:lstStyle/>
           <a:p>
-            <a:pPr marL="0" indent="0">
+            <a:pPr indent="0" marL="0">
               <a:lnSpc>
                 <a:spcPct val="114000"/>
               </a:lnSpc>
               <a:buNone/>
             </a:pPr>
+            <a:r>
+              <a:rPr lang="en-US" sz="850" i="1" dirty="0">
+                <a:solidFill>
+                  <a:srgbClr val="98A2B3"/>
+                </a:solidFill>
+                <a:latin typeface="Segoe UI" pitchFamily="34" charset="0"/>
+                <a:ea typeface="Segoe UI" pitchFamily="34" charset="-122"/>
+                <a:cs typeface="Segoe UI" pitchFamily="34" charset="-120"/>
+              </a:rPr>
+              <a:t>Derived by population share — AP is ~3.7% of India — not surveyed. To be validated against the AP Clinical Establishments register.</a:t>
+            </a:r>
             <a:endParaRPr lang="en-US" sz="850" dirty="0"/>
           </a:p>
         </p:txBody>
@@ -5349,11 +5688,11 @@
           <a:bodyPr wrap="square" rtlCol="0" anchor="ctr"/>
           <a:lstStyle/>
           <a:p>
-            <a:pPr marL="0" indent="0">
-              <a:buNone/>
-            </a:pPr>
-            <a:r>
-              <a:rPr lang="en-US" sz="840" b="1" kern="0" spc="160" dirty="0">
+            <a:pPr indent="0" marL="0">
+              <a:buNone/>
+            </a:pPr>
+            <a:r>
+              <a:rPr lang="en-US" sz="840" b="1" spc="160" kern="0" dirty="0">
                 <a:solidFill>
                   <a:srgbClr val="667085"/>
                 </a:solidFill>
@@ -5388,7 +5727,7 @@
           <a:bodyPr wrap="square" rtlCol="0" anchor="ctr"/>
           <a:lstStyle/>
           <a:p>
-            <a:pPr marL="0" indent="0">
+            <a:pPr indent="0" marL="0">
               <a:buNone/>
             </a:pPr>
             <a:r>
@@ -5427,7 +5766,7 @@
           <a:bodyPr wrap="square" rtlCol="0" anchor="t"/>
           <a:lstStyle/>
           <a:p>
-            <a:pPr marL="0" indent="0">
+            <a:pPr indent="0" marL="0">
               <a:lnSpc>
                 <a:spcPct val="116000"/>
               </a:lnSpc>
@@ -5469,7 +5808,7 @@
           <a:bodyPr wrap="square" rtlCol="0" anchor="t"/>
           <a:lstStyle/>
           <a:p>
-            <a:pPr marL="0" indent="0">
+            <a:pPr indent="0" marL="0">
               <a:lnSpc>
                 <a:spcPct val="114000"/>
               </a:lnSpc>
@@ -5538,7 +5877,7 @@
           <a:bodyPr wrap="square" rtlCol="0" anchor="t"/>
           <a:lstStyle/>
           <a:p>
-            <a:pPr marL="0" indent="0">
+            <a:pPr indent="0" marL="0">
               <a:buNone/>
             </a:pPr>
             <a:r>
@@ -5620,7 +5959,7 @@
                 <a:ea typeface="Segoe UI" pitchFamily="34" charset="-122"/>
                 <a:cs typeface="Segoe UI" pitchFamily="34" charset="-120"/>
               </a:rPr>
-              <a:t>The promoter decides; the CFO tests it on claims </a:t>
+              <a:t>The promoter decides; the CFO tests it on claims and GST</a:t>
             </a:r>
             <a:endParaRPr lang="en-US" sz="1050" dirty="0"/>
           </a:p>
@@ -5722,7 +6061,7 @@
           <a:bodyPr wrap="square" rtlCol="0" anchor="t"/>
           <a:lstStyle/>
           <a:p>
-            <a:pPr marL="0" indent="0">
+            <a:pPr indent="0" marL="0">
               <a:buNone/>
             </a:pPr>
             <a:r>
@@ -5874,7 +6213,6 @@
         <a:solidFill>
           <a:srgbClr val="FFFFFF"/>
         </a:solidFill>
-        <a:effectLst/>
       </p:bgPr>
     </p:bg>
     <p:spTree>
@@ -5912,11 +6250,11 @@
           <a:bodyPr wrap="square" rtlCol="0" anchor="ctr"/>
           <a:lstStyle/>
           <a:p>
-            <a:pPr marL="0" indent="0">
-              <a:buNone/>
-            </a:pPr>
-            <a:r>
-              <a:rPr lang="en-US" sz="1000" b="1" kern="0" spc="120" dirty="0">
+            <a:pPr indent="0" marL="0">
+              <a:buNone/>
+            </a:pPr>
+            <a:r>
+              <a:rPr lang="en-US" sz="1000" b="1" spc="120" kern="0" dirty="0">
                 <a:solidFill>
                   <a:srgbClr val="1B305A"/>
                 </a:solidFill>
@@ -5951,11 +6289,11 @@
           <a:bodyPr wrap="square" rtlCol="0" anchor="ctr"/>
           <a:lstStyle/>
           <a:p>
-            <a:pPr marL="0" indent="0">
-              <a:buNone/>
-            </a:pPr>
-            <a:r>
-              <a:rPr lang="en-US" sz="850" b="1" kern="0" spc="160" dirty="0">
+            <a:pPr indent="0" marL="0">
+              <a:buNone/>
+            </a:pPr>
+            <a:r>
+              <a:rPr lang="en-US" sz="850" b="1" spc="160" kern="0" dirty="0">
                 <a:solidFill>
                   <a:srgbClr val="F5A310"/>
                 </a:solidFill>
@@ -5990,7 +6328,7 @@
           <a:bodyPr wrap="square" rtlCol="0" anchor="t"/>
           <a:lstStyle/>
           <a:p>
-            <a:pPr marL="0" indent="0">
+            <a:pPr indent="0" marL="0">
               <a:buNone/>
             </a:pPr>
             <a:r>
@@ -6002,7 +6340,7 @@
                 <a:ea typeface="Segoe UI" pitchFamily="34" charset="-122"/>
                 <a:cs typeface="Segoe UI" pitchFamily="34" charset="-120"/>
               </a:rPr>
-              <a:t>Built without funding. </a:t>
+              <a:t>Built without funding. The next stage cannot be.</a:t>
             </a:r>
             <a:endParaRPr lang="en-US" sz="2700" dirty="0"/>
           </a:p>
@@ -6069,7 +6407,7 @@
           <a:bodyPr wrap="square" rtlCol="0" anchor="t"/>
           <a:lstStyle/>
           <a:p>
-            <a:pPr marL="0" indent="0">
+            <a:pPr indent="0" marL="0">
               <a:lnSpc>
                 <a:spcPct val="120000"/>
               </a:lnSpc>
@@ -6131,7 +6469,7 @@
           <a:bodyPr wrap="square" rtlCol="0" anchor="ctr"/>
           <a:lstStyle/>
           <a:p>
-            <a:pPr marL="0" indent="0">
+            <a:pPr indent="0" marL="0">
               <a:buNone/>
             </a:pPr>
             <a:r>
@@ -6170,7 +6508,7 @@
           <a:bodyPr wrap="square" rtlCol="0" anchor="ctr"/>
           <a:lstStyle/>
           <a:p>
-            <a:pPr marL="0" indent="0" algn="ctr">
+            <a:pPr algn="ctr" indent="0" marL="0">
               <a:buNone/>
             </a:pPr>
             <a:r>
@@ -6209,7 +6547,7 @@
           <a:bodyPr wrap="square" rtlCol="0" anchor="ctr"/>
           <a:lstStyle/>
           <a:p>
-            <a:pPr marL="0" indent="0" algn="r">
+            <a:pPr algn="r" indent="0" marL="0">
               <a:buNone/>
             </a:pPr>
             <a:r>
@@ -6275,7 +6613,7 @@
           <a:bodyPr wrap="square" rtlCol="0" anchor="t"/>
           <a:lstStyle/>
           <a:p>
-            <a:pPr marL="0" indent="0">
+            <a:pPr indent="0" marL="0">
               <a:buNone/>
             </a:pPr>
             <a:r>
@@ -6333,18 +6671,7 @@
                 <a:ea typeface="Segoe UI" pitchFamily="34" charset="-122"/>
                 <a:cs typeface="Segoe UI" pitchFamily="34" charset="-120"/>
               </a:rPr>
-              <a:t>61 hospital modules built on </a:t>
-            </a:r>
-            <a:r>
-              <a:rPr lang="en-US" sz="1050">
-                <a:solidFill>
-                  <a:srgbClr val="667085"/>
-                </a:solidFill>
-                <a:latin typeface="Segoe UI" pitchFamily="34" charset="0"/>
-                <a:ea typeface="Segoe UI" pitchFamily="34" charset="-122"/>
-                <a:cs typeface="Segoe UI" pitchFamily="34" charset="-120"/>
-              </a:rPr>
-              <a:t>one schema</a:t>
+              <a:t>61 hospital modules built on one schema — 555 tables, 107 server functions</a:t>
             </a:r>
             <a:endParaRPr lang="en-US" sz="1050" dirty="0"/>
           </a:p>
@@ -6368,7 +6695,7 @@
                 <a:ea typeface="Segoe UI" pitchFamily="34" charset="-122"/>
                 <a:cs typeface="Segoe UI" pitchFamily="34" charset="-120"/>
               </a:rPr>
-              <a:t>68 AI features wired in, with a deterministic clinical safety layer beneath them</a:t>
+              <a:t>70 AI features wired in, with a deterministic clinical safety layer beneath them</a:t>
             </a:r>
             <a:endParaRPr lang="en-US" sz="1050" dirty="0"/>
           </a:p>
@@ -6421,7 +6748,7 @@
             <a:endParaRPr lang="en-US" sz="1050" dirty="0"/>
           </a:p>
           <a:p>
-            <a:pPr>
+            <a:pPr marL="152400" indent="-152400">
               <a:lnSpc>
                 <a:spcPct val="120000"/>
               </a:lnSpc>
@@ -6429,7 +6756,19 @@
                 <a:spcPts val="400"/>
               </a:spcAft>
               <a:buSzPct val="100000"/>
-            </a:pPr>
+              <a:buChar char="•"/>
+            </a:pPr>
+            <a:r>
+              <a:rPr lang="en-US" sz="1050" dirty="0">
+                <a:solidFill>
+                  <a:srgbClr val="667085"/>
+                </a:solidFill>
+                <a:latin typeface="Segoe UI" pitchFamily="34" charset="0"/>
+                <a:ea typeface="Segoe UI" pitchFamily="34" charset="-122"/>
+                <a:cs typeface="Segoe UI" pitchFamily="34" charset="-120"/>
+              </a:rPr>
+              <a:t>MSME (Udyam) registered — [ Udyam number ]</a:t>
+            </a:r>
             <a:endParaRPr lang="en-US" sz="1050" dirty="0"/>
           </a:p>
         </p:txBody>
@@ -6482,7 +6821,7 @@
           <a:bodyPr wrap="square" rtlCol="0" anchor="t"/>
           <a:lstStyle/>
           <a:p>
-            <a:pPr marL="0" indent="0">
+            <a:pPr indent="0" marL="0">
               <a:buNone/>
             </a:pPr>
             <a:r>
@@ -6521,7 +6860,7 @@
           <a:bodyPr wrap="square" rtlCol="0" anchor="t"/>
           <a:lstStyle/>
           <a:p>
-            <a:pPr marL="0" indent="0">
+            <a:pPr indent="0" marL="0">
               <a:lnSpc>
                 <a:spcPct val="114000"/>
               </a:lnSpc>
@@ -6590,7 +6929,7 @@
           <a:bodyPr wrap="square" rtlCol="0" anchor="t"/>
           <a:lstStyle/>
           <a:p>
-            <a:pPr marL="0" indent="0">
+            <a:pPr indent="0" marL="0">
               <a:buNone/>
             </a:pPr>
             <a:r>
@@ -6629,7 +6968,7 @@
           <a:bodyPr wrap="square" rtlCol="0" anchor="t"/>
           <a:lstStyle/>
           <a:p>
-            <a:pPr marL="0" indent="0">
+            <a:pPr indent="0" marL="0">
               <a:lnSpc>
                 <a:spcPct val="114000"/>
               </a:lnSpc>
@@ -6698,7 +7037,7 @@
           <a:bodyPr wrap="square" rtlCol="0" anchor="t"/>
           <a:lstStyle/>
           <a:p>
-            <a:pPr marL="0" indent="0">
+            <a:pPr indent="0" marL="0">
               <a:buNone/>
             </a:pPr>
             <a:r>
@@ -6737,7 +7076,7 @@
           <a:bodyPr wrap="square" rtlCol="0" anchor="t"/>
           <a:lstStyle/>
           <a:p>
-            <a:pPr marL="0" indent="0">
+            <a:pPr indent="0" marL="0">
               <a:lnSpc>
                 <a:spcPct val="114000"/>
               </a:lnSpc>
@@ -6806,7 +7145,7 @@
           <a:bodyPr wrap="square" rtlCol="0" anchor="t"/>
           <a:lstStyle/>
           <a:p>
-            <a:pPr marL="0" indent="0">
+            <a:pPr indent="0" marL="0">
               <a:buNone/>
             </a:pPr>
             <a:r>
@@ -6845,7 +7184,7 @@
           <a:bodyPr wrap="square" rtlCol="0" anchor="t"/>
           <a:lstStyle/>
           <a:p>
-            <a:pPr marL="0" indent="0">
+            <a:pPr indent="0" marL="0">
               <a:lnSpc>
                 <a:spcPct val="114000"/>
               </a:lnSpc>
@@ -6882,7 +7221,6 @@
         <a:solidFill>
           <a:srgbClr val="FFFFFF"/>
         </a:solidFill>
-        <a:effectLst/>
       </p:bgPr>
     </p:bg>
     <p:spTree>
@@ -6920,11 +7258,11 @@
           <a:bodyPr wrap="square" rtlCol="0" anchor="ctr"/>
           <a:lstStyle/>
           <a:p>
-            <a:pPr marL="0" indent="0">
-              <a:buNone/>
-            </a:pPr>
-            <a:r>
-              <a:rPr lang="en-US" sz="1000" b="1" kern="0" spc="120" dirty="0">
+            <a:pPr indent="0" marL="0">
+              <a:buNone/>
+            </a:pPr>
+            <a:r>
+              <a:rPr lang="en-US" sz="1000" b="1" spc="120" kern="0" dirty="0">
                 <a:solidFill>
                   <a:srgbClr val="1B305A"/>
                 </a:solidFill>
@@ -6959,11 +7297,11 @@
           <a:bodyPr wrap="square" rtlCol="0" anchor="ctr"/>
           <a:lstStyle/>
           <a:p>
-            <a:pPr marL="0" indent="0">
-              <a:buNone/>
-            </a:pPr>
-            <a:r>
-              <a:rPr lang="en-US" sz="850" b="1" kern="0" spc="160" dirty="0">
+            <a:pPr indent="0" marL="0">
+              <a:buNone/>
+            </a:pPr>
+            <a:r>
+              <a:rPr lang="en-US" sz="850" b="1" spc="160" kern="0" dirty="0">
                 <a:solidFill>
                   <a:srgbClr val="F5A310"/>
                 </a:solidFill>
@@ -6998,7 +7336,7 @@
           <a:bodyPr wrap="square" rtlCol="0" anchor="t"/>
           <a:lstStyle/>
           <a:p>
-            <a:pPr marL="0" indent="0">
+            <a:pPr indent="0" marL="0">
               <a:buNone/>
             </a:pPr>
             <a:r>
@@ -7077,7 +7415,7 @@
           <a:bodyPr wrap="square" rtlCol="0" anchor="t"/>
           <a:lstStyle/>
           <a:p>
-            <a:pPr marL="0" indent="0">
+            <a:pPr indent="0" marL="0">
               <a:lnSpc>
                 <a:spcPct val="120000"/>
               </a:lnSpc>
@@ -7092,7 +7430,7 @@
                 <a:ea typeface="Segoe UI" pitchFamily="34" charset="-122"/>
                 <a:cs typeface="Segoe UI" pitchFamily="34" charset="-120"/>
               </a:rPr>
-              <a:t>Each of these was in an earlier draft and was cut because the codebase does not support it. They are listed rather than deleted — a panel that finds them should find we found them first.</a:t>
+              <a:t>Each was in an earlier draft and cut because the codebase does not support it. Listed rather than deleted.</a:t>
             </a:r>
             <a:endParaRPr lang="en-US" sz="1150" dirty="0"/>
           </a:p>
@@ -7139,7 +7477,7 @@
           <a:bodyPr wrap="square" rtlCol="0" anchor="ctr"/>
           <a:lstStyle/>
           <a:p>
-            <a:pPr marL="0" indent="0">
+            <a:pPr indent="0" marL="0">
               <a:buNone/>
             </a:pPr>
             <a:r>
@@ -7178,7 +7516,7 @@
           <a:bodyPr wrap="square" rtlCol="0" anchor="ctr"/>
           <a:lstStyle/>
           <a:p>
-            <a:pPr marL="0" indent="0" algn="ctr">
+            <a:pPr algn="ctr" indent="0" marL="0">
               <a:buNone/>
             </a:pPr>
             <a:r>
@@ -7217,7 +7555,7 @@
           <a:bodyPr wrap="square" rtlCol="0" anchor="ctr"/>
           <a:lstStyle/>
           <a:p>
-            <a:pPr marL="0" indent="0" algn="r">
+            <a:pPr algn="r" indent="0" marL="0">
               <a:buNone/>
             </a:pPr>
             <a:r>
@@ -7283,7 +7621,7 @@
           <a:bodyPr wrap="square" rtlCol="0" anchor="t"/>
           <a:lstStyle/>
           <a:p>
-            <a:pPr marL="0" indent="0">
+            <a:pPr indent="0" marL="0">
               <a:buNone/>
             </a:pPr>
             <a:r>
@@ -7322,7 +7660,7 @@
           <a:bodyPr wrap="square" rtlCol="0" anchor="t"/>
           <a:lstStyle/>
           <a:p>
-            <a:pPr marL="0" indent="0">
+            <a:pPr indent="0" marL="0">
               <a:lnSpc>
                 <a:spcPct val="114000"/>
               </a:lnSpc>
@@ -7391,7 +7729,7 @@
           <a:bodyPr wrap="square" rtlCol="0" anchor="t"/>
           <a:lstStyle/>
           <a:p>
-            <a:pPr marL="0" indent="0">
+            <a:pPr indent="0" marL="0">
               <a:buNone/>
             </a:pPr>
             <a:r>
@@ -7430,7 +7768,7 @@
           <a:bodyPr wrap="square" rtlCol="0" anchor="t"/>
           <a:lstStyle/>
           <a:p>
-            <a:pPr marL="0" indent="0">
+            <a:pPr indent="0" marL="0">
               <a:lnSpc>
                 <a:spcPct val="114000"/>
               </a:lnSpc>
@@ -7499,7 +7837,7 @@
           <a:bodyPr wrap="square" rtlCol="0" anchor="t"/>
           <a:lstStyle/>
           <a:p>
-            <a:pPr marL="0" indent="0">
+            <a:pPr indent="0" marL="0">
               <a:buNone/>
             </a:pPr>
             <a:r>
@@ -7538,7 +7876,7 @@
           <a:bodyPr wrap="square" rtlCol="0" anchor="t"/>
           <a:lstStyle/>
           <a:p>
-            <a:pPr marL="0" indent="0">
+            <a:pPr indent="0" marL="0">
               <a:lnSpc>
                 <a:spcPct val="114000"/>
               </a:lnSpc>
@@ -7607,7 +7945,7 @@
           <a:bodyPr wrap="square" rtlCol="0" anchor="t"/>
           <a:lstStyle/>
           <a:p>
-            <a:pPr marL="0" indent="0">
+            <a:pPr indent="0" marL="0">
               <a:buNone/>
             </a:pPr>
             <a:r>
@@ -7646,7 +7984,7 @@
           <a:bodyPr wrap="square" rtlCol="0" anchor="t"/>
           <a:lstStyle/>
           <a:p>
-            <a:pPr marL="0" indent="0">
+            <a:pPr indent="0" marL="0">
               <a:lnSpc>
                 <a:spcPct val="114000"/>
               </a:lnSpc>
@@ -7715,7 +8053,7 @@
           <a:bodyPr wrap="square" rtlCol="0" anchor="ctr"/>
           <a:lstStyle/>
           <a:p>
-            <a:pPr marL="0" indent="0">
+            <a:pPr indent="0" marL="0">
               <a:lnSpc>
                 <a:spcPct val="118000"/>
               </a:lnSpc>
@@ -7752,7 +8090,6 @@
         <a:solidFill>
           <a:srgbClr val="FFFFFF"/>
         </a:solidFill>
-        <a:effectLst/>
       </p:bgPr>
     </p:bg>
     <p:spTree>
@@ -7790,11 +8127,11 @@
           <a:bodyPr wrap="square" rtlCol="0" anchor="ctr"/>
           <a:lstStyle/>
           <a:p>
-            <a:pPr marL="0" indent="0">
-              <a:buNone/>
-            </a:pPr>
-            <a:r>
-              <a:rPr lang="en-US" sz="1000" b="1" kern="0" spc="120" dirty="0">
+            <a:pPr indent="0" marL="0">
+              <a:buNone/>
+            </a:pPr>
+            <a:r>
+              <a:rPr lang="en-US" sz="1000" b="1" spc="120" kern="0" dirty="0">
                 <a:solidFill>
                   <a:srgbClr val="1B305A"/>
                 </a:solidFill>
@@ -7829,11 +8166,11 @@
           <a:bodyPr wrap="square" rtlCol="0" anchor="ctr"/>
           <a:lstStyle/>
           <a:p>
-            <a:pPr marL="0" indent="0">
-              <a:buNone/>
-            </a:pPr>
-            <a:r>
-              <a:rPr lang="en-US" sz="850" b="1" kern="0" spc="160" dirty="0">
+            <a:pPr indent="0" marL="0">
+              <a:buNone/>
+            </a:pPr>
+            <a:r>
+              <a:rPr lang="en-US" sz="850" b="1" spc="160" kern="0" dirty="0">
                 <a:solidFill>
                   <a:srgbClr val="F5A310"/>
                 </a:solidFill>
@@ -7841,7 +8178,7 @@
                 <a:ea typeface="Segoe UI" pitchFamily="34" charset="-122"/>
                 <a:cs typeface="Segoe UI" pitchFamily="34" charset="-120"/>
               </a:rPr>
-              <a:t>TEAMAND THE ASK</a:t>
+              <a:t>TEAM, FUNDING SO FAR, AND THE ASK</a:t>
             </a:r>
             <a:endParaRPr lang="en-US" sz="850" dirty="0"/>
           </a:p>
@@ -7868,7 +8205,7 @@
           <a:bodyPr wrap="square" rtlCol="0" anchor="t"/>
           <a:lstStyle/>
           <a:p>
-            <a:pPr marL="0" indent="0">
+            <a:pPr indent="0" marL="0">
               <a:buNone/>
             </a:pPr>
             <a:r>
@@ -7967,7 +8304,7 @@
           <a:bodyPr wrap="square" rtlCol="0" anchor="ctr"/>
           <a:lstStyle/>
           <a:p>
-            <a:pPr marL="0" indent="0">
+            <a:pPr indent="0" marL="0">
               <a:buNone/>
             </a:pPr>
             <a:r>
@@ -8006,7 +8343,7 @@
           <a:bodyPr wrap="square" rtlCol="0" anchor="ctr"/>
           <a:lstStyle/>
           <a:p>
-            <a:pPr marL="0" indent="0" algn="ctr">
+            <a:pPr algn="ctr" indent="0" marL="0">
               <a:buNone/>
             </a:pPr>
             <a:r>
@@ -8045,7 +8382,7 @@
           <a:bodyPr wrap="square" rtlCol="0" anchor="ctr"/>
           <a:lstStyle/>
           <a:p>
-            <a:pPr marL="0" indent="0" algn="r">
+            <a:pPr algn="r" indent="0" marL="0">
               <a:buNone/>
             </a:pPr>
             <a:r>
@@ -8089,13 +8426,6 @@
             <a:prstDash val="solid"/>
           </a:ln>
         </p:spPr>
-        <p:txBody>
-          <a:bodyPr/>
-          <a:lstStyle/>
-          <a:p>
-            <a:endParaRPr lang="en-IN" dirty="0"/>
-          </a:p>
-        </p:txBody>
       </p:sp>
       <p:sp>
         <p:nvSpPr>
@@ -8118,7 +8448,7 @@
           <a:bodyPr wrap="square" rtlCol="0" anchor="t"/>
           <a:lstStyle/>
           <a:p>
-            <a:pPr marL="0" indent="0">
+            <a:pPr indent="0" marL="0">
               <a:buNone/>
             </a:pPr>
             <a:r>
@@ -8145,7 +8475,7 @@
         <p:spPr>
           <a:xfrm>
             <a:off x="786384" y="2139696"/>
-            <a:ext cx="4910328" cy="384048"/>
+            <a:ext cx="4910328" cy="713232"/>
           </a:xfrm>
           <a:prstGeom prst="rect">
             <a:avLst/>
@@ -8157,7 +8487,7 @@
           <a:bodyPr wrap="square" rtlCol="0" anchor="t"/>
           <a:lstStyle/>
           <a:p>
-            <a:pPr marL="0" indent="0">
+            <a:pPr indent="0" marL="0">
               <a:lnSpc>
                 <a:spcPct val="116000"/>
               </a:lnSpc>
@@ -8172,7 +8502,7 @@
                 <a:ea typeface="Segoe UI" pitchFamily="34" charset="-122"/>
                 <a:cs typeface="Segoe UI" pitchFamily="34" charset="-120"/>
               </a:rPr>
-              <a:t>Problem discovery, product direction, full-stack engineering, AI workflow design and compliance surfaces. Architected and built end to end a solo founder</a:t>
+              <a:t>Problem discovery, product direction, full-stack engineering, AI workflow design and compliance surfaces. Architected and built end to end by one person — 301k lines across 61 modules.</a:t>
             </a:r>
             <a:endParaRPr lang="en-US" sz="1050" dirty="0"/>
           </a:p>
@@ -8199,9 +8529,20 @@
           <a:bodyPr wrap="square" rtlCol="0" anchor="ctr"/>
           <a:lstStyle/>
           <a:p>
-            <a:pPr marL="0" indent="0">
-              <a:buNone/>
-            </a:pPr>
+            <a:pPr indent="0" marL="0">
+              <a:buNone/>
+            </a:pPr>
+            <a:r>
+              <a:rPr lang="en-US" sz="850" dirty="0">
+                <a:solidFill>
+                  <a:srgbClr val="F5A310"/>
+                </a:solidFill>
+                <a:latin typeface="Segoe UI" pitchFamily="34" charset="0"/>
+                <a:ea typeface="Segoe UI" pitchFamily="34" charset="-122"/>
+                <a:cs typeface="Segoe UI" pitchFamily="34" charset="-120"/>
+              </a:rPr>
+              <a:t>[ degree / prior company ] · [ years of experience ] · [ months full-time ]</a:t>
+            </a:r>
             <a:endParaRPr lang="en-US" sz="850" dirty="0"/>
           </a:p>
         </p:txBody>
@@ -8254,7 +8595,7 @@
           <a:bodyPr wrap="square" rtlCol="0" anchor="t"/>
           <a:lstStyle/>
           <a:p>
-            <a:pPr marL="0" indent="0">
+            <a:pPr indent="0" marL="0">
               <a:buNone/>
             </a:pPr>
             <a:r>
@@ -8414,7 +8755,7 @@
           <a:bodyPr wrap="square" rtlCol="0" anchor="t"/>
           <a:lstStyle/>
           <a:p>
-            <a:pPr marL="0" indent="0">
+            <a:pPr indent="0" marL="0">
               <a:buNone/>
             </a:pPr>
             <a:r>
@@ -8441,7 +8782,7 @@
         <p:spPr>
           <a:xfrm>
             <a:off x="786384" y="5248656"/>
-            <a:ext cx="4910328" cy="762610"/>
+            <a:ext cx="4910328" cy="640080"/>
           </a:xfrm>
           <a:prstGeom prst="rect">
             <a:avLst/>
@@ -8472,7 +8813,7 @@
                 <a:ea typeface="Segoe UI" pitchFamily="34" charset="-122"/>
                 <a:cs typeface="Segoe UI" pitchFamily="34" charset="-120"/>
               </a:rPr>
-              <a:t>Self-funded —  personal capital , no external investment</a:t>
+              <a:t>Self-funded — [ personal capital ], no external investment</a:t>
             </a:r>
             <a:endParaRPr lang="en-US" sz="1050" dirty="0"/>
           </a:p>
@@ -8496,8 +8837,9 @@
                 <a:ea typeface="Segoe UI" pitchFamily="34" charset="-122"/>
                 <a:cs typeface="Segoe UI" pitchFamily="34" charset="-120"/>
               </a:rPr>
-              <a:t>Incorporation planned </a:t>
-            </a:r>
+              <a:t>MSME (Udyam) registered; incorporation planned alongside incubation</a:t>
+            </a:r>
+            <a:endParaRPr lang="en-US" sz="1050" dirty="0"/>
           </a:p>
           <a:p>
             <a:pPr marL="152400" indent="-152400">
@@ -8573,7 +8915,7 @@
           <a:bodyPr wrap="square" rtlCol="0" anchor="t"/>
           <a:lstStyle/>
           <a:p>
-            <a:pPr marL="0" indent="0">
+            <a:pPr indent="0" marL="0">
               <a:buNone/>
             </a:pPr>
             <a:r>
@@ -8612,7 +8954,7 @@
           <a:bodyPr wrap="square" rtlCol="0" anchor="ctr"/>
           <a:lstStyle/>
           <a:p>
-            <a:pPr marL="0" indent="0">
+            <a:pPr indent="0" marL="0">
               <a:buNone/>
             </a:pPr>
             <a:r>
@@ -8624,7 +8966,7 @@
                 <a:ea typeface="Segoe UI" pitchFamily="34" charset="-122"/>
                 <a:cs typeface="Segoe UI" pitchFamily="34" charset="-120"/>
               </a:rPr>
-              <a:t>₹15 Lakh</a:t>
+              <a:t>₹1 crore</a:t>
             </a:r>
             <a:endParaRPr lang="en-US" sz="3000" dirty="0"/>
           </a:p>
@@ -8651,7 +8993,7 @@
           <a:bodyPr wrap="square" rtlCol="0" anchor="ctr"/>
           <a:lstStyle/>
           <a:p>
-            <a:pPr marL="0" indent="0">
+            <a:pPr indent="0" marL="0">
               <a:buNone/>
             </a:pPr>
             <a:r>
@@ -8663,7 +9005,7 @@
                 <a:ea typeface="Segoe UI" pitchFamily="34" charset="-122"/>
                 <a:cs typeface="Segoe UI" pitchFamily="34" charset="-120"/>
               </a:rPr>
-              <a:t>6-month runway</a:t>
+              <a:t>18-month runway</a:t>
             </a:r>
             <a:endParaRPr lang="en-US" sz="1050" dirty="0"/>
           </a:p>
@@ -8757,7 +9099,7 @@
                 <a:ea typeface="Segoe UI" pitchFamily="34" charset="-122"/>
                 <a:cs typeface="Segoe UI" pitchFamily="34" charset="-120"/>
               </a:rPr>
-              <a:t>Grant support for the first three hires and platform hardening</a:t>
+              <a:t>Seed or grant support for the first three hires and platform hardening</a:t>
             </a:r>
             <a:endParaRPr lang="en-US" sz="1050" dirty="0"/>
           </a:p>
@@ -8784,11 +9126,11 @@
           <a:bodyPr wrap="square" rtlCol="0" anchor="ctr"/>
           <a:lstStyle/>
           <a:p>
-            <a:pPr marL="0" indent="0">
-              <a:buNone/>
-            </a:pPr>
-            <a:r>
-              <a:rPr lang="en-US" sz="800" b="1" kern="0" spc="160" dirty="0">
+            <a:pPr indent="0" marL="0">
+              <a:buNone/>
+            </a:pPr>
+            <a:r>
+              <a:rPr lang="en-US" sz="800" b="1" spc="160" kern="0" dirty="0">
                 <a:solidFill>
                   <a:srgbClr val="667085"/>
                 </a:solidFill>
@@ -8823,7 +9165,7 @@
           <a:bodyPr wrap="square" rtlCol="0" anchor="ctr"/>
           <a:lstStyle/>
           <a:p>
-            <a:pPr marL="0" indent="0">
+            <a:pPr indent="0" marL="0">
               <a:buNone/>
             </a:pPr>
             <a:r>
@@ -8862,7 +9204,7 @@
           <a:bodyPr wrap="square" rtlCol="0" anchor="ctr"/>
           <a:lstStyle/>
           <a:p>
-            <a:pPr marL="0" indent="0" algn="r">
+            <a:pPr algn="r" indent="0" marL="0">
               <a:buNone/>
             </a:pPr>
             <a:r>
@@ -8941,7 +9283,7 @@
           <a:bodyPr wrap="square" rtlCol="0" anchor="ctr"/>
           <a:lstStyle/>
           <a:p>
-            <a:pPr marL="0" indent="0">
+            <a:pPr indent="0" marL="0">
               <a:buNone/>
             </a:pPr>
             <a:r>
@@ -8980,7 +9322,7 @@
           <a:bodyPr wrap="square" rtlCol="0" anchor="ctr"/>
           <a:lstStyle/>
           <a:p>
-            <a:pPr marL="0" indent="0" algn="r">
+            <a:pPr algn="r" indent="0" marL="0">
               <a:buNone/>
             </a:pPr>
             <a:r>
@@ -9059,7 +9401,7 @@
           <a:bodyPr wrap="square" rtlCol="0" anchor="ctr"/>
           <a:lstStyle/>
           <a:p>
-            <a:pPr marL="0" indent="0">
+            <a:pPr indent="0" marL="0">
               <a:buNone/>
             </a:pPr>
             <a:r>
@@ -9098,7 +9440,7 @@
           <a:bodyPr wrap="square" rtlCol="0" anchor="ctr"/>
           <a:lstStyle/>
           <a:p>
-            <a:pPr marL="0" indent="0" algn="r">
+            <a:pPr algn="r" indent="0" marL="0">
               <a:buNone/>
             </a:pPr>
             <a:r>
@@ -9177,7 +9519,7 @@
           <a:bodyPr wrap="square" rtlCol="0" anchor="ctr"/>
           <a:lstStyle/>
           <a:p>
-            <a:pPr marL="0" indent="0">
+            <a:pPr indent="0" marL="0">
               <a:buNone/>
             </a:pPr>
             <a:r>
@@ -9216,7 +9558,7 @@
           <a:bodyPr wrap="square" rtlCol="0" anchor="ctr"/>
           <a:lstStyle/>
           <a:p>
-            <a:pPr marL="0" indent="0" algn="r">
+            <a:pPr algn="r" indent="0" marL="0">
               <a:buNone/>
             </a:pPr>
             <a:r>
@@ -9295,7 +9637,7 @@
           <a:bodyPr wrap="square" rtlCol="0" anchor="t"/>
           <a:lstStyle/>
           <a:p>
-            <a:pPr marL="0" indent="0">
+            <a:pPr indent="0" marL="0">
               <a:lnSpc>
                 <a:spcPct val="116000"/>
               </a:lnSpc>
@@ -9310,65 +9652,9 @@
                 <a:ea typeface="Segoe UI" pitchFamily="34" charset="-122"/>
                 <a:cs typeface="Segoe UI" pitchFamily="34" charset="-120"/>
               </a:rPr>
-              <a:t>From an 6-month budget: three loaded salaries, on-site go-live at three pilot sites, ABDM certification, an independent security review, and inference at pilot volume.</a:t>
+              <a:t>From an 18-month budget: three loaded salaries, on-site go-live at three pilot sites, ABDM certification, an independent security review, and inference at pilot volume.</a:t>
             </a:r>
             <a:endParaRPr lang="en-US" sz="850" dirty="0"/>
-          </a:p>
-        </p:txBody>
-      </p:sp>
-      <p:sp>
-        <p:nvSpPr>
-          <p:cNvPr id="44" name="Text 10">
-            <a:extLst>
-              <a:ext uri="{FF2B5EF4-FFF2-40B4-BE49-F238E27FC236}">
-                <a16:creationId xmlns:a16="http://schemas.microsoft.com/office/drawing/2014/main" id="{0D66E43C-C028-3906-E421-21418420324D}"/>
-              </a:ext>
-            </a:extLst>
-          </p:cNvPr>
-          <p:cNvSpPr/>
-          <p:nvPr/>
-        </p:nvSpPr>
-        <p:spPr>
-          <a:xfrm>
-            <a:off x="804977" y="2623768"/>
-            <a:ext cx="4910328" cy="256032"/>
-          </a:xfrm>
-          <a:prstGeom prst="rect">
-            <a:avLst/>
-          </a:prstGeom>
-          <a:noFill/>
-          <a:ln/>
-        </p:spPr>
-        <p:txBody>
-          <a:bodyPr wrap="square" rtlCol="0" anchor="t"/>
-          <a:lstStyle/>
-          <a:p>
-            <a:pPr marL="0" indent="0">
-              <a:buNone/>
-            </a:pPr>
-            <a:r>
-              <a:rPr lang="en-US" sz="1300" b="1" dirty="0" err="1">
-                <a:solidFill>
-                  <a:srgbClr val="1B305A"/>
-                </a:solidFill>
-                <a:latin typeface="Segoe UI" pitchFamily="34" charset="0"/>
-                <a:ea typeface="Segoe UI" pitchFamily="34" charset="-122"/>
-                <a:cs typeface="Segoe UI" pitchFamily="34" charset="-120"/>
-              </a:rPr>
-              <a:t>Dr.Vikram</a:t>
-            </a:r>
-            <a:r>
-              <a:rPr lang="en-US" sz="1300" b="1" dirty="0">
-                <a:solidFill>
-                  <a:srgbClr val="1B305A"/>
-                </a:solidFill>
-                <a:latin typeface="Segoe UI" pitchFamily="34" charset="0"/>
-                <a:ea typeface="Segoe UI" pitchFamily="34" charset="-122"/>
-                <a:cs typeface="Segoe UI" pitchFamily="34" charset="-120"/>
-              </a:rPr>
-              <a:t> P — Guide</a:t>
-            </a:r>
-            <a:endParaRPr lang="en-US" sz="1300" dirty="0"/>
           </a:p>
         </p:txBody>
       </p:sp>
@@ -9388,7 +9674,6 @@
         <a:solidFill>
           <a:srgbClr val="FFFFFF"/>
         </a:solidFill>
-        <a:effectLst/>
       </p:bgPr>
     </p:bg>
     <p:spTree>
@@ -9426,11 +9711,11 @@
           <a:bodyPr wrap="square" rtlCol="0" anchor="ctr"/>
           <a:lstStyle/>
           <a:p>
-            <a:pPr marL="0" indent="0">
-              <a:buNone/>
-            </a:pPr>
-            <a:r>
-              <a:rPr lang="en-US" sz="1000" b="1" kern="0" spc="120" dirty="0">
+            <a:pPr indent="0" marL="0">
+              <a:buNone/>
+            </a:pPr>
+            <a:r>
+              <a:rPr lang="en-US" sz="1000" b="1" spc="120" kern="0" dirty="0">
                 <a:solidFill>
                   <a:srgbClr val="1B305A"/>
                 </a:solidFill>
@@ -9465,11 +9750,11 @@
           <a:bodyPr wrap="square" rtlCol="0" anchor="ctr"/>
           <a:lstStyle/>
           <a:p>
-            <a:pPr marL="0" indent="0">
-              <a:buNone/>
-            </a:pPr>
-            <a:r>
-              <a:rPr lang="en-US" sz="850" b="1" kern="0" spc="160" dirty="0">
+            <a:pPr indent="0" marL="0">
+              <a:buNone/>
+            </a:pPr>
+            <a:r>
+              <a:rPr lang="en-US" sz="850" b="1" spc="160" kern="0" dirty="0">
                 <a:solidFill>
                   <a:srgbClr val="F5A310"/>
                 </a:solidFill>
@@ -9504,7 +9789,7 @@
           <a:bodyPr wrap="square" rtlCol="0" anchor="t"/>
           <a:lstStyle/>
           <a:p>
-            <a:pPr marL="0" indent="0">
+            <a:pPr indent="0" marL="0">
               <a:buNone/>
             </a:pPr>
             <a:r>
@@ -9603,7 +9888,7 @@
           <a:bodyPr wrap="square" rtlCol="0" anchor="ctr"/>
           <a:lstStyle/>
           <a:p>
-            <a:pPr marL="0" indent="0">
+            <a:pPr indent="0" marL="0">
               <a:buNone/>
             </a:pPr>
             <a:r>
@@ -9642,7 +9927,7 @@
           <a:bodyPr wrap="square" rtlCol="0" anchor="ctr"/>
           <a:lstStyle/>
           <a:p>
-            <a:pPr marL="0" indent="0" algn="ctr">
+            <a:pPr algn="ctr" indent="0" marL="0">
               <a:buNone/>
             </a:pPr>
             <a:r>
@@ -9681,7 +9966,7 @@
           <a:bodyPr wrap="square" rtlCol="0" anchor="ctr"/>
           <a:lstStyle/>
           <a:p>
-            <a:pPr marL="0" indent="0" algn="r">
+            <a:pPr algn="r" indent="0" marL="0">
               <a:buNone/>
             </a:pPr>
             <a:r>
@@ -9747,7 +10032,7 @@
           <a:bodyPr wrap="square" rtlCol="0" anchor="t"/>
           <a:lstStyle/>
           <a:p>
-            <a:pPr marL="0" indent="0">
+            <a:pPr indent="0" marL="0">
               <a:buNone/>
             </a:pPr>
             <a:r>
@@ -9786,7 +10071,7 @@
           <a:bodyPr wrap="square" rtlCol="0" anchor="t"/>
           <a:lstStyle/>
           <a:p>
-            <a:pPr marL="0" indent="0">
+            <a:pPr indent="0" marL="0">
               <a:lnSpc>
                 <a:spcPct val="114000"/>
               </a:lnSpc>
@@ -9855,7 +10140,7 @@
           <a:bodyPr wrap="square" rtlCol="0" anchor="t"/>
           <a:lstStyle/>
           <a:p>
-            <a:pPr marL="0" indent="0">
+            <a:pPr indent="0" marL="0">
               <a:buNone/>
             </a:pPr>
             <a:r>
@@ -9894,7 +10179,7 @@
           <a:bodyPr wrap="square" rtlCol="0" anchor="t"/>
           <a:lstStyle/>
           <a:p>
-            <a:pPr marL="0" indent="0">
+            <a:pPr indent="0" marL="0">
               <a:lnSpc>
                 <a:spcPct val="114000"/>
               </a:lnSpc>
@@ -9963,7 +10248,7 @@
           <a:bodyPr wrap="square" rtlCol="0" anchor="t"/>
           <a:lstStyle/>
           <a:p>
-            <a:pPr marL="0" indent="0">
+            <a:pPr indent="0" marL="0">
               <a:buNone/>
             </a:pPr>
             <a:r>
@@ -10002,7 +10287,7 @@
           <a:bodyPr wrap="square" rtlCol="0" anchor="t"/>
           <a:lstStyle/>
           <a:p>
-            <a:pPr marL="0" indent="0">
+            <a:pPr indent="0" marL="0">
               <a:lnSpc>
                 <a:spcPct val="114000"/>
               </a:lnSpc>
@@ -10071,7 +10356,7 @@
           <a:bodyPr wrap="square" rtlCol="0" anchor="t"/>
           <a:lstStyle/>
           <a:p>
-            <a:pPr marL="0" indent="0">
+            <a:pPr indent="0" marL="0">
               <a:buNone/>
             </a:pPr>
             <a:r>
@@ -10110,7 +10395,7 @@
           <a:bodyPr wrap="square" rtlCol="0" anchor="t"/>
           <a:lstStyle/>
           <a:p>
-            <a:pPr marL="0" indent="0">
+            <a:pPr indent="0" marL="0">
               <a:lnSpc>
                 <a:spcPct val="114000"/>
               </a:lnSpc>
@@ -10147,7 +10432,6 @@
         <a:solidFill>
           <a:srgbClr val="FFFFFF"/>
         </a:solidFill>
-        <a:effectLst/>
       </p:bgPr>
     </p:bg>
     <p:spTree>
@@ -10185,11 +10469,11 @@
           <a:bodyPr wrap="square" rtlCol="0" anchor="ctr"/>
           <a:lstStyle/>
           <a:p>
-            <a:pPr marL="0" indent="0">
-              <a:buNone/>
-            </a:pPr>
-            <a:r>
-              <a:rPr lang="en-US" sz="1000" b="1" kern="0" spc="120" dirty="0">
+            <a:pPr indent="0" marL="0">
+              <a:buNone/>
+            </a:pPr>
+            <a:r>
+              <a:rPr lang="en-US" sz="1000" b="1" spc="120" kern="0" dirty="0">
                 <a:solidFill>
                   <a:srgbClr val="1B305A"/>
                 </a:solidFill>
@@ -10224,11 +10508,11 @@
           <a:bodyPr wrap="square" rtlCol="0" anchor="ctr"/>
           <a:lstStyle/>
           <a:p>
-            <a:pPr marL="0" indent="0">
-              <a:buNone/>
-            </a:pPr>
-            <a:r>
-              <a:rPr lang="en-US" sz="850" b="1" kern="0" spc="160" dirty="0">
+            <a:pPr indent="0" marL="0">
+              <a:buNone/>
+            </a:pPr>
+            <a:r>
+              <a:rPr lang="en-US" sz="850" b="1" spc="160" kern="0" dirty="0">
                 <a:solidFill>
                   <a:srgbClr val="F5A310"/>
                 </a:solidFill>
@@ -10263,7 +10547,7 @@
           <a:bodyPr wrap="square" rtlCol="0" anchor="t"/>
           <a:lstStyle/>
           <a:p>
-            <a:pPr marL="0" indent="0">
+            <a:pPr indent="0" marL="0">
               <a:buNone/>
             </a:pPr>
             <a:r>
@@ -10362,7 +10646,7 @@
           <a:bodyPr wrap="square" rtlCol="0" anchor="ctr"/>
           <a:lstStyle/>
           <a:p>
-            <a:pPr marL="0" indent="0">
+            <a:pPr indent="0" marL="0">
               <a:buNone/>
             </a:pPr>
             <a:r>
@@ -10401,7 +10685,7 @@
           <a:bodyPr wrap="square" rtlCol="0" anchor="ctr"/>
           <a:lstStyle/>
           <a:p>
-            <a:pPr marL="0" indent="0" algn="ctr">
+            <a:pPr algn="ctr" indent="0" marL="0">
               <a:buNone/>
             </a:pPr>
             <a:r>
@@ -10440,7 +10724,7 @@
           <a:bodyPr wrap="square" rtlCol="0" anchor="ctr"/>
           <a:lstStyle/>
           <a:p>
-            <a:pPr marL="0" indent="0" algn="r">
+            <a:pPr algn="r" indent="0" marL="0">
               <a:buNone/>
             </a:pPr>
             <a:r>
@@ -10506,7 +10790,7 @@
           <a:bodyPr wrap="square" rtlCol="0" anchor="t"/>
           <a:lstStyle/>
           <a:p>
-            <a:pPr marL="0" indent="0">
+            <a:pPr indent="0" marL="0">
               <a:buNone/>
             </a:pPr>
             <a:r>
@@ -10545,7 +10829,7 @@
           <a:bodyPr wrap="square" rtlCol="0" anchor="t"/>
           <a:lstStyle/>
           <a:p>
-            <a:pPr marL="0" indent="0">
+            <a:pPr indent="0" marL="0">
               <a:lnSpc>
                 <a:spcPct val="114000"/>
               </a:lnSpc>
@@ -10614,7 +10898,7 @@
           <a:bodyPr wrap="square" rtlCol="0" anchor="t"/>
           <a:lstStyle/>
           <a:p>
-            <a:pPr marL="0" indent="0">
+            <a:pPr indent="0" marL="0">
               <a:buNone/>
             </a:pPr>
             <a:r>
@@ -10653,7 +10937,7 @@
           <a:bodyPr wrap="square" rtlCol="0" anchor="t"/>
           <a:lstStyle/>
           <a:p>
-            <a:pPr marL="0" indent="0">
+            <a:pPr indent="0" marL="0">
               <a:lnSpc>
                 <a:spcPct val="114000"/>
               </a:lnSpc>
@@ -10722,7 +11006,7 @@
           <a:bodyPr wrap="square" rtlCol="0" anchor="t"/>
           <a:lstStyle/>
           <a:p>
-            <a:pPr marL="0" indent="0">
+            <a:pPr indent="0" marL="0">
               <a:buNone/>
             </a:pPr>
             <a:r>
@@ -10761,7 +11045,7 @@
           <a:bodyPr wrap="square" rtlCol="0" anchor="t"/>
           <a:lstStyle/>
           <a:p>
-            <a:pPr marL="0" indent="0">
+            <a:pPr indent="0" marL="0">
               <a:lnSpc>
                 <a:spcPct val="114000"/>
               </a:lnSpc>
@@ -10830,7 +11114,7 @@
           <a:bodyPr wrap="square" rtlCol="0" anchor="t"/>
           <a:lstStyle/>
           <a:p>
-            <a:pPr marL="0" indent="0">
+            <a:pPr indent="0" marL="0">
               <a:buNone/>
             </a:pPr>
             <a:r>
@@ -10869,7 +11153,7 @@
           <a:bodyPr wrap="square" rtlCol="0" anchor="t"/>
           <a:lstStyle/>
           <a:p>
-            <a:pPr marL="0" indent="0">
+            <a:pPr indent="0" marL="0">
               <a:lnSpc>
                 <a:spcPct val="114000"/>
               </a:lnSpc>
@@ -10906,7 +11190,6 @@
         <a:solidFill>
           <a:srgbClr val="FFFFFF"/>
         </a:solidFill>
-        <a:effectLst/>
       </p:bgPr>
     </p:bg>
     <p:spTree>
@@ -10944,11 +11227,11 @@
           <a:bodyPr wrap="square" rtlCol="0" anchor="ctr"/>
           <a:lstStyle/>
           <a:p>
-            <a:pPr marL="0" indent="0">
-              <a:buNone/>
-            </a:pPr>
-            <a:r>
-              <a:rPr lang="en-US" sz="1000" b="1" kern="0" spc="120" dirty="0">
+            <a:pPr indent="0" marL="0">
+              <a:buNone/>
+            </a:pPr>
+            <a:r>
+              <a:rPr lang="en-US" sz="1000" b="1" spc="120" kern="0" dirty="0">
                 <a:solidFill>
                   <a:srgbClr val="1B305A"/>
                 </a:solidFill>
@@ -10983,11 +11266,11 @@
           <a:bodyPr wrap="square" rtlCol="0" anchor="ctr"/>
           <a:lstStyle/>
           <a:p>
-            <a:pPr marL="0" indent="0">
-              <a:buNone/>
-            </a:pPr>
-            <a:r>
-              <a:rPr lang="en-US" sz="850" b="1" kern="0" spc="160" dirty="0">
+            <a:pPr indent="0" marL="0">
+              <a:buNone/>
+            </a:pPr>
+            <a:r>
+              <a:rPr lang="en-US" sz="850" b="1" spc="160" kern="0" dirty="0">
                 <a:solidFill>
                   <a:srgbClr val="F5A310"/>
                 </a:solidFill>
@@ -11022,7 +11305,7 @@
           <a:bodyPr wrap="square" rtlCol="0" anchor="t"/>
           <a:lstStyle/>
           <a:p>
-            <a:pPr marL="0" indent="0">
+            <a:pPr indent="0" marL="0">
               <a:buNone/>
             </a:pPr>
             <a:r>
@@ -11121,7 +11404,7 @@
           <a:bodyPr wrap="square" rtlCol="0" anchor="ctr"/>
           <a:lstStyle/>
           <a:p>
-            <a:pPr marL="0" indent="0">
+            <a:pPr indent="0" marL="0">
               <a:buNone/>
             </a:pPr>
             <a:r>
@@ -11160,7 +11443,7 @@
           <a:bodyPr wrap="square" rtlCol="0" anchor="ctr"/>
           <a:lstStyle/>
           <a:p>
-            <a:pPr marL="0" indent="0" algn="ctr">
+            <a:pPr algn="ctr" indent="0" marL="0">
               <a:buNone/>
             </a:pPr>
             <a:r>
@@ -11199,7 +11482,7 @@
           <a:bodyPr wrap="square" rtlCol="0" anchor="ctr"/>
           <a:lstStyle/>
           <a:p>
-            <a:pPr marL="0" indent="0" algn="r">
+            <a:pPr algn="r" indent="0" marL="0">
               <a:buNone/>
             </a:pPr>
             <a:r>
@@ -11265,7 +11548,7 @@
           <a:bodyPr wrap="square" rtlCol="0" anchor="t"/>
           <a:lstStyle/>
           <a:p>
-            <a:pPr marL="0" indent="0">
+            <a:pPr indent="0" marL="0">
               <a:buNone/>
             </a:pPr>
             <a:r>
@@ -11304,7 +11587,7 @@
           <a:bodyPr wrap="square" rtlCol="0" anchor="t"/>
           <a:lstStyle/>
           <a:p>
-            <a:pPr marL="0" indent="0">
+            <a:pPr indent="0" marL="0">
               <a:lnSpc>
                 <a:spcPct val="114000"/>
               </a:lnSpc>
@@ -11373,7 +11656,7 @@
           <a:bodyPr wrap="square" rtlCol="0" anchor="t"/>
           <a:lstStyle/>
           <a:p>
-            <a:pPr marL="0" indent="0">
+            <a:pPr indent="0" marL="0">
               <a:buNone/>
             </a:pPr>
             <a:r>
@@ -11412,7 +11695,7 @@
           <a:bodyPr wrap="square" rtlCol="0" anchor="t"/>
           <a:lstStyle/>
           <a:p>
-            <a:pPr marL="0" indent="0">
+            <a:pPr indent="0" marL="0">
               <a:lnSpc>
                 <a:spcPct val="114000"/>
               </a:lnSpc>
@@ -11481,7 +11764,7 @@
           <a:bodyPr wrap="square" rtlCol="0" anchor="t"/>
           <a:lstStyle/>
           <a:p>
-            <a:pPr marL="0" indent="0">
+            <a:pPr indent="0" marL="0">
               <a:buNone/>
             </a:pPr>
             <a:r>
@@ -11520,7 +11803,7 @@
           <a:bodyPr wrap="square" rtlCol="0" anchor="t"/>
           <a:lstStyle/>
           <a:p>
-            <a:pPr marL="0" indent="0">
+            <a:pPr indent="0" marL="0">
               <a:lnSpc>
                 <a:spcPct val="114000"/>
               </a:lnSpc>
@@ -11589,7 +11872,7 @@
           <a:bodyPr wrap="square" rtlCol="0" anchor="t"/>
           <a:lstStyle/>
           <a:p>
-            <a:pPr marL="0" indent="0">
+            <a:pPr indent="0" marL="0">
               <a:buNone/>
             </a:pPr>
             <a:r>
@@ -11628,7 +11911,7 @@
           <a:bodyPr wrap="square" rtlCol="0" anchor="t"/>
           <a:lstStyle/>
           <a:p>
-            <a:pPr marL="0" indent="0">
+            <a:pPr indent="0" marL="0">
               <a:lnSpc>
                 <a:spcPct val="114000"/>
               </a:lnSpc>
@@ -11665,7 +11948,6 @@
         <a:solidFill>
           <a:srgbClr val="FFFFFF"/>
         </a:solidFill>
-        <a:effectLst/>
       </p:bgPr>
     </p:bg>
     <p:spTree>
@@ -11703,11 +11985,11 @@
           <a:bodyPr wrap="square" rtlCol="0" anchor="ctr"/>
           <a:lstStyle/>
           <a:p>
-            <a:pPr marL="0" indent="0">
-              <a:buNone/>
-            </a:pPr>
-            <a:r>
-              <a:rPr lang="en-US" sz="1000" b="1" kern="0" spc="120" dirty="0">
+            <a:pPr indent="0" marL="0">
+              <a:buNone/>
+            </a:pPr>
+            <a:r>
+              <a:rPr lang="en-US" sz="1000" b="1" spc="120" kern="0" dirty="0">
                 <a:solidFill>
                   <a:srgbClr val="1B305A"/>
                 </a:solidFill>
@@ -11742,11 +12024,11 @@
           <a:bodyPr wrap="square" rtlCol="0" anchor="ctr"/>
           <a:lstStyle/>
           <a:p>
-            <a:pPr marL="0" indent="0">
-              <a:buNone/>
-            </a:pPr>
-            <a:r>
-              <a:rPr lang="en-US" sz="850" b="1" kern="0" spc="160" dirty="0">
+            <a:pPr indent="0" marL="0">
+              <a:buNone/>
+            </a:pPr>
+            <a:r>
+              <a:rPr lang="en-US" sz="850" b="1" spc="160" kern="0" dirty="0">
                 <a:solidFill>
                   <a:srgbClr val="F5A310"/>
                 </a:solidFill>
@@ -11781,7 +12063,7 @@
           <a:bodyPr wrap="square" rtlCol="0" anchor="t"/>
           <a:lstStyle/>
           <a:p>
-            <a:pPr marL="0" indent="0">
+            <a:pPr indent="0" marL="0">
               <a:buNone/>
             </a:pPr>
             <a:r>
@@ -11880,7 +12162,7 @@
           <a:bodyPr wrap="square" rtlCol="0" anchor="ctr"/>
           <a:lstStyle/>
           <a:p>
-            <a:pPr marL="0" indent="0">
+            <a:pPr indent="0" marL="0">
               <a:buNone/>
             </a:pPr>
             <a:r>
@@ -11919,7 +12201,7 @@
           <a:bodyPr wrap="square" rtlCol="0" anchor="ctr"/>
           <a:lstStyle/>
           <a:p>
-            <a:pPr marL="0" indent="0" algn="ctr">
+            <a:pPr algn="ctr" indent="0" marL="0">
               <a:buNone/>
             </a:pPr>
             <a:r>
@@ -11958,7 +12240,7 @@
           <a:bodyPr wrap="square" rtlCol="0" anchor="ctr"/>
           <a:lstStyle/>
           <a:p>
-            <a:pPr marL="0" indent="0" algn="r">
+            <a:pPr algn="r" indent="0" marL="0">
               <a:buNone/>
             </a:pPr>
             <a:r>
@@ -12024,7 +12306,7 @@
           <a:bodyPr wrap="square" rtlCol="0" anchor="t"/>
           <a:lstStyle/>
           <a:p>
-            <a:pPr marL="0" indent="0">
+            <a:pPr indent="0" marL="0">
               <a:buNone/>
             </a:pPr>
             <a:r>
@@ -12063,7 +12345,7 @@
           <a:bodyPr wrap="square" rtlCol="0" anchor="t"/>
           <a:lstStyle/>
           <a:p>
-            <a:pPr marL="0" indent="0">
+            <a:pPr indent="0" marL="0">
               <a:lnSpc>
                 <a:spcPct val="114000"/>
               </a:lnSpc>
@@ -12132,7 +12414,7 @@
           <a:bodyPr wrap="square" rtlCol="0" anchor="t"/>
           <a:lstStyle/>
           <a:p>
-            <a:pPr marL="0" indent="0">
+            <a:pPr indent="0" marL="0">
               <a:buNone/>
             </a:pPr>
             <a:r>
@@ -12171,7 +12453,7 @@
           <a:bodyPr wrap="square" rtlCol="0" anchor="t"/>
           <a:lstStyle/>
           <a:p>
-            <a:pPr marL="0" indent="0">
+            <a:pPr indent="0" marL="0">
               <a:lnSpc>
                 <a:spcPct val="114000"/>
               </a:lnSpc>
@@ -12240,7 +12522,7 @@
           <a:bodyPr wrap="square" rtlCol="0" anchor="t"/>
           <a:lstStyle/>
           <a:p>
-            <a:pPr marL="0" indent="0">
+            <a:pPr indent="0" marL="0">
               <a:buNone/>
             </a:pPr>
             <a:r>
@@ -12279,7 +12561,7 @@
           <a:bodyPr wrap="square" rtlCol="0" anchor="t"/>
           <a:lstStyle/>
           <a:p>
-            <a:pPr marL="0" indent="0">
+            <a:pPr indent="0" marL="0">
               <a:lnSpc>
                 <a:spcPct val="114000"/>
               </a:lnSpc>
@@ -12348,7 +12630,7 @@
           <a:bodyPr wrap="square" rtlCol="0" anchor="t"/>
           <a:lstStyle/>
           <a:p>
-            <a:pPr marL="0" indent="0">
+            <a:pPr indent="0" marL="0">
               <a:buNone/>
             </a:pPr>
             <a:r>
@@ -12387,7 +12669,7 @@
           <a:bodyPr wrap="square" rtlCol="0" anchor="t"/>
           <a:lstStyle/>
           <a:p>
-            <a:pPr marL="0" indent="0">
+            <a:pPr indent="0" marL="0">
               <a:lnSpc>
                 <a:spcPct val="114000"/>
               </a:lnSpc>
@@ -12424,7 +12706,6 @@
         <a:solidFill>
           <a:srgbClr val="FFFFFF"/>
         </a:solidFill>
-        <a:effectLst/>
       </p:bgPr>
     </p:bg>
     <p:spTree>
@@ -12462,11 +12743,11 @@
           <a:bodyPr wrap="square" rtlCol="0" anchor="ctr"/>
           <a:lstStyle/>
           <a:p>
-            <a:pPr marL="0" indent="0">
-              <a:buNone/>
-            </a:pPr>
-            <a:r>
-              <a:rPr lang="en-US" sz="1000" b="1" kern="0" spc="120" dirty="0">
+            <a:pPr indent="0" marL="0">
+              <a:buNone/>
+            </a:pPr>
+            <a:r>
+              <a:rPr lang="en-US" sz="1000" b="1" spc="120" kern="0" dirty="0">
                 <a:solidFill>
                   <a:srgbClr val="1B305A"/>
                 </a:solidFill>
@@ -12501,11 +12782,11 @@
           <a:bodyPr wrap="square" rtlCol="0" anchor="ctr"/>
           <a:lstStyle/>
           <a:p>
-            <a:pPr marL="0" indent="0">
-              <a:buNone/>
-            </a:pPr>
-            <a:r>
-              <a:rPr lang="en-US" sz="850" b="1" kern="0" spc="160" dirty="0">
+            <a:pPr indent="0" marL="0">
+              <a:buNone/>
+            </a:pPr>
+            <a:r>
+              <a:rPr lang="en-US" sz="850" b="1" spc="160" kern="0" dirty="0">
                 <a:solidFill>
                   <a:srgbClr val="F5A310"/>
                 </a:solidFill>
@@ -12540,7 +12821,7 @@
           <a:bodyPr wrap="square" rtlCol="0" anchor="t"/>
           <a:lstStyle/>
           <a:p>
-            <a:pPr marL="0" indent="0">
+            <a:pPr indent="0" marL="0">
               <a:buNone/>
             </a:pPr>
             <a:r>
@@ -12639,7 +12920,7 @@
           <a:bodyPr wrap="square" rtlCol="0" anchor="ctr"/>
           <a:lstStyle/>
           <a:p>
-            <a:pPr marL="0" indent="0">
+            <a:pPr indent="0" marL="0">
               <a:buNone/>
             </a:pPr>
             <a:r>
@@ -12678,7 +12959,7 @@
           <a:bodyPr wrap="square" rtlCol="0" anchor="ctr"/>
           <a:lstStyle/>
           <a:p>
-            <a:pPr marL="0" indent="0" algn="ctr">
+            <a:pPr algn="ctr" indent="0" marL="0">
               <a:buNone/>
             </a:pPr>
             <a:r>
@@ -12717,7 +12998,7 @@
           <a:bodyPr wrap="square" rtlCol="0" anchor="ctr"/>
           <a:lstStyle/>
           <a:p>
-            <a:pPr marL="0" indent="0" algn="r">
+            <a:pPr algn="r" indent="0" marL="0">
               <a:buNone/>
             </a:pPr>
             <a:r>
@@ -12783,7 +13064,7 @@
           <a:bodyPr wrap="square" rtlCol="0" anchor="t"/>
           <a:lstStyle/>
           <a:p>
-            <a:pPr marL="0" indent="0">
+            <a:pPr indent="0" marL="0">
               <a:buNone/>
             </a:pPr>
             <a:r>
@@ -12822,7 +13103,7 @@
           <a:bodyPr wrap="square" rtlCol="0" anchor="t"/>
           <a:lstStyle/>
           <a:p>
-            <a:pPr marL="0" indent="0">
+            <a:pPr indent="0" marL="0">
               <a:lnSpc>
                 <a:spcPct val="114000"/>
               </a:lnSpc>
@@ -12891,7 +13172,7 @@
           <a:bodyPr wrap="square" rtlCol="0" anchor="t"/>
           <a:lstStyle/>
           <a:p>
-            <a:pPr marL="0" indent="0">
+            <a:pPr indent="0" marL="0">
               <a:buNone/>
             </a:pPr>
             <a:r>
@@ -12930,7 +13211,7 @@
           <a:bodyPr wrap="square" rtlCol="0" anchor="t"/>
           <a:lstStyle/>
           <a:p>
-            <a:pPr marL="0" indent="0">
+            <a:pPr indent="0" marL="0">
               <a:lnSpc>
                 <a:spcPct val="114000"/>
               </a:lnSpc>
@@ -12999,7 +13280,7 @@
           <a:bodyPr wrap="square" rtlCol="0" anchor="t"/>
           <a:lstStyle/>
           <a:p>
-            <a:pPr marL="0" indent="0">
+            <a:pPr indent="0" marL="0">
               <a:buNone/>
             </a:pPr>
             <a:r>
@@ -13038,7 +13319,7 @@
           <a:bodyPr wrap="square" rtlCol="0" anchor="t"/>
           <a:lstStyle/>
           <a:p>
-            <a:pPr marL="0" indent="0">
+            <a:pPr indent="0" marL="0">
               <a:lnSpc>
                 <a:spcPct val="114000"/>
               </a:lnSpc>
@@ -13107,7 +13388,7 @@
           <a:bodyPr wrap="square" rtlCol="0" anchor="t"/>
           <a:lstStyle/>
           <a:p>
-            <a:pPr marL="0" indent="0">
+            <a:pPr indent="0" marL="0">
               <a:buNone/>
             </a:pPr>
             <a:r>
@@ -13146,7 +13427,7 @@
           <a:bodyPr wrap="square" rtlCol="0" anchor="t"/>
           <a:lstStyle/>
           <a:p>
-            <a:pPr marL="0" indent="0">
+            <a:pPr indent="0" marL="0">
               <a:lnSpc>
                 <a:spcPct val="114000"/>
               </a:lnSpc>
@@ -13183,7 +13464,6 @@
         <a:solidFill>
           <a:srgbClr val="FFFFFF"/>
         </a:solidFill>
-        <a:effectLst/>
       </p:bgPr>
     </p:bg>
     <p:spTree>
@@ -13221,11 +13501,11 @@
           <a:bodyPr wrap="square" rtlCol="0" anchor="ctr"/>
           <a:lstStyle/>
           <a:p>
-            <a:pPr marL="0" indent="0">
-              <a:buNone/>
-            </a:pPr>
-            <a:r>
-              <a:rPr lang="en-US" sz="1000" b="1" kern="0" spc="120" dirty="0">
+            <a:pPr indent="0" marL="0">
+              <a:buNone/>
+            </a:pPr>
+            <a:r>
+              <a:rPr lang="en-US" sz="1000" b="1" spc="120" kern="0" dirty="0">
                 <a:solidFill>
                   <a:srgbClr val="1B305A"/>
                 </a:solidFill>
@@ -13260,11 +13540,11 @@
           <a:bodyPr wrap="square" rtlCol="0" anchor="ctr"/>
           <a:lstStyle/>
           <a:p>
-            <a:pPr marL="0" indent="0">
-              <a:buNone/>
-            </a:pPr>
-            <a:r>
-              <a:rPr lang="en-US" sz="850" b="1" kern="0" spc="160" dirty="0">
+            <a:pPr indent="0" marL="0">
+              <a:buNone/>
+            </a:pPr>
+            <a:r>
+              <a:rPr lang="en-US" sz="850" b="1" spc="160" kern="0" dirty="0">
                 <a:solidFill>
                   <a:srgbClr val="F5A310"/>
                 </a:solidFill>
@@ -13299,7 +13579,7 @@
           <a:bodyPr wrap="square" rtlCol="0" anchor="t"/>
           <a:lstStyle/>
           <a:p>
-            <a:pPr marL="0" indent="0">
+            <a:pPr indent="0" marL="0">
               <a:buNone/>
             </a:pPr>
             <a:r>
@@ -13378,7 +13658,7 @@
           <a:bodyPr wrap="square" rtlCol="0" anchor="t"/>
           <a:lstStyle/>
           <a:p>
-            <a:pPr marL="0" indent="0">
+            <a:pPr indent="0" marL="0">
               <a:lnSpc>
                 <a:spcPct val="120000"/>
               </a:lnSpc>
@@ -13440,7 +13720,7 @@
           <a:bodyPr wrap="square" rtlCol="0" anchor="ctr"/>
           <a:lstStyle/>
           <a:p>
-            <a:pPr marL="0" indent="0">
+            <a:pPr indent="0" marL="0">
               <a:buNone/>
             </a:pPr>
             <a:r>
@@ -13479,7 +13759,7 @@
           <a:bodyPr wrap="square" rtlCol="0" anchor="ctr"/>
           <a:lstStyle/>
           <a:p>
-            <a:pPr marL="0" indent="0" algn="ctr">
+            <a:pPr algn="ctr" indent="0" marL="0">
               <a:buNone/>
             </a:pPr>
             <a:r>
@@ -13518,7 +13798,7 @@
           <a:bodyPr wrap="square" rtlCol="0" anchor="ctr"/>
           <a:lstStyle/>
           <a:p>
-            <a:pPr marL="0" indent="0" algn="r">
+            <a:pPr algn="r" indent="0" marL="0">
               <a:buNone/>
             </a:pPr>
             <a:r>
@@ -13584,11 +13864,11 @@
           <a:bodyPr wrap="square" rtlCol="0" anchor="ctr"/>
           <a:lstStyle/>
           <a:p>
-            <a:pPr marL="0" indent="0">
-              <a:buNone/>
-            </a:pPr>
-            <a:r>
-              <a:rPr lang="en-US" sz="800" b="1" kern="0" spc="110" dirty="0">
+            <a:pPr indent="0" marL="0">
+              <a:buNone/>
+            </a:pPr>
+            <a:r>
+              <a:rPr lang="en-US" sz="800" b="1" spc="110" kern="0" dirty="0">
                 <a:solidFill>
                   <a:srgbClr val="98A2B3"/>
                 </a:solidFill>
@@ -13623,7 +13903,7 @@
           <a:bodyPr wrap="square" rtlCol="0" anchor="t"/>
           <a:lstStyle/>
           <a:p>
-            <a:pPr marL="0" indent="0">
+            <a:pPr indent="0" marL="0">
               <a:buNone/>
             </a:pPr>
             <a:r>
@@ -13662,7 +13942,7 @@
           <a:bodyPr wrap="square" rtlCol="0" anchor="t"/>
           <a:lstStyle/>
           <a:p>
-            <a:pPr marL="0" indent="0">
+            <a:pPr indent="0" marL="0">
               <a:lnSpc>
                 <a:spcPct val="112000"/>
               </a:lnSpc>
@@ -13704,7 +13984,7 @@
           <a:bodyPr wrap="square" rtlCol="0" anchor="ctr"/>
           <a:lstStyle/>
           <a:p>
-            <a:pPr marL="0" indent="0" algn="ctr">
+            <a:pPr algn="ctr" indent="0" marL="0">
               <a:buNone/>
             </a:pPr>
             <a:r>
@@ -13770,11 +14050,11 @@
           <a:bodyPr wrap="square" rtlCol="0" anchor="ctr"/>
           <a:lstStyle/>
           <a:p>
-            <a:pPr marL="0" indent="0">
-              <a:buNone/>
-            </a:pPr>
-            <a:r>
-              <a:rPr lang="en-US" sz="800" b="1" kern="0" spc="110" dirty="0">
+            <a:pPr indent="0" marL="0">
+              <a:buNone/>
+            </a:pPr>
+            <a:r>
+              <a:rPr lang="en-US" sz="800" b="1" spc="110" kern="0" dirty="0">
                 <a:solidFill>
                   <a:srgbClr val="98A2B3"/>
                 </a:solidFill>
@@ -13809,7 +14089,7 @@
           <a:bodyPr wrap="square" rtlCol="0" anchor="t"/>
           <a:lstStyle/>
           <a:p>
-            <a:pPr marL="0" indent="0">
+            <a:pPr indent="0" marL="0">
               <a:buNone/>
             </a:pPr>
             <a:r>
@@ -13848,7 +14128,7 @@
           <a:bodyPr wrap="square" rtlCol="0" anchor="t"/>
           <a:lstStyle/>
           <a:p>
-            <a:pPr marL="0" indent="0">
+            <a:pPr indent="0" marL="0">
               <a:lnSpc>
                 <a:spcPct val="112000"/>
               </a:lnSpc>
@@ -13890,7 +14170,7 @@
           <a:bodyPr wrap="square" rtlCol="0" anchor="ctr"/>
           <a:lstStyle/>
           <a:p>
-            <a:pPr marL="0" indent="0" algn="ctr">
+            <a:pPr algn="ctr" indent="0" marL="0">
               <a:buNone/>
             </a:pPr>
             <a:r>
@@ -13956,11 +14236,11 @@
           <a:bodyPr wrap="square" rtlCol="0" anchor="ctr"/>
           <a:lstStyle/>
           <a:p>
-            <a:pPr marL="0" indent="0">
-              <a:buNone/>
-            </a:pPr>
-            <a:r>
-              <a:rPr lang="en-US" sz="800" b="1" kern="0" spc="110" dirty="0">
+            <a:pPr indent="0" marL="0">
+              <a:buNone/>
+            </a:pPr>
+            <a:r>
+              <a:rPr lang="en-US" sz="800" b="1" spc="110" kern="0" dirty="0">
                 <a:solidFill>
                   <a:srgbClr val="98A2B3"/>
                 </a:solidFill>
@@ -13995,7 +14275,7 @@
           <a:bodyPr wrap="square" rtlCol="0" anchor="t"/>
           <a:lstStyle/>
           <a:p>
-            <a:pPr marL="0" indent="0">
+            <a:pPr indent="0" marL="0">
               <a:buNone/>
             </a:pPr>
             <a:r>
@@ -14034,7 +14314,7 @@
           <a:bodyPr wrap="square" rtlCol="0" anchor="t"/>
           <a:lstStyle/>
           <a:p>
-            <a:pPr marL="0" indent="0">
+            <a:pPr indent="0" marL="0">
               <a:lnSpc>
                 <a:spcPct val="112000"/>
               </a:lnSpc>
@@ -14076,7 +14356,7 @@
           <a:bodyPr wrap="square" rtlCol="0" anchor="ctr"/>
           <a:lstStyle/>
           <a:p>
-            <a:pPr marL="0" indent="0" algn="ctr">
+            <a:pPr algn="ctr" indent="0" marL="0">
               <a:buNone/>
             </a:pPr>
             <a:r>
@@ -14142,11 +14422,11 @@
           <a:bodyPr wrap="square" rtlCol="0" anchor="ctr"/>
           <a:lstStyle/>
           <a:p>
-            <a:pPr marL="0" indent="0">
-              <a:buNone/>
-            </a:pPr>
-            <a:r>
-              <a:rPr lang="en-US" sz="800" b="1" kern="0" spc="110" dirty="0">
+            <a:pPr indent="0" marL="0">
+              <a:buNone/>
+            </a:pPr>
+            <a:r>
+              <a:rPr lang="en-US" sz="800" b="1" spc="110" kern="0" dirty="0">
                 <a:solidFill>
                   <a:srgbClr val="98A2B3"/>
                 </a:solidFill>
@@ -14181,7 +14461,7 @@
           <a:bodyPr wrap="square" rtlCol="0" anchor="t"/>
           <a:lstStyle/>
           <a:p>
-            <a:pPr marL="0" indent="0">
+            <a:pPr indent="0" marL="0">
               <a:buNone/>
             </a:pPr>
             <a:r>
@@ -14220,7 +14500,7 @@
           <a:bodyPr wrap="square" rtlCol="0" anchor="t"/>
           <a:lstStyle/>
           <a:p>
-            <a:pPr marL="0" indent="0">
+            <a:pPr indent="0" marL="0">
               <a:lnSpc>
                 <a:spcPct val="112000"/>
               </a:lnSpc>
@@ -14262,7 +14542,7 @@
           <a:bodyPr wrap="square" rtlCol="0" anchor="ctr"/>
           <a:lstStyle/>
           <a:p>
-            <a:pPr marL="0" indent="0" algn="ctr">
+            <a:pPr algn="ctr" indent="0" marL="0">
               <a:buNone/>
             </a:pPr>
             <a:r>
@@ -14328,11 +14608,11 @@
           <a:bodyPr wrap="square" rtlCol="0" anchor="ctr"/>
           <a:lstStyle/>
           <a:p>
-            <a:pPr marL="0" indent="0">
-              <a:buNone/>
-            </a:pPr>
-            <a:r>
-              <a:rPr lang="en-US" sz="800" b="1" kern="0" spc="110" dirty="0">
+            <a:pPr indent="0" marL="0">
+              <a:buNone/>
+            </a:pPr>
+            <a:r>
+              <a:rPr lang="en-US" sz="800" b="1" spc="110" kern="0" dirty="0">
                 <a:solidFill>
                   <a:srgbClr val="98A2B3"/>
                 </a:solidFill>
@@ -14367,7 +14647,7 @@
           <a:bodyPr wrap="square" rtlCol="0" anchor="t"/>
           <a:lstStyle/>
           <a:p>
-            <a:pPr marL="0" indent="0">
+            <a:pPr indent="0" marL="0">
               <a:buNone/>
             </a:pPr>
             <a:r>
@@ -14406,7 +14686,7 @@
           <a:bodyPr wrap="square" rtlCol="0" anchor="t"/>
           <a:lstStyle/>
           <a:p>
-            <a:pPr marL="0" indent="0">
+            <a:pPr indent="0" marL="0">
               <a:lnSpc>
                 <a:spcPct val="112000"/>
               </a:lnSpc>
@@ -14448,7 +14728,7 @@
           <a:bodyPr wrap="square" rtlCol="0" anchor="ctr"/>
           <a:lstStyle/>
           <a:p>
-            <a:pPr marL="0" indent="0" algn="ctr">
+            <a:pPr algn="ctr" indent="0" marL="0">
               <a:buNone/>
             </a:pPr>
             <a:r>
@@ -14514,11 +14794,11 @@
           <a:bodyPr wrap="square" rtlCol="0" anchor="ctr"/>
           <a:lstStyle/>
           <a:p>
-            <a:pPr marL="0" indent="0">
-              <a:buNone/>
-            </a:pPr>
-            <a:r>
-              <a:rPr lang="en-US" sz="800" b="1" kern="0" spc="110" dirty="0">
+            <a:pPr indent="0" marL="0">
+              <a:buNone/>
+            </a:pPr>
+            <a:r>
+              <a:rPr lang="en-US" sz="800" b="1" spc="110" kern="0" dirty="0">
                 <a:solidFill>
                   <a:srgbClr val="98A2B3"/>
                 </a:solidFill>
@@ -14553,7 +14833,7 @@
           <a:bodyPr wrap="square" rtlCol="0" anchor="t"/>
           <a:lstStyle/>
           <a:p>
-            <a:pPr marL="0" indent="0">
+            <a:pPr indent="0" marL="0">
               <a:buNone/>
             </a:pPr>
             <a:r>
@@ -14592,7 +14872,7 @@
           <a:bodyPr wrap="square" rtlCol="0" anchor="t"/>
           <a:lstStyle/>
           <a:p>
-            <a:pPr marL="0" indent="0">
+            <a:pPr indent="0" marL="0">
               <a:lnSpc>
                 <a:spcPct val="112000"/>
               </a:lnSpc>
@@ -14661,7 +14941,7 @@
           <a:bodyPr wrap="square" rtlCol="0" anchor="t"/>
           <a:lstStyle/>
           <a:p>
-            <a:pPr marL="0" indent="0">
+            <a:pPr indent="0" marL="0">
               <a:buNone/>
             </a:pPr>
             <a:r>
@@ -14700,7 +14980,7 @@
           <a:bodyPr wrap="square" rtlCol="0" anchor="t"/>
           <a:lstStyle/>
           <a:p>
-            <a:pPr marL="0" indent="0">
+            <a:pPr indent="0" marL="0">
               <a:lnSpc>
                 <a:spcPct val="114000"/>
               </a:lnSpc>
@@ -14769,7 +15049,7 @@
           <a:bodyPr wrap="square" rtlCol="0" anchor="t"/>
           <a:lstStyle/>
           <a:p>
-            <a:pPr marL="0" indent="0">
+            <a:pPr indent="0" marL="0">
               <a:buNone/>
             </a:pPr>
             <a:r>
@@ -14808,7 +15088,7 @@
           <a:bodyPr wrap="square" rtlCol="0" anchor="t"/>
           <a:lstStyle/>
           <a:p>
-            <a:pPr marL="0" indent="0">
+            <a:pPr indent="0" marL="0">
               <a:lnSpc>
                 <a:spcPct val="114000"/>
               </a:lnSpc>
@@ -14823,49 +15103,7 @@
                 <a:ea typeface="Segoe UI" pitchFamily="34" charset="-122"/>
                 <a:cs typeface="Segoe UI" pitchFamily="34" charset="-120"/>
               </a:rPr>
-              <a:t>Charges missed at the point of care, </a:t>
-            </a:r>
-            <a:br>
-              <a:rPr lang="en-US" sz="1050" dirty="0">
-                <a:solidFill>
-                  <a:srgbClr val="667085"/>
-                </a:solidFill>
-                <a:latin typeface="Segoe UI" pitchFamily="34" charset="0"/>
-                <a:ea typeface="Segoe UI" pitchFamily="34" charset="-122"/>
-                <a:cs typeface="Segoe UI" pitchFamily="34" charset="-120"/>
-              </a:rPr>
-            </a:br>
-            <a:r>
-              <a:rPr lang="en-US" sz="1050" dirty="0">
-                <a:solidFill>
-                  <a:srgbClr val="667085"/>
-                </a:solidFill>
-                <a:latin typeface="Segoe UI" pitchFamily="34" charset="0"/>
-                <a:ea typeface="Segoe UI" pitchFamily="34" charset="-122"/>
-                <a:cs typeface="Segoe UI" pitchFamily="34" charset="-120"/>
-              </a:rPr>
-              <a:t>Incomplete coding and </a:t>
-            </a:r>
-            <a:br>
-              <a:rPr lang="en-US" sz="1050" dirty="0">
-                <a:solidFill>
-                  <a:srgbClr val="667085"/>
-                </a:solidFill>
-                <a:latin typeface="Segoe UI" pitchFamily="34" charset="0"/>
-                <a:ea typeface="Segoe UI" pitchFamily="34" charset="-122"/>
-                <a:cs typeface="Segoe UI" pitchFamily="34" charset="-120"/>
-              </a:rPr>
-            </a:br>
-            <a:r>
-              <a:rPr lang="en-US" sz="1050" dirty="0">
-                <a:solidFill>
-                  <a:srgbClr val="667085"/>
-                </a:solidFill>
-                <a:latin typeface="Segoe UI" pitchFamily="34" charset="0"/>
-                <a:ea typeface="Segoe UI" pitchFamily="34" charset="-122"/>
-                <a:cs typeface="Segoe UI" pitchFamily="34" charset="-120"/>
-              </a:rPr>
-              <a:t>slow claim packets turn into denials and write-offs.</a:t>
+              <a:t>Charges missed at the point of care, incomplete coding and slow claim packets turn into denials and write-offs.</a:t>
             </a:r>
             <a:endParaRPr lang="en-US" sz="1050" dirty="0"/>
           </a:p>
@@ -14919,7 +15157,7 @@
           <a:bodyPr wrap="square" rtlCol="0" anchor="t"/>
           <a:lstStyle/>
           <a:p>
-            <a:pPr marL="0" indent="0">
+            <a:pPr indent="0" marL="0">
               <a:buNone/>
             </a:pPr>
             <a:r>
@@ -14958,7 +15196,7 @@
           <a:bodyPr wrap="square" rtlCol="0" anchor="t"/>
           <a:lstStyle/>
           <a:p>
-            <a:pPr marL="0" indent="0">
+            <a:pPr indent="0" marL="0">
               <a:lnSpc>
                 <a:spcPct val="114000"/>
               </a:lnSpc>
@@ -14979,35 +15217,134 @@
           </a:p>
         </p:txBody>
       </p:sp>
-      <p:pic>
-        <p:nvPicPr>
-          <p:cNvPr id="55" name="Image 0" descr="D:\Aumrti 06-06-2026\docs\pitch\assets\aumrti-logo.png">
-            <a:extLst>
-              <a:ext uri="{FF2B5EF4-FFF2-40B4-BE49-F238E27FC236}">
-                <a16:creationId xmlns:a16="http://schemas.microsoft.com/office/drawing/2014/main" id="{CE052D68-67E9-DA13-7022-0E9F366BC5E7}"/>
-              </a:ext>
-            </a:extLst>
-          </p:cNvPr>
-          <p:cNvPicPr>
-            <a:picLocks noChangeAspect="1"/>
-          </p:cNvPicPr>
-          <p:nvPr/>
-        </p:nvPicPr>
-        <p:blipFill>
-          <a:blip r:embed="rId3"/>
-          <a:srcRect/>
-          <a:stretch/>
-        </p:blipFill>
-        <p:spPr>
-          <a:xfrm>
-            <a:off x="5154015" y="5376672"/>
-            <a:ext cx="1737360" cy="832664"/>
-          </a:xfrm>
-          <a:prstGeom prst="rect">
-            <a:avLst/>
-          </a:prstGeom>
-        </p:spPr>
-      </p:pic>
+      <p:sp>
+        <p:nvSpPr>
+          <p:cNvPr id="50" name="Shape 48"/>
+          <p:cNvSpPr/>
+          <p:nvPr/>
+        </p:nvSpPr>
+        <p:spPr>
+          <a:xfrm>
+            <a:off x="566928" y="4956048"/>
+            <a:ext cx="11057839" cy="1060704"/>
+          </a:xfrm>
+          <a:prstGeom prst="roundRect">
+            <a:avLst>
+              <a:gd name="adj" fmla="val 3448"/>
+            </a:avLst>
+          </a:prstGeom>
+          <a:solidFill>
+            <a:srgbClr val="F8FAFC"/>
+          </a:solidFill>
+          <a:ln w="9525">
+            <a:solidFill>
+              <a:srgbClr val="E4E7EC"/>
+            </a:solidFill>
+            <a:prstDash val="solid"/>
+          </a:ln>
+        </p:spPr>
+      </p:sp>
+      <p:sp>
+        <p:nvSpPr>
+          <p:cNvPr id="51" name="Shape 49"/>
+          <p:cNvSpPr/>
+          <p:nvPr/>
+        </p:nvSpPr>
+        <p:spPr>
+          <a:xfrm>
+            <a:off x="749808" y="5138928"/>
+            <a:ext cx="25603" cy="694944"/>
+          </a:xfrm>
+          <a:prstGeom prst="rect">
+            <a:avLst/>
+          </a:prstGeom>
+          <a:solidFill>
+            <a:srgbClr val="F5A310"/>
+          </a:solidFill>
+          <a:ln/>
+        </p:spPr>
+      </p:sp>
+      <p:sp>
+        <p:nvSpPr>
+          <p:cNvPr id="52" name="Text 50"/>
+          <p:cNvSpPr/>
+          <p:nvPr/>
+        </p:nvSpPr>
+        <p:spPr>
+          <a:xfrm>
+            <a:off x="914400" y="5120640"/>
+            <a:ext cx="10509199" cy="512064"/>
+          </a:xfrm>
+          <a:prstGeom prst="rect">
+            <a:avLst/>
+          </a:prstGeom>
+          <a:noFill/>
+          <a:ln/>
+        </p:spPr>
+        <p:txBody>
+          <a:bodyPr wrap="square" rtlCol="0" anchor="ctr"/>
+          <a:lstStyle/>
+          <a:p>
+            <a:pPr indent="0" marL="0">
+              <a:lnSpc>
+                <a:spcPct val="120000"/>
+              </a:lnSpc>
+              <a:buNone/>
+            </a:pPr>
+            <a:r>
+              <a:rPr lang="en-US" sz="1200" i="1" dirty="0">
+                <a:solidFill>
+                  <a:srgbClr val="1B305A"/>
+                </a:solidFill>
+                <a:latin typeface="Segoe UI" pitchFamily="34" charset="0"/>
+                <a:ea typeface="Segoe UI" pitchFamily="34" charset="-122"/>
+                <a:cs typeface="Segoe UI" pitchFamily="34" charset="-120"/>
+              </a:rPr>
+              <a:t>[ one verbatim line from a real hospital conversation — doctor, billing head or administrator ]</a:t>
+            </a:r>
+            <a:endParaRPr lang="en-US" sz="1200" dirty="0"/>
+          </a:p>
+        </p:txBody>
+      </p:sp>
+      <p:sp>
+        <p:nvSpPr>
+          <p:cNvPr id="53" name="Text 51"/>
+          <p:cNvSpPr/>
+          <p:nvPr/>
+        </p:nvSpPr>
+        <p:spPr>
+          <a:xfrm>
+            <a:off x="914400" y="5632704"/>
+            <a:ext cx="10509199" cy="237744"/>
+          </a:xfrm>
+          <a:prstGeom prst="rect">
+            <a:avLst/>
+          </a:prstGeom>
+          <a:noFill/>
+          <a:ln/>
+        </p:spPr>
+        <p:txBody>
+          <a:bodyPr wrap="square" rtlCol="0" anchor="ctr"/>
+          <a:lstStyle/>
+          <a:p>
+            <a:pPr indent="0" marL="0">
+              <a:buNone/>
+            </a:pPr>
+            <a:r>
+              <a:rPr lang="en-US" sz="850" dirty="0">
+                <a:solidFill>
+                  <a:srgbClr val="98A2B3"/>
+                </a:solidFill>
+                <a:latin typeface="Segoe UI" pitchFamily="34" charset="0"/>
+                <a:ea typeface="Segoe UI" pitchFamily="34" charset="-122"/>
+                <a:cs typeface="Segoe UI" pitchFamily="34" charset="-120"/>
+              </a:rPr>
+              <a:t>[ role ], [ hospital ] — [ month/year ]</a:t>
+            </a:r>
+            <a:endParaRPr lang="en-US" sz="850" dirty="0"/>
+          </a:p>
+        </p:txBody>
+      </p:sp>
     </p:spTree>
   </p:cSld>
   <p:clrMapOvr>
@@ -15024,7 +15361,6 @@
         <a:solidFill>
           <a:srgbClr val="FFFFFF"/>
         </a:solidFill>
-        <a:effectLst/>
       </p:bgPr>
     </p:bg>
     <p:spTree>
@@ -15062,11 +15398,11 @@
           <a:bodyPr wrap="square" rtlCol="0" anchor="ctr"/>
           <a:lstStyle/>
           <a:p>
-            <a:pPr marL="0" indent="0">
-              <a:buNone/>
-            </a:pPr>
-            <a:r>
-              <a:rPr lang="en-US" sz="1000" b="1" kern="0" spc="120" dirty="0">
+            <a:pPr indent="0" marL="0">
+              <a:buNone/>
+            </a:pPr>
+            <a:r>
+              <a:rPr lang="en-US" sz="1000" b="1" spc="120" kern="0" dirty="0">
                 <a:solidFill>
                   <a:srgbClr val="1B305A"/>
                 </a:solidFill>
@@ -15101,11 +15437,11 @@
           <a:bodyPr wrap="square" rtlCol="0" anchor="ctr"/>
           <a:lstStyle/>
           <a:p>
-            <a:pPr marL="0" indent="0">
-              <a:buNone/>
-            </a:pPr>
-            <a:r>
-              <a:rPr lang="en-US" sz="850" b="1" kern="0" spc="160" dirty="0">
+            <a:pPr indent="0" marL="0">
+              <a:buNone/>
+            </a:pPr>
+            <a:r>
+              <a:rPr lang="en-US" sz="850" b="1" spc="160" kern="0" dirty="0">
                 <a:solidFill>
                   <a:srgbClr val="F5A310"/>
                 </a:solidFill>
@@ -15140,7 +15476,7 @@
           <a:bodyPr wrap="square" rtlCol="0" anchor="t"/>
           <a:lstStyle/>
           <a:p>
-            <a:pPr marL="0" indent="0">
+            <a:pPr indent="0" marL="0">
               <a:buNone/>
             </a:pPr>
             <a:r>
@@ -15239,7 +15575,7 @@
           <a:bodyPr wrap="square" rtlCol="0" anchor="ctr"/>
           <a:lstStyle/>
           <a:p>
-            <a:pPr marL="0" indent="0">
+            <a:pPr indent="0" marL="0">
               <a:buNone/>
             </a:pPr>
             <a:r>
@@ -15278,7 +15614,7 @@
           <a:bodyPr wrap="square" rtlCol="0" anchor="ctr"/>
           <a:lstStyle/>
           <a:p>
-            <a:pPr marL="0" indent="0" algn="ctr">
+            <a:pPr algn="ctr" indent="0" marL="0">
               <a:buNone/>
             </a:pPr>
             <a:r>
@@ -15317,7 +15653,7 @@
           <a:bodyPr wrap="square" rtlCol="0" anchor="ctr"/>
           <a:lstStyle/>
           <a:p>
-            <a:pPr marL="0" indent="0" algn="r">
+            <a:pPr algn="r" indent="0" marL="0">
               <a:buNone/>
             </a:pPr>
             <a:r>
@@ -15383,7 +15719,7 @@
           <a:bodyPr wrap="square" rtlCol="0" anchor="t"/>
           <a:lstStyle/>
           <a:p>
-            <a:pPr marL="0" indent="0">
+            <a:pPr indent="0" marL="0">
               <a:buNone/>
             </a:pPr>
             <a:r>
@@ -15422,7 +15758,7 @@
           <a:bodyPr wrap="square" rtlCol="0" anchor="t"/>
           <a:lstStyle/>
           <a:p>
-            <a:pPr marL="0" indent="0">
+            <a:pPr indent="0" marL="0">
               <a:lnSpc>
                 <a:spcPct val="114000"/>
               </a:lnSpc>
@@ -15491,7 +15827,7 @@
           <a:bodyPr wrap="square" rtlCol="0" anchor="t"/>
           <a:lstStyle/>
           <a:p>
-            <a:pPr marL="0" indent="0">
+            <a:pPr indent="0" marL="0">
               <a:buNone/>
             </a:pPr>
             <a:r>
@@ -15530,7 +15866,7 @@
           <a:bodyPr wrap="square" rtlCol="0" anchor="t"/>
           <a:lstStyle/>
           <a:p>
-            <a:pPr marL="0" indent="0">
+            <a:pPr indent="0" marL="0">
               <a:lnSpc>
                 <a:spcPct val="114000"/>
               </a:lnSpc>
@@ -15599,7 +15935,7 @@
           <a:bodyPr wrap="square" rtlCol="0" anchor="t"/>
           <a:lstStyle/>
           <a:p>
-            <a:pPr marL="0" indent="0">
+            <a:pPr indent="0" marL="0">
               <a:buNone/>
             </a:pPr>
             <a:r>
@@ -15638,7 +15974,7 @@
           <a:bodyPr wrap="square" rtlCol="0" anchor="t"/>
           <a:lstStyle/>
           <a:p>
-            <a:pPr marL="0" indent="0">
+            <a:pPr indent="0" marL="0">
               <a:lnSpc>
                 <a:spcPct val="114000"/>
               </a:lnSpc>
@@ -15707,7 +16043,7 @@
           <a:bodyPr wrap="square" rtlCol="0" anchor="t"/>
           <a:lstStyle/>
           <a:p>
-            <a:pPr marL="0" indent="0">
+            <a:pPr indent="0" marL="0">
               <a:buNone/>
             </a:pPr>
             <a:r>
@@ -15746,7 +16082,7 @@
           <a:bodyPr wrap="square" rtlCol="0" anchor="t"/>
           <a:lstStyle/>
           <a:p>
-            <a:pPr marL="0" indent="0">
+            <a:pPr indent="0" marL="0">
               <a:lnSpc>
                 <a:spcPct val="114000"/>
               </a:lnSpc>
@@ -15783,7 +16119,6 @@
         <a:solidFill>
           <a:srgbClr val="FFFFFF"/>
         </a:solidFill>
-        <a:effectLst/>
       </p:bgPr>
     </p:bg>
     <p:spTree>
@@ -15821,11 +16156,11 @@
           <a:bodyPr wrap="square" rtlCol="0" anchor="ctr"/>
           <a:lstStyle/>
           <a:p>
-            <a:pPr marL="0" indent="0">
-              <a:buNone/>
-            </a:pPr>
-            <a:r>
-              <a:rPr lang="en-US" sz="1000" b="1" kern="0" spc="120" dirty="0">
+            <a:pPr indent="0" marL="0">
+              <a:buNone/>
+            </a:pPr>
+            <a:r>
+              <a:rPr lang="en-US" sz="1000" b="1" spc="120" kern="0" dirty="0">
                 <a:solidFill>
                   <a:srgbClr val="1B305A"/>
                 </a:solidFill>
@@ -15860,11 +16195,11 @@
           <a:bodyPr wrap="square" rtlCol="0" anchor="ctr"/>
           <a:lstStyle/>
           <a:p>
-            <a:pPr marL="0" indent="0">
-              <a:buNone/>
-            </a:pPr>
-            <a:r>
-              <a:rPr lang="en-US" sz="850" b="1" kern="0" spc="160" dirty="0">
+            <a:pPr indent="0" marL="0">
+              <a:buNone/>
+            </a:pPr>
+            <a:r>
+              <a:rPr lang="en-US" sz="850" b="1" spc="160" kern="0" dirty="0">
                 <a:solidFill>
                   <a:srgbClr val="F5A310"/>
                 </a:solidFill>
@@ -15899,7 +16234,7 @@
           <a:bodyPr wrap="square" rtlCol="0" anchor="t"/>
           <a:lstStyle/>
           <a:p>
-            <a:pPr marL="0" indent="0">
+            <a:pPr indent="0" marL="0">
               <a:buNone/>
             </a:pPr>
             <a:r>
@@ -15998,7 +16333,7 @@
           <a:bodyPr wrap="square" rtlCol="0" anchor="ctr"/>
           <a:lstStyle/>
           <a:p>
-            <a:pPr marL="0" indent="0">
+            <a:pPr indent="0" marL="0">
               <a:buNone/>
             </a:pPr>
             <a:r>
@@ -16037,7 +16372,7 @@
           <a:bodyPr wrap="square" rtlCol="0" anchor="ctr"/>
           <a:lstStyle/>
           <a:p>
-            <a:pPr marL="0" indent="0" algn="ctr">
+            <a:pPr algn="ctr" indent="0" marL="0">
               <a:buNone/>
             </a:pPr>
             <a:r>
@@ -16076,7 +16411,7 @@
           <a:bodyPr wrap="square" rtlCol="0" anchor="ctr"/>
           <a:lstStyle/>
           <a:p>
-            <a:pPr marL="0" indent="0" algn="r">
+            <a:pPr algn="r" indent="0" marL="0">
               <a:buNone/>
             </a:pPr>
             <a:r>
@@ -16142,7 +16477,7 @@
           <a:bodyPr wrap="square" rtlCol="0" anchor="t"/>
           <a:lstStyle/>
           <a:p>
-            <a:pPr marL="0" indent="0">
+            <a:pPr indent="0" marL="0">
               <a:buNone/>
             </a:pPr>
             <a:r>
@@ -16181,7 +16516,7 @@
           <a:bodyPr wrap="square" rtlCol="0" anchor="t"/>
           <a:lstStyle/>
           <a:p>
-            <a:pPr marL="0" indent="0">
+            <a:pPr indent="0" marL="0">
               <a:lnSpc>
                 <a:spcPct val="114000"/>
               </a:lnSpc>
@@ -16250,7 +16585,7 @@
           <a:bodyPr wrap="square" rtlCol="0" anchor="t"/>
           <a:lstStyle/>
           <a:p>
-            <a:pPr marL="0" indent="0">
+            <a:pPr indent="0" marL="0">
               <a:buNone/>
             </a:pPr>
             <a:r>
@@ -16289,7 +16624,7 @@
           <a:bodyPr wrap="square" rtlCol="0" anchor="t"/>
           <a:lstStyle/>
           <a:p>
-            <a:pPr marL="0" indent="0">
+            <a:pPr indent="0" marL="0">
               <a:lnSpc>
                 <a:spcPct val="114000"/>
               </a:lnSpc>
@@ -16358,7 +16693,7 @@
           <a:bodyPr wrap="square" rtlCol="0" anchor="t"/>
           <a:lstStyle/>
           <a:p>
-            <a:pPr marL="0" indent="0">
+            <a:pPr indent="0" marL="0">
               <a:buNone/>
             </a:pPr>
             <a:r>
@@ -16397,7 +16732,7 @@
           <a:bodyPr wrap="square" rtlCol="0" anchor="t"/>
           <a:lstStyle/>
           <a:p>
-            <a:pPr marL="0" indent="0">
+            <a:pPr indent="0" marL="0">
               <a:lnSpc>
                 <a:spcPct val="114000"/>
               </a:lnSpc>
@@ -16466,7 +16801,7 @@
           <a:bodyPr wrap="square" rtlCol="0" anchor="t"/>
           <a:lstStyle/>
           <a:p>
-            <a:pPr marL="0" indent="0">
+            <a:pPr indent="0" marL="0">
               <a:buNone/>
             </a:pPr>
             <a:r>
@@ -16505,7 +16840,7 @@
           <a:bodyPr wrap="square" rtlCol="0" anchor="t"/>
           <a:lstStyle/>
           <a:p>
-            <a:pPr marL="0" indent="0">
+            <a:pPr indent="0" marL="0">
               <a:lnSpc>
                 <a:spcPct val="114000"/>
               </a:lnSpc>
@@ -16542,7 +16877,6 @@
         <a:solidFill>
           <a:srgbClr val="FFFFFF"/>
         </a:solidFill>
-        <a:effectLst/>
       </p:bgPr>
     </p:bg>
     <p:spTree>
@@ -16580,11 +16914,11 @@
           <a:bodyPr wrap="square" rtlCol="0" anchor="ctr"/>
           <a:lstStyle/>
           <a:p>
-            <a:pPr marL="0" indent="0">
-              <a:buNone/>
-            </a:pPr>
-            <a:r>
-              <a:rPr lang="en-US" sz="1000" b="1" kern="0" spc="120" dirty="0">
+            <a:pPr indent="0" marL="0">
+              <a:buNone/>
+            </a:pPr>
+            <a:r>
+              <a:rPr lang="en-US" sz="1000" b="1" spc="120" kern="0" dirty="0">
                 <a:solidFill>
                   <a:srgbClr val="1B305A"/>
                 </a:solidFill>
@@ -16619,11 +16953,11 @@
           <a:bodyPr wrap="square" rtlCol="0" anchor="ctr"/>
           <a:lstStyle/>
           <a:p>
-            <a:pPr marL="0" indent="0">
-              <a:buNone/>
-            </a:pPr>
-            <a:r>
-              <a:rPr lang="en-US" sz="850" b="1" kern="0" spc="160" dirty="0">
+            <a:pPr indent="0" marL="0">
+              <a:buNone/>
+            </a:pPr>
+            <a:r>
+              <a:rPr lang="en-US" sz="850" b="1" spc="160" kern="0" dirty="0">
                 <a:solidFill>
                   <a:srgbClr val="F5A310"/>
                 </a:solidFill>
@@ -16658,7 +16992,7 @@
           <a:bodyPr wrap="square" rtlCol="0" anchor="t"/>
           <a:lstStyle/>
           <a:p>
-            <a:pPr marL="0" indent="0">
+            <a:pPr indent="0" marL="0">
               <a:buNone/>
             </a:pPr>
             <a:r>
@@ -16737,7 +17071,7 @@
           <a:bodyPr wrap="square" rtlCol="0" anchor="t"/>
           <a:lstStyle/>
           <a:p>
-            <a:pPr marL="0" indent="0">
+            <a:pPr indent="0" marL="0">
               <a:lnSpc>
                 <a:spcPct val="120000"/>
               </a:lnSpc>
@@ -16799,7 +17133,7 @@
           <a:bodyPr wrap="square" rtlCol="0" anchor="ctr"/>
           <a:lstStyle/>
           <a:p>
-            <a:pPr marL="0" indent="0">
+            <a:pPr indent="0" marL="0">
               <a:buNone/>
             </a:pPr>
             <a:r>
@@ -16838,7 +17172,7 @@
           <a:bodyPr wrap="square" rtlCol="0" anchor="ctr"/>
           <a:lstStyle/>
           <a:p>
-            <a:pPr marL="0" indent="0" algn="ctr">
+            <a:pPr algn="ctr" indent="0" marL="0">
               <a:buNone/>
             </a:pPr>
             <a:r>
@@ -16877,7 +17211,7 @@
           <a:bodyPr wrap="square" rtlCol="0" anchor="ctr"/>
           <a:lstStyle/>
           <a:p>
-            <a:pPr marL="0" indent="0" algn="r">
+            <a:pPr algn="r" indent="0" marL="0">
               <a:buNone/>
             </a:pPr>
             <a:r>
@@ -16943,7 +17277,7 @@
           <a:bodyPr wrap="square" rtlCol="0" anchor="t"/>
           <a:lstStyle/>
           <a:p>
-            <a:pPr marL="0" indent="0">
+            <a:pPr indent="0" marL="0">
               <a:buNone/>
             </a:pPr>
             <a:r>
@@ -16982,7 +17316,7 @@
           <a:bodyPr wrap="square" rtlCol="0" anchor="t"/>
           <a:lstStyle/>
           <a:p>
-            <a:pPr marL="0" indent="0">
+            <a:pPr indent="0" marL="0">
               <a:lnSpc>
                 <a:spcPct val="114000"/>
               </a:lnSpc>
@@ -17051,7 +17385,7 @@
           <a:bodyPr wrap="square" rtlCol="0" anchor="t"/>
           <a:lstStyle/>
           <a:p>
-            <a:pPr marL="0" indent="0">
+            <a:pPr indent="0" marL="0">
               <a:buNone/>
             </a:pPr>
             <a:r>
@@ -17090,7 +17424,7 @@
           <a:bodyPr wrap="square" rtlCol="0" anchor="t"/>
           <a:lstStyle/>
           <a:p>
-            <a:pPr marL="0" indent="0">
+            <a:pPr indent="0" marL="0">
               <a:lnSpc>
                 <a:spcPct val="114000"/>
               </a:lnSpc>
@@ -17159,7 +17493,7 @@
           <a:bodyPr wrap="square" rtlCol="0" anchor="t"/>
           <a:lstStyle/>
           <a:p>
-            <a:pPr marL="0" indent="0">
+            <a:pPr indent="0" marL="0">
               <a:buNone/>
             </a:pPr>
             <a:r>
@@ -17198,7 +17532,7 @@
           <a:bodyPr wrap="square" rtlCol="0" anchor="t"/>
           <a:lstStyle/>
           <a:p>
-            <a:pPr marL="0" indent="0">
+            <a:pPr indent="0" marL="0">
               <a:lnSpc>
                 <a:spcPct val="114000"/>
               </a:lnSpc>
@@ -17267,7 +17601,7 @@
           <a:bodyPr wrap="square" rtlCol="0" anchor="t"/>
           <a:lstStyle/>
           <a:p>
-            <a:pPr marL="0" indent="0">
+            <a:pPr indent="0" marL="0">
               <a:buNone/>
             </a:pPr>
             <a:r>
@@ -17306,7 +17640,7 @@
           <a:bodyPr wrap="square" rtlCol="0" anchor="t"/>
           <a:lstStyle/>
           <a:p>
-            <a:pPr marL="0" indent="0">
+            <a:pPr indent="0" marL="0">
               <a:lnSpc>
                 <a:spcPct val="114000"/>
               </a:lnSpc>
@@ -17348,7 +17682,7 @@
           <a:bodyPr wrap="square" rtlCol="0" anchor="ctr"/>
           <a:lstStyle/>
           <a:p>
-            <a:pPr marL="0" indent="0">
+            <a:pPr indent="0" marL="0">
               <a:buNone/>
             </a:pPr>
             <a:r>
@@ -17382,7 +17716,6 @@
         <a:solidFill>
           <a:srgbClr val="FFFFFF"/>
         </a:solidFill>
-        <a:effectLst/>
       </p:bgPr>
     </p:bg>
     <p:spTree>
@@ -17420,11 +17753,11 @@
           <a:bodyPr wrap="square" rtlCol="0" anchor="ctr"/>
           <a:lstStyle/>
           <a:p>
-            <a:pPr marL="0" indent="0">
-              <a:buNone/>
-            </a:pPr>
-            <a:r>
-              <a:rPr lang="en-US" sz="1000" b="1" kern="0" spc="120" dirty="0">
+            <a:pPr indent="0" marL="0">
+              <a:buNone/>
+            </a:pPr>
+            <a:r>
+              <a:rPr lang="en-US" sz="1000" b="1" spc="120" kern="0" dirty="0">
                 <a:solidFill>
                   <a:srgbClr val="1B305A"/>
                 </a:solidFill>
@@ -17459,11 +17792,11 @@
           <a:bodyPr wrap="square" rtlCol="0" anchor="ctr"/>
           <a:lstStyle/>
           <a:p>
-            <a:pPr marL="0" indent="0">
-              <a:buNone/>
-            </a:pPr>
-            <a:r>
-              <a:rPr lang="en-US" sz="850" b="1" kern="0" spc="160" dirty="0">
+            <a:pPr indent="0" marL="0">
+              <a:buNone/>
+            </a:pPr>
+            <a:r>
+              <a:rPr lang="en-US" sz="850" b="1" spc="160" kern="0" dirty="0">
                 <a:solidFill>
                   <a:srgbClr val="F5A310"/>
                 </a:solidFill>
@@ -17498,7 +17831,7 @@
           <a:bodyPr wrap="square" rtlCol="0" anchor="t"/>
           <a:lstStyle/>
           <a:p>
-            <a:pPr marL="0" indent="0">
+            <a:pPr indent="0" marL="0">
               <a:buNone/>
             </a:pPr>
             <a:r>
@@ -17597,7 +17930,7 @@
           <a:bodyPr wrap="square" rtlCol="0" anchor="ctr"/>
           <a:lstStyle/>
           <a:p>
-            <a:pPr marL="0" indent="0">
+            <a:pPr indent="0" marL="0">
               <a:buNone/>
             </a:pPr>
             <a:r>
@@ -17636,7 +17969,7 @@
           <a:bodyPr wrap="square" rtlCol="0" anchor="ctr"/>
           <a:lstStyle/>
           <a:p>
-            <a:pPr marL="0" indent="0" algn="ctr">
+            <a:pPr algn="ctr" indent="0" marL="0">
               <a:buNone/>
             </a:pPr>
             <a:r>
@@ -17675,7 +18008,7 @@
           <a:bodyPr wrap="square" rtlCol="0" anchor="ctr"/>
           <a:lstStyle/>
           <a:p>
-            <a:pPr marL="0" indent="0" algn="r">
+            <a:pPr algn="r" indent="0" marL="0">
               <a:buNone/>
             </a:pPr>
             <a:r>
@@ -17741,7 +18074,7 @@
           <a:bodyPr wrap="square" rtlCol="0" anchor="ctr"/>
           <a:lstStyle/>
           <a:p>
-            <a:pPr marL="0" indent="0">
+            <a:pPr indent="0" marL="0">
               <a:buNone/>
             </a:pPr>
             <a:r>
@@ -17780,11 +18113,11 @@
           <a:bodyPr wrap="square" rtlCol="0" anchor="t"/>
           <a:lstStyle/>
           <a:p>
-            <a:pPr marL="0" indent="0">
-              <a:buNone/>
-            </a:pPr>
-            <a:r>
-              <a:rPr lang="en-US" sz="820" b="1" kern="0" spc="100" dirty="0">
+            <a:pPr indent="0" marL="0">
+              <a:buNone/>
+            </a:pPr>
+            <a:r>
+              <a:rPr lang="en-US" sz="820" b="1" spc="100" kern="0" dirty="0">
                 <a:solidFill>
                   <a:srgbClr val="667085"/>
                 </a:solidFill>
@@ -17839,7 +18172,7 @@
           <a:bodyPr wrap="square" rtlCol="0" anchor="t"/>
           <a:lstStyle/>
           <a:p>
-            <a:pPr marL="0" indent="0">
+            <a:pPr indent="0" marL="0">
               <a:lnSpc>
                 <a:spcPct val="122000"/>
               </a:lnSpc>
@@ -17859,7 +18192,7 @@
             <a:endParaRPr lang="en-US" sz="940" dirty="0"/>
           </a:p>
           <a:p>
-            <a:pPr marL="0" indent="0">
+            <a:pPr indent="0" marL="0">
               <a:lnSpc>
                 <a:spcPct val="122000"/>
               </a:lnSpc>
@@ -17879,7 +18212,7 @@
             <a:endParaRPr lang="en-US" sz="940" dirty="0"/>
           </a:p>
           <a:p>
-            <a:pPr marL="0" indent="0">
+            <a:pPr indent="0" marL="0">
               <a:lnSpc>
                 <a:spcPct val="122000"/>
               </a:lnSpc>
@@ -17899,7 +18232,7 @@
             <a:endParaRPr lang="en-US" sz="940" dirty="0"/>
           </a:p>
           <a:p>
-            <a:pPr marL="0" indent="0">
+            <a:pPr indent="0" marL="0">
               <a:lnSpc>
                 <a:spcPct val="122000"/>
               </a:lnSpc>
@@ -17919,7 +18252,7 @@
             <a:endParaRPr lang="en-US" sz="940" dirty="0"/>
           </a:p>
           <a:p>
-            <a:pPr marL="0" indent="0">
+            <a:pPr indent="0" marL="0">
               <a:lnSpc>
                 <a:spcPct val="122000"/>
               </a:lnSpc>
@@ -17939,7 +18272,7 @@
             <a:endParaRPr lang="en-US" sz="940" dirty="0"/>
           </a:p>
           <a:p>
-            <a:pPr marL="0" indent="0">
+            <a:pPr indent="0" marL="0">
               <a:lnSpc>
                 <a:spcPct val="122000"/>
               </a:lnSpc>
@@ -17959,7 +18292,7 @@
             <a:endParaRPr lang="en-US" sz="940" dirty="0"/>
           </a:p>
           <a:p>
-            <a:pPr marL="0" indent="0">
+            <a:pPr indent="0" marL="0">
               <a:lnSpc>
                 <a:spcPct val="122000"/>
               </a:lnSpc>
@@ -17979,7 +18312,7 @@
             <a:endParaRPr lang="en-US" sz="940" dirty="0"/>
           </a:p>
           <a:p>
-            <a:pPr marL="0" indent="0">
+            <a:pPr indent="0" marL="0">
               <a:lnSpc>
                 <a:spcPct val="122000"/>
               </a:lnSpc>
@@ -18048,7 +18381,7 @@
           <a:bodyPr wrap="square" rtlCol="0" anchor="ctr"/>
           <a:lstStyle/>
           <a:p>
-            <a:pPr marL="0" indent="0">
+            <a:pPr indent="0" marL="0">
               <a:buNone/>
             </a:pPr>
             <a:r>
@@ -18087,11 +18420,11 @@
           <a:bodyPr wrap="square" rtlCol="0" anchor="t"/>
           <a:lstStyle/>
           <a:p>
-            <a:pPr marL="0" indent="0">
-              <a:buNone/>
-            </a:pPr>
-            <a:r>
-              <a:rPr lang="en-US" sz="820" b="1" kern="0" spc="100" dirty="0">
+            <a:pPr indent="0" marL="0">
+              <a:buNone/>
+            </a:pPr>
+            <a:r>
+              <a:rPr lang="en-US" sz="820" b="1" spc="100" kern="0" dirty="0">
                 <a:solidFill>
                   <a:srgbClr val="667085"/>
                 </a:solidFill>
@@ -18146,7 +18479,7 @@
           <a:bodyPr wrap="square" rtlCol="0" anchor="t"/>
           <a:lstStyle/>
           <a:p>
-            <a:pPr marL="0" indent="0">
+            <a:pPr indent="0" marL="0">
               <a:lnSpc>
                 <a:spcPct val="122000"/>
               </a:lnSpc>
@@ -18166,7 +18499,7 @@
             <a:endParaRPr lang="en-US" sz="940" dirty="0"/>
           </a:p>
           <a:p>
-            <a:pPr marL="0" indent="0">
+            <a:pPr indent="0" marL="0">
               <a:lnSpc>
                 <a:spcPct val="122000"/>
               </a:lnSpc>
@@ -18186,7 +18519,7 @@
             <a:endParaRPr lang="en-US" sz="940" dirty="0"/>
           </a:p>
           <a:p>
-            <a:pPr marL="0" indent="0">
+            <a:pPr indent="0" marL="0">
               <a:lnSpc>
                 <a:spcPct val="122000"/>
               </a:lnSpc>
@@ -18206,7 +18539,7 @@
             <a:endParaRPr lang="en-US" sz="940" dirty="0"/>
           </a:p>
           <a:p>
-            <a:pPr marL="0" indent="0">
+            <a:pPr indent="0" marL="0">
               <a:lnSpc>
                 <a:spcPct val="122000"/>
               </a:lnSpc>
@@ -18226,7 +18559,7 @@
             <a:endParaRPr lang="en-US" sz="940" dirty="0"/>
           </a:p>
           <a:p>
-            <a:pPr marL="0" indent="0">
+            <a:pPr indent="0" marL="0">
               <a:lnSpc>
                 <a:spcPct val="122000"/>
               </a:lnSpc>
@@ -18246,7 +18579,7 @@
             <a:endParaRPr lang="en-US" sz="940" dirty="0"/>
           </a:p>
           <a:p>
-            <a:pPr marL="0" indent="0">
+            <a:pPr indent="0" marL="0">
               <a:lnSpc>
                 <a:spcPct val="122000"/>
               </a:lnSpc>
@@ -18315,7 +18648,7 @@
           <a:bodyPr wrap="square" rtlCol="0" anchor="ctr"/>
           <a:lstStyle/>
           <a:p>
-            <a:pPr marL="0" indent="0">
+            <a:pPr indent="0" marL="0">
               <a:buNone/>
             </a:pPr>
             <a:r>
@@ -18354,11 +18687,11 @@
           <a:bodyPr wrap="square" rtlCol="0" anchor="t"/>
           <a:lstStyle/>
           <a:p>
-            <a:pPr marL="0" indent="0">
-              <a:buNone/>
-            </a:pPr>
-            <a:r>
-              <a:rPr lang="en-US" sz="820" b="1" kern="0" spc="100" dirty="0">
+            <a:pPr indent="0" marL="0">
+              <a:buNone/>
+            </a:pPr>
+            <a:r>
+              <a:rPr lang="en-US" sz="820" b="1" spc="100" kern="0" dirty="0">
                 <a:solidFill>
                   <a:srgbClr val="667085"/>
                 </a:solidFill>
@@ -18413,7 +18746,7 @@
           <a:bodyPr wrap="square" rtlCol="0" anchor="t"/>
           <a:lstStyle/>
           <a:p>
-            <a:pPr marL="0" indent="0">
+            <a:pPr indent="0" marL="0">
               <a:lnSpc>
                 <a:spcPct val="122000"/>
               </a:lnSpc>
@@ -18433,7 +18766,7 @@
             <a:endParaRPr lang="en-US" sz="940" dirty="0"/>
           </a:p>
           <a:p>
-            <a:pPr marL="0" indent="0">
+            <a:pPr indent="0" marL="0">
               <a:lnSpc>
                 <a:spcPct val="122000"/>
               </a:lnSpc>
@@ -18453,7 +18786,7 @@
             <a:endParaRPr lang="en-US" sz="940" dirty="0"/>
           </a:p>
           <a:p>
-            <a:pPr marL="0" indent="0">
+            <a:pPr indent="0" marL="0">
               <a:lnSpc>
                 <a:spcPct val="122000"/>
               </a:lnSpc>
@@ -18473,7 +18806,7 @@
             <a:endParaRPr lang="en-US" sz="940" dirty="0"/>
           </a:p>
           <a:p>
-            <a:pPr marL="0" indent="0">
+            <a:pPr indent="0" marL="0">
               <a:lnSpc>
                 <a:spcPct val="122000"/>
               </a:lnSpc>
@@ -18493,7 +18826,7 @@
             <a:endParaRPr lang="en-US" sz="940" dirty="0"/>
           </a:p>
           <a:p>
-            <a:pPr marL="0" indent="0">
+            <a:pPr indent="0" marL="0">
               <a:lnSpc>
                 <a:spcPct val="122000"/>
               </a:lnSpc>
@@ -18513,7 +18846,7 @@
             <a:endParaRPr lang="en-US" sz="940" dirty="0"/>
           </a:p>
           <a:p>
-            <a:pPr marL="0" indent="0">
+            <a:pPr indent="0" marL="0">
               <a:lnSpc>
                 <a:spcPct val="122000"/>
               </a:lnSpc>
@@ -18533,7 +18866,7 @@
             <a:endParaRPr lang="en-US" sz="940" dirty="0"/>
           </a:p>
           <a:p>
-            <a:pPr marL="0" indent="0">
+            <a:pPr indent="0" marL="0">
               <a:lnSpc>
                 <a:spcPct val="122000"/>
               </a:lnSpc>
@@ -18553,7 +18886,7 @@
             <a:endParaRPr lang="en-US" sz="940" dirty="0"/>
           </a:p>
           <a:p>
-            <a:pPr marL="0" indent="0">
+            <a:pPr indent="0" marL="0">
               <a:lnSpc>
                 <a:spcPct val="122000"/>
               </a:lnSpc>
@@ -18573,7 +18906,7 @@
             <a:endParaRPr lang="en-US" sz="940" dirty="0"/>
           </a:p>
           <a:p>
-            <a:pPr marL="0" indent="0">
+            <a:pPr indent="0" marL="0">
               <a:lnSpc>
                 <a:spcPct val="122000"/>
               </a:lnSpc>
@@ -18593,7 +18926,7 @@
             <a:endParaRPr lang="en-US" sz="940" dirty="0"/>
           </a:p>
           <a:p>
-            <a:pPr marL="0" indent="0">
+            <a:pPr indent="0" marL="0">
               <a:lnSpc>
                 <a:spcPct val="122000"/>
               </a:lnSpc>
@@ -18613,7 +18946,7 @@
             <a:endParaRPr lang="en-US" sz="940" dirty="0"/>
           </a:p>
           <a:p>
-            <a:pPr marL="0" indent="0">
+            <a:pPr indent="0" marL="0">
               <a:lnSpc>
                 <a:spcPct val="122000"/>
               </a:lnSpc>
@@ -18633,7 +18966,7 @@
             <a:endParaRPr lang="en-US" sz="940" dirty="0"/>
           </a:p>
           <a:p>
-            <a:pPr marL="0" indent="0">
+            <a:pPr indent="0" marL="0">
               <a:lnSpc>
                 <a:spcPct val="122000"/>
               </a:lnSpc>
@@ -18653,7 +18986,7 @@
             <a:endParaRPr lang="en-US" sz="940" dirty="0"/>
           </a:p>
           <a:p>
-            <a:pPr marL="0" indent="0">
+            <a:pPr indent="0" marL="0">
               <a:lnSpc>
                 <a:spcPct val="122000"/>
               </a:lnSpc>
@@ -18673,7 +19006,7 @@
             <a:endParaRPr lang="en-US" sz="940" dirty="0"/>
           </a:p>
           <a:p>
-            <a:pPr marL="0" indent="0">
+            <a:pPr indent="0" marL="0">
               <a:lnSpc>
                 <a:spcPct val="122000"/>
               </a:lnSpc>
@@ -18693,7 +19026,7 @@
             <a:endParaRPr lang="en-US" sz="940" dirty="0"/>
           </a:p>
           <a:p>
-            <a:pPr marL="0" indent="0">
+            <a:pPr indent="0" marL="0">
               <a:lnSpc>
                 <a:spcPct val="122000"/>
               </a:lnSpc>
@@ -18762,7 +19095,7 @@
           <a:bodyPr wrap="square" rtlCol="0" anchor="ctr"/>
           <a:lstStyle/>
           <a:p>
-            <a:pPr marL="0" indent="0">
+            <a:pPr indent="0" marL="0">
               <a:buNone/>
             </a:pPr>
             <a:r>
@@ -18801,11 +19134,11 @@
           <a:bodyPr wrap="square" rtlCol="0" anchor="t"/>
           <a:lstStyle/>
           <a:p>
-            <a:pPr marL="0" indent="0">
-              <a:buNone/>
-            </a:pPr>
-            <a:r>
-              <a:rPr lang="en-US" sz="820" b="1" kern="0" spc="100" dirty="0">
+            <a:pPr indent="0" marL="0">
+              <a:buNone/>
+            </a:pPr>
+            <a:r>
+              <a:rPr lang="en-US" sz="820" b="1" spc="100" kern="0" dirty="0">
                 <a:solidFill>
                   <a:srgbClr val="667085"/>
                 </a:solidFill>
@@ -18860,7 +19193,7 @@
           <a:bodyPr wrap="square" rtlCol="0" anchor="t"/>
           <a:lstStyle/>
           <a:p>
-            <a:pPr marL="0" indent="0">
+            <a:pPr indent="0" marL="0">
               <a:lnSpc>
                 <a:spcPct val="122000"/>
               </a:lnSpc>
@@ -18880,7 +19213,7 @@
             <a:endParaRPr lang="en-US" sz="940" dirty="0"/>
           </a:p>
           <a:p>
-            <a:pPr marL="0" indent="0">
+            <a:pPr indent="0" marL="0">
               <a:lnSpc>
                 <a:spcPct val="122000"/>
               </a:lnSpc>
@@ -18900,7 +19233,7 @@
             <a:endParaRPr lang="en-US" sz="940" dirty="0"/>
           </a:p>
           <a:p>
-            <a:pPr marL="0" indent="0">
+            <a:pPr indent="0" marL="0">
               <a:lnSpc>
                 <a:spcPct val="122000"/>
               </a:lnSpc>
@@ -18920,7 +19253,7 @@
             <a:endParaRPr lang="en-US" sz="940" dirty="0"/>
           </a:p>
           <a:p>
-            <a:pPr marL="0" indent="0">
+            <a:pPr indent="0" marL="0">
               <a:lnSpc>
                 <a:spcPct val="122000"/>
               </a:lnSpc>
@@ -18940,7 +19273,7 @@
             <a:endParaRPr lang="en-US" sz="940" dirty="0"/>
           </a:p>
           <a:p>
-            <a:pPr marL="0" indent="0">
+            <a:pPr indent="0" marL="0">
               <a:lnSpc>
                 <a:spcPct val="122000"/>
               </a:lnSpc>
@@ -18960,7 +19293,7 @@
             <a:endParaRPr lang="en-US" sz="940" dirty="0"/>
           </a:p>
           <a:p>
-            <a:pPr marL="0" indent="0">
+            <a:pPr indent="0" marL="0">
               <a:lnSpc>
                 <a:spcPct val="122000"/>
               </a:lnSpc>
@@ -18980,7 +19313,7 @@
             <a:endParaRPr lang="en-US" sz="940" dirty="0"/>
           </a:p>
           <a:p>
-            <a:pPr marL="0" indent="0">
+            <a:pPr indent="0" marL="0">
               <a:lnSpc>
                 <a:spcPct val="122000"/>
               </a:lnSpc>
@@ -19049,7 +19382,7 @@
           <a:bodyPr wrap="square" rtlCol="0" anchor="ctr"/>
           <a:lstStyle/>
           <a:p>
-            <a:pPr marL="0" indent="0">
+            <a:pPr indent="0" marL="0">
               <a:buNone/>
             </a:pPr>
             <a:r>
@@ -19088,11 +19421,11 @@
           <a:bodyPr wrap="square" rtlCol="0" anchor="t"/>
           <a:lstStyle/>
           <a:p>
-            <a:pPr marL="0" indent="0">
-              <a:buNone/>
-            </a:pPr>
-            <a:r>
-              <a:rPr lang="en-US" sz="820" b="1" kern="0" spc="100" dirty="0">
+            <a:pPr indent="0" marL="0">
+              <a:buNone/>
+            </a:pPr>
+            <a:r>
+              <a:rPr lang="en-US" sz="820" b="1" spc="100" kern="0" dirty="0">
                 <a:solidFill>
                   <a:srgbClr val="667085"/>
                 </a:solidFill>
@@ -19147,7 +19480,7 @@
           <a:bodyPr wrap="square" rtlCol="0" anchor="t"/>
           <a:lstStyle/>
           <a:p>
-            <a:pPr marL="0" indent="0">
+            <a:pPr indent="0" marL="0">
               <a:lnSpc>
                 <a:spcPct val="122000"/>
               </a:lnSpc>
@@ -19167,7 +19500,7 @@
             <a:endParaRPr lang="en-US" sz="940" dirty="0"/>
           </a:p>
           <a:p>
-            <a:pPr marL="0" indent="0">
+            <a:pPr indent="0" marL="0">
               <a:lnSpc>
                 <a:spcPct val="122000"/>
               </a:lnSpc>
@@ -19187,7 +19520,7 @@
             <a:endParaRPr lang="en-US" sz="940" dirty="0"/>
           </a:p>
           <a:p>
-            <a:pPr marL="0" indent="0">
+            <a:pPr indent="0" marL="0">
               <a:lnSpc>
                 <a:spcPct val="122000"/>
               </a:lnSpc>
@@ -19207,7 +19540,7 @@
             <a:endParaRPr lang="en-US" sz="940" dirty="0"/>
           </a:p>
           <a:p>
-            <a:pPr marL="0" indent="0">
+            <a:pPr indent="0" marL="0">
               <a:lnSpc>
                 <a:spcPct val="122000"/>
               </a:lnSpc>
@@ -19227,7 +19560,7 @@
             <a:endParaRPr lang="en-US" sz="940" dirty="0"/>
           </a:p>
           <a:p>
-            <a:pPr marL="0" indent="0">
+            <a:pPr indent="0" marL="0">
               <a:lnSpc>
                 <a:spcPct val="122000"/>
               </a:lnSpc>
@@ -19247,7 +19580,7 @@
             <a:endParaRPr lang="en-US" sz="940" dirty="0"/>
           </a:p>
           <a:p>
-            <a:pPr marL="0" indent="0">
+            <a:pPr indent="0" marL="0">
               <a:lnSpc>
                 <a:spcPct val="122000"/>
               </a:lnSpc>
@@ -19267,7 +19600,7 @@
             <a:endParaRPr lang="en-US" sz="940" dirty="0"/>
           </a:p>
           <a:p>
-            <a:pPr marL="0" indent="0">
+            <a:pPr indent="0" marL="0">
               <a:lnSpc>
                 <a:spcPct val="122000"/>
               </a:lnSpc>
@@ -19287,7 +19620,7 @@
             <a:endParaRPr lang="en-US" sz="940" dirty="0"/>
           </a:p>
           <a:p>
-            <a:pPr marL="0" indent="0">
+            <a:pPr indent="0" marL="0">
               <a:lnSpc>
                 <a:spcPct val="122000"/>
               </a:lnSpc>
@@ -19307,7 +19640,7 @@
             <a:endParaRPr lang="en-US" sz="940" dirty="0"/>
           </a:p>
           <a:p>
-            <a:pPr marL="0" indent="0">
+            <a:pPr indent="0" marL="0">
               <a:lnSpc>
                 <a:spcPct val="122000"/>
               </a:lnSpc>
@@ -19327,7 +19660,7 @@
             <a:endParaRPr lang="en-US" sz="940" dirty="0"/>
           </a:p>
           <a:p>
-            <a:pPr marL="0" indent="0">
+            <a:pPr indent="0" marL="0">
               <a:lnSpc>
                 <a:spcPct val="122000"/>
               </a:lnSpc>
@@ -19347,7 +19680,7 @@
             <a:endParaRPr lang="en-US" sz="940" dirty="0"/>
           </a:p>
           <a:p>
-            <a:pPr marL="0" indent="0">
+            <a:pPr indent="0" marL="0">
               <a:lnSpc>
                 <a:spcPct val="122000"/>
               </a:lnSpc>
@@ -19367,7 +19700,7 @@
             <a:endParaRPr lang="en-US" sz="940" dirty="0"/>
           </a:p>
           <a:p>
-            <a:pPr marL="0" indent="0">
+            <a:pPr indent="0" marL="0">
               <a:lnSpc>
                 <a:spcPct val="122000"/>
               </a:lnSpc>
@@ -19387,7 +19720,7 @@
             <a:endParaRPr lang="en-US" sz="940" dirty="0"/>
           </a:p>
           <a:p>
-            <a:pPr marL="0" indent="0">
+            <a:pPr indent="0" marL="0">
               <a:lnSpc>
                 <a:spcPct val="122000"/>
               </a:lnSpc>
@@ -19456,7 +19789,7 @@
           <a:bodyPr wrap="square" rtlCol="0" anchor="ctr"/>
           <a:lstStyle/>
           <a:p>
-            <a:pPr marL="0" indent="0">
+            <a:pPr indent="0" marL="0">
               <a:buNone/>
             </a:pPr>
             <a:r>
@@ -19495,11 +19828,11 @@
           <a:bodyPr wrap="square" rtlCol="0" anchor="t"/>
           <a:lstStyle/>
           <a:p>
-            <a:pPr marL="0" indent="0">
-              <a:buNone/>
-            </a:pPr>
-            <a:r>
-              <a:rPr lang="en-US" sz="820" b="1" kern="0" spc="100" dirty="0">
+            <a:pPr indent="0" marL="0">
+              <a:buNone/>
+            </a:pPr>
+            <a:r>
+              <a:rPr lang="en-US" sz="820" b="1" spc="100" kern="0" dirty="0">
                 <a:solidFill>
                   <a:srgbClr val="667085"/>
                 </a:solidFill>
@@ -19554,7 +19887,7 @@
           <a:bodyPr wrap="square" rtlCol="0" anchor="t"/>
           <a:lstStyle/>
           <a:p>
-            <a:pPr marL="0" indent="0">
+            <a:pPr indent="0" marL="0">
               <a:lnSpc>
                 <a:spcPct val="122000"/>
               </a:lnSpc>
@@ -19574,7 +19907,7 @@
             <a:endParaRPr lang="en-US" sz="940" dirty="0"/>
           </a:p>
           <a:p>
-            <a:pPr marL="0" indent="0">
+            <a:pPr indent="0" marL="0">
               <a:lnSpc>
                 <a:spcPct val="122000"/>
               </a:lnSpc>
@@ -19594,7 +19927,7 @@
             <a:endParaRPr lang="en-US" sz="940" dirty="0"/>
           </a:p>
           <a:p>
-            <a:pPr marL="0" indent="0">
+            <a:pPr indent="0" marL="0">
               <a:lnSpc>
                 <a:spcPct val="122000"/>
               </a:lnSpc>
@@ -19614,7 +19947,7 @@
             <a:endParaRPr lang="en-US" sz="940" dirty="0"/>
           </a:p>
           <a:p>
-            <a:pPr marL="0" indent="0">
+            <a:pPr indent="0" marL="0">
               <a:lnSpc>
                 <a:spcPct val="122000"/>
               </a:lnSpc>
@@ -19634,7 +19967,7 @@
             <a:endParaRPr lang="en-US" sz="940" dirty="0"/>
           </a:p>
           <a:p>
-            <a:pPr marL="0" indent="0">
+            <a:pPr indent="0" marL="0">
               <a:lnSpc>
                 <a:spcPct val="122000"/>
               </a:lnSpc>
@@ -19654,7 +19987,7 @@
             <a:endParaRPr lang="en-US" sz="940" dirty="0"/>
           </a:p>
           <a:p>
-            <a:pPr marL="0" indent="0">
+            <a:pPr indent="0" marL="0">
               <a:lnSpc>
                 <a:spcPct val="122000"/>
               </a:lnSpc>
@@ -19674,7 +20007,7 @@
             <a:endParaRPr lang="en-US" sz="940" dirty="0"/>
           </a:p>
           <a:p>
-            <a:pPr marL="0" indent="0">
+            <a:pPr indent="0" marL="0">
               <a:lnSpc>
                 <a:spcPct val="122000"/>
               </a:lnSpc>
@@ -19694,7 +20027,7 @@
             <a:endParaRPr lang="en-US" sz="940" dirty="0"/>
           </a:p>
           <a:p>
-            <a:pPr marL="0" indent="0">
+            <a:pPr indent="0" marL="0">
               <a:lnSpc>
                 <a:spcPct val="122000"/>
               </a:lnSpc>
@@ -19714,7 +20047,7 @@
             <a:endParaRPr lang="en-US" sz="940" dirty="0"/>
           </a:p>
           <a:p>
-            <a:pPr marL="0" indent="0">
+            <a:pPr indent="0" marL="0">
               <a:lnSpc>
                 <a:spcPct val="122000"/>
               </a:lnSpc>
@@ -19734,7 +20067,7 @@
             <a:endParaRPr lang="en-US" sz="940" dirty="0"/>
           </a:p>
           <a:p>
-            <a:pPr marL="0" indent="0">
+            <a:pPr indent="0" marL="0">
               <a:lnSpc>
                 <a:spcPct val="122000"/>
               </a:lnSpc>
@@ -19754,7 +20087,7 @@
             <a:endParaRPr lang="en-US" sz="940" dirty="0"/>
           </a:p>
           <a:p>
-            <a:pPr marL="0" indent="0">
+            <a:pPr indent="0" marL="0">
               <a:lnSpc>
                 <a:spcPct val="122000"/>
               </a:lnSpc>
@@ -19774,7 +20107,7 @@
             <a:endParaRPr lang="en-US" sz="940" dirty="0"/>
           </a:p>
           <a:p>
-            <a:pPr marL="0" indent="0">
+            <a:pPr indent="0" marL="0">
               <a:lnSpc>
                 <a:spcPct val="122000"/>
               </a:lnSpc>
@@ -19816,7 +20149,7 @@
           <a:bodyPr wrap="square" rtlCol="0" anchor="ctr"/>
           <a:lstStyle/>
           <a:p>
-            <a:pPr marL="0" indent="0">
+            <a:pPr indent="0" marL="0">
               <a:buNone/>
             </a:pPr>
             <a:r>
@@ -19850,7 +20183,6 @@
         <a:solidFill>
           <a:srgbClr val="FFFFFF"/>
         </a:solidFill>
-        <a:effectLst/>
       </p:bgPr>
     </p:bg>
     <p:spTree>
@@ -19888,11 +20220,11 @@
           <a:bodyPr wrap="square" rtlCol="0" anchor="ctr"/>
           <a:lstStyle/>
           <a:p>
-            <a:pPr marL="0" indent="0">
-              <a:buNone/>
-            </a:pPr>
-            <a:r>
-              <a:rPr lang="en-US" sz="1000" b="1" kern="0" spc="120" dirty="0">
+            <a:pPr indent="0" marL="0">
+              <a:buNone/>
+            </a:pPr>
+            <a:r>
+              <a:rPr lang="en-US" sz="1000" b="1" spc="120" kern="0" dirty="0">
                 <a:solidFill>
                   <a:srgbClr val="1B305A"/>
                 </a:solidFill>
@@ -19927,11 +20259,11 @@
           <a:bodyPr wrap="square" rtlCol="0" anchor="ctr"/>
           <a:lstStyle/>
           <a:p>
-            <a:pPr marL="0" indent="0">
-              <a:buNone/>
-            </a:pPr>
-            <a:r>
-              <a:rPr lang="en-US" sz="850" b="1" kern="0" spc="160" dirty="0">
+            <a:pPr indent="0" marL="0">
+              <a:buNone/>
+            </a:pPr>
+            <a:r>
+              <a:rPr lang="en-US" sz="850" b="1" spc="160" kern="0" dirty="0">
                 <a:solidFill>
                   <a:srgbClr val="F5A310"/>
                 </a:solidFill>
@@ -19966,7 +20298,7 @@
           <a:bodyPr wrap="square" rtlCol="0" anchor="t"/>
           <a:lstStyle/>
           <a:p>
-            <a:pPr marL="0" indent="0">
+            <a:pPr indent="0" marL="0">
               <a:buNone/>
             </a:pPr>
             <a:r>
@@ -20045,7 +20377,7 @@
           <a:bodyPr wrap="square" rtlCol="0" anchor="t"/>
           <a:lstStyle/>
           <a:p>
-            <a:pPr marL="0" indent="0">
+            <a:pPr indent="0" marL="0">
               <a:lnSpc>
                 <a:spcPct val="120000"/>
               </a:lnSpc>
@@ -20060,7 +20392,7 @@
                 <a:ea typeface="Segoe UI" pitchFamily="34" charset="-122"/>
                 <a:cs typeface="Segoe UI" pitchFamily="34" charset="-120"/>
               </a:rPr>
-              <a:t>Aumrti is not a suite of products that integrate. It is one system whose modules share the same patient, the same encounter and the same ledger — from the front desk to claim settlement.</a:t>
+              <a:t>Not a suite of products that integrate — one system whose modules share the same patient, encounter and ledger.</a:t>
             </a:r>
             <a:endParaRPr lang="en-US" sz="1150" dirty="0"/>
           </a:p>
@@ -20107,7 +20439,7 @@
           <a:bodyPr wrap="square" rtlCol="0" anchor="ctr"/>
           <a:lstStyle/>
           <a:p>
-            <a:pPr marL="0" indent="0">
+            <a:pPr indent="0" marL="0">
               <a:buNone/>
             </a:pPr>
             <a:r>
@@ -20146,7 +20478,7 @@
           <a:bodyPr wrap="square" rtlCol="0" anchor="ctr"/>
           <a:lstStyle/>
           <a:p>
-            <a:pPr marL="0" indent="0" algn="ctr">
+            <a:pPr algn="ctr" indent="0" marL="0">
               <a:buNone/>
             </a:pPr>
             <a:r>
@@ -20185,7 +20517,7 @@
           <a:bodyPr wrap="square" rtlCol="0" anchor="ctr"/>
           <a:lstStyle/>
           <a:p>
-            <a:pPr marL="0" indent="0" algn="r">
+            <a:pPr algn="r" indent="0" marL="0">
               <a:buNone/>
             </a:pPr>
             <a:r>
@@ -20251,7 +20583,7 @@
           <a:bodyPr wrap="square" rtlCol="0" anchor="t"/>
           <a:lstStyle/>
           <a:p>
-            <a:pPr marL="0" indent="0">
+            <a:pPr indent="0" marL="0">
               <a:buNone/>
             </a:pPr>
             <a:r>
@@ -20290,7 +20622,7 @@
           <a:bodyPr wrap="square" rtlCol="0" anchor="t"/>
           <a:lstStyle/>
           <a:p>
-            <a:pPr marL="0" indent="0">
+            <a:pPr indent="0" marL="0">
               <a:lnSpc>
                 <a:spcPct val="114000"/>
               </a:lnSpc>
@@ -20359,7 +20691,7 @@
           <a:bodyPr wrap="square" rtlCol="0" anchor="t"/>
           <a:lstStyle/>
           <a:p>
-            <a:pPr marL="0" indent="0">
+            <a:pPr indent="0" marL="0">
               <a:buNone/>
             </a:pPr>
             <a:r>
@@ -20398,7 +20730,7 @@
           <a:bodyPr wrap="square" rtlCol="0" anchor="t"/>
           <a:lstStyle/>
           <a:p>
-            <a:pPr marL="0" indent="0">
+            <a:pPr indent="0" marL="0">
               <a:lnSpc>
                 <a:spcPct val="114000"/>
               </a:lnSpc>
@@ -20467,7 +20799,7 @@
           <a:bodyPr wrap="square" rtlCol="0" anchor="t"/>
           <a:lstStyle/>
           <a:p>
-            <a:pPr marL="0" indent="0">
+            <a:pPr indent="0" marL="0">
               <a:buNone/>
             </a:pPr>
             <a:r>
@@ -20506,7 +20838,7 @@
           <a:bodyPr wrap="square" rtlCol="0" anchor="t"/>
           <a:lstStyle/>
           <a:p>
-            <a:pPr marL="0" indent="0">
+            <a:pPr indent="0" marL="0">
               <a:lnSpc>
                 <a:spcPct val="114000"/>
               </a:lnSpc>
@@ -20548,11 +20880,11 @@
           <a:bodyPr wrap="square" rtlCol="0" anchor="ctr"/>
           <a:lstStyle/>
           <a:p>
-            <a:pPr marL="0" indent="0">
-              <a:buNone/>
-            </a:pPr>
-            <a:r>
-              <a:rPr lang="en-US" sz="820" b="1" kern="0" spc="160" dirty="0">
+            <a:pPr indent="0" marL="0">
+              <a:buNone/>
+            </a:pPr>
+            <a:r>
+              <a:rPr lang="en-US" sz="820" b="1" spc="160" kern="0" dirty="0">
                 <a:solidFill>
                   <a:srgbClr val="667085"/>
                 </a:solidFill>
@@ -20614,7 +20946,7 @@
           <a:bodyPr wrap="square" rtlCol="0" anchor="t"/>
           <a:lstStyle/>
           <a:p>
-            <a:pPr marL="0" indent="0">
+            <a:pPr indent="0" marL="0">
               <a:buNone/>
             </a:pPr>
             <a:r>
@@ -20653,7 +20985,7 @@
           <a:bodyPr wrap="square" rtlCol="0" anchor="t"/>
           <a:lstStyle/>
           <a:p>
-            <a:pPr marL="0" indent="0">
+            <a:pPr indent="0" marL="0">
               <a:lnSpc>
                 <a:spcPct val="114000"/>
               </a:lnSpc>
@@ -20722,7 +21054,7 @@
           <a:bodyPr wrap="square" rtlCol="0" anchor="t"/>
           <a:lstStyle/>
           <a:p>
-            <a:pPr marL="0" indent="0">
+            <a:pPr indent="0" marL="0">
               <a:buNone/>
             </a:pPr>
             <a:r>
@@ -20761,7 +21093,7 @@
           <a:bodyPr wrap="square" rtlCol="0" anchor="t"/>
           <a:lstStyle/>
           <a:p>
-            <a:pPr marL="0" indent="0">
+            <a:pPr indent="0" marL="0">
               <a:lnSpc>
                 <a:spcPct val="114000"/>
               </a:lnSpc>
@@ -20830,7 +21162,7 @@
           <a:bodyPr wrap="square" rtlCol="0" anchor="t"/>
           <a:lstStyle/>
           <a:p>
-            <a:pPr marL="0" indent="0">
+            <a:pPr indent="0" marL="0">
               <a:buNone/>
             </a:pPr>
             <a:r>
@@ -20869,7 +21201,7 @@
           <a:bodyPr wrap="square" rtlCol="0" anchor="t"/>
           <a:lstStyle/>
           <a:p>
-            <a:pPr marL="0" indent="0">
+            <a:pPr indent="0" marL="0">
               <a:lnSpc>
                 <a:spcPct val="114000"/>
               </a:lnSpc>
@@ -20925,8 +21257,8 @@
         </p:nvSpPr>
         <p:spPr>
           <a:xfrm>
-            <a:off x="7415814" y="4050792"/>
-            <a:ext cx="1968125" cy="243840"/>
+            <a:off x="7490582" y="4187952"/>
+            <a:ext cx="1692189" cy="243840"/>
           </a:xfrm>
           <a:prstGeom prst="rect">
             <a:avLst/>
@@ -20938,7 +21270,7 @@
           <a:bodyPr wrap="square" rtlCol="0" anchor="t"/>
           <a:lstStyle/>
           <a:p>
-            <a:pPr marL="0" indent="0">
+            <a:pPr indent="0" marL="0">
               <a:buNone/>
             </a:pPr>
             <a:r>
@@ -20977,7 +21309,7 @@
           <a:bodyPr wrap="square" rtlCol="0" anchor="t"/>
           <a:lstStyle/>
           <a:p>
-            <a:pPr marL="0" indent="0">
+            <a:pPr indent="0" marL="0">
               <a:lnSpc>
                 <a:spcPct val="114000"/>
               </a:lnSpc>
@@ -21046,7 +21378,7 @@
           <a:bodyPr wrap="square" rtlCol="0" anchor="t"/>
           <a:lstStyle/>
           <a:p>
-            <a:pPr marL="0" indent="0">
+            <a:pPr indent="0" marL="0">
               <a:buNone/>
             </a:pPr>
             <a:r>
@@ -21085,7 +21417,7 @@
           <a:bodyPr wrap="square" rtlCol="0" anchor="t"/>
           <a:lstStyle/>
           <a:p>
-            <a:pPr marL="0" indent="0">
+            <a:pPr indent="0" marL="0">
               <a:lnSpc>
                 <a:spcPct val="114000"/>
               </a:lnSpc>
@@ -21122,7 +21454,6 @@
         <a:solidFill>
           <a:srgbClr val="FFFFFF"/>
         </a:solidFill>
-        <a:effectLst/>
       </p:bgPr>
     </p:bg>
     <p:spTree>
@@ -21160,11 +21491,11 @@
           <a:bodyPr wrap="square" rtlCol="0" anchor="ctr"/>
           <a:lstStyle/>
           <a:p>
-            <a:pPr marL="0" indent="0">
-              <a:buNone/>
-            </a:pPr>
-            <a:r>
-              <a:rPr lang="en-US" sz="1000" b="1" kern="0" spc="120" dirty="0">
+            <a:pPr indent="0" marL="0">
+              <a:buNone/>
+            </a:pPr>
+            <a:r>
+              <a:rPr lang="en-US" sz="1000" b="1" spc="120" kern="0" dirty="0">
                 <a:solidFill>
                   <a:srgbClr val="1B305A"/>
                 </a:solidFill>
@@ -21199,11 +21530,11 @@
           <a:bodyPr wrap="square" rtlCol="0" anchor="ctr"/>
           <a:lstStyle/>
           <a:p>
-            <a:pPr marL="0" indent="0">
-              <a:buNone/>
-            </a:pPr>
-            <a:r>
-              <a:rPr lang="en-US" sz="850" b="1" kern="0" spc="160" dirty="0">
+            <a:pPr indent="0" marL="0">
+              <a:buNone/>
+            </a:pPr>
+            <a:r>
+              <a:rPr lang="en-US" sz="850" b="1" spc="160" kern="0" dirty="0">
                 <a:solidFill>
                   <a:srgbClr val="F5A310"/>
                 </a:solidFill>
@@ -21211,7 +21542,7 @@
                 <a:ea typeface="Segoe UI" pitchFamily="34" charset="-122"/>
                 <a:cs typeface="Segoe UI" pitchFamily="34" charset="-120"/>
               </a:rPr>
-              <a:t>PRODUCT</a:t>
+              <a:t>YOUR PRODUCT, IN PLAIN LANGUAGE</a:t>
             </a:r>
             <a:endParaRPr lang="en-US" sz="850" dirty="0"/>
           </a:p>
@@ -21238,7 +21569,7 @@
           <a:bodyPr wrap="square" rtlCol="0" anchor="t"/>
           <a:lstStyle/>
           <a:p>
-            <a:pPr marL="0" indent="0">
+            <a:pPr indent="0" marL="0">
               <a:buNone/>
             </a:pPr>
             <a:r>
@@ -21317,7 +21648,7 @@
           <a:bodyPr wrap="square" rtlCol="0" anchor="t"/>
           <a:lstStyle/>
           <a:p>
-            <a:pPr marL="0" indent="0">
+            <a:pPr indent="0" marL="0">
               <a:lnSpc>
                 <a:spcPct val="120000"/>
               </a:lnSpc>
@@ -21379,7 +21710,7 @@
           <a:bodyPr wrap="square" rtlCol="0" anchor="ctr"/>
           <a:lstStyle/>
           <a:p>
-            <a:pPr marL="0" indent="0">
+            <a:pPr indent="0" marL="0">
               <a:buNone/>
             </a:pPr>
             <a:r>
@@ -21418,7 +21749,7 @@
           <a:bodyPr wrap="square" rtlCol="0" anchor="ctr"/>
           <a:lstStyle/>
           <a:p>
-            <a:pPr marL="0" indent="0" algn="ctr">
+            <a:pPr algn="ctr" indent="0" marL="0">
               <a:buNone/>
             </a:pPr>
             <a:r>
@@ -21457,7 +21788,7 @@
           <a:bodyPr wrap="square" rtlCol="0" anchor="ctr"/>
           <a:lstStyle/>
           <a:p>
-            <a:pPr marL="0" indent="0" algn="r">
+            <a:pPr algn="r" indent="0" marL="0">
               <a:buNone/>
             </a:pPr>
             <a:r>
@@ -21523,11 +21854,11 @@
           <a:bodyPr wrap="square" rtlCol="0" anchor="ctr"/>
           <a:lstStyle/>
           <a:p>
-            <a:pPr marL="0" indent="0">
-              <a:buNone/>
-            </a:pPr>
-            <a:r>
-              <a:rPr lang="en-US" sz="800" b="1" kern="0" spc="110" dirty="0">
+            <a:pPr indent="0" marL="0">
+              <a:buNone/>
+            </a:pPr>
+            <a:r>
+              <a:rPr lang="en-US" sz="800" b="1" spc="110" kern="0" dirty="0">
                 <a:solidFill>
                   <a:srgbClr val="98A2B3"/>
                 </a:solidFill>
@@ -21562,7 +21893,7 @@
           <a:bodyPr wrap="square" rtlCol="0" anchor="t"/>
           <a:lstStyle/>
           <a:p>
-            <a:pPr marL="0" indent="0">
+            <a:pPr indent="0" marL="0">
               <a:buNone/>
             </a:pPr>
             <a:r>
@@ -21601,7 +21932,7 @@
           <a:bodyPr wrap="square" rtlCol="0" anchor="t"/>
           <a:lstStyle/>
           <a:p>
-            <a:pPr marL="0" indent="0">
+            <a:pPr indent="0" marL="0">
               <a:lnSpc>
                 <a:spcPct val="114000"/>
               </a:lnSpc>
@@ -21670,11 +22001,11 @@
           <a:bodyPr wrap="square" rtlCol="0" anchor="ctr"/>
           <a:lstStyle/>
           <a:p>
-            <a:pPr marL="0" indent="0">
-              <a:buNone/>
-            </a:pPr>
-            <a:r>
-              <a:rPr lang="en-US" sz="800" b="1" kern="0" spc="110" dirty="0">
+            <a:pPr indent="0" marL="0">
+              <a:buNone/>
+            </a:pPr>
+            <a:r>
+              <a:rPr lang="en-US" sz="800" b="1" spc="110" kern="0" dirty="0">
                 <a:solidFill>
                   <a:srgbClr val="98A2B3"/>
                 </a:solidFill>
@@ -21709,7 +22040,7 @@
           <a:bodyPr wrap="square" rtlCol="0" anchor="t"/>
           <a:lstStyle/>
           <a:p>
-            <a:pPr marL="0" indent="0">
+            <a:pPr indent="0" marL="0">
               <a:buNone/>
             </a:pPr>
             <a:r>
@@ -21748,7 +22079,7 @@
           <a:bodyPr wrap="square" rtlCol="0" anchor="t"/>
           <a:lstStyle/>
           <a:p>
-            <a:pPr marL="0" indent="0">
+            <a:pPr indent="0" marL="0">
               <a:lnSpc>
                 <a:spcPct val="114000"/>
               </a:lnSpc>
@@ -21817,11 +22148,11 @@
           <a:bodyPr wrap="square" rtlCol="0" anchor="ctr"/>
           <a:lstStyle/>
           <a:p>
-            <a:pPr marL="0" indent="0">
-              <a:buNone/>
-            </a:pPr>
-            <a:r>
-              <a:rPr lang="en-US" sz="800" b="1" kern="0" spc="110" dirty="0">
+            <a:pPr indent="0" marL="0">
+              <a:buNone/>
+            </a:pPr>
+            <a:r>
+              <a:rPr lang="en-US" sz="800" b="1" spc="110" kern="0" dirty="0">
                 <a:solidFill>
                   <a:srgbClr val="98A2B3"/>
                 </a:solidFill>
@@ -21856,7 +22187,7 @@
           <a:bodyPr wrap="square" rtlCol="0" anchor="t"/>
           <a:lstStyle/>
           <a:p>
-            <a:pPr marL="0" indent="0">
+            <a:pPr indent="0" marL="0">
               <a:buNone/>
             </a:pPr>
             <a:r>
@@ -21895,7 +22226,7 @@
           <a:bodyPr wrap="square" rtlCol="0" anchor="t"/>
           <a:lstStyle/>
           <a:p>
-            <a:pPr marL="0" indent="0">
+            <a:pPr indent="0" marL="0">
               <a:lnSpc>
                 <a:spcPct val="114000"/>
               </a:lnSpc>
@@ -21964,11 +22295,11 @@
           <a:bodyPr wrap="square" rtlCol="0" anchor="ctr"/>
           <a:lstStyle/>
           <a:p>
-            <a:pPr marL="0" indent="0">
-              <a:buNone/>
-            </a:pPr>
-            <a:r>
-              <a:rPr lang="en-US" sz="800" b="1" kern="0" spc="110" dirty="0">
+            <a:pPr indent="0" marL="0">
+              <a:buNone/>
+            </a:pPr>
+            <a:r>
+              <a:rPr lang="en-US" sz="800" b="1" spc="110" kern="0" dirty="0">
                 <a:solidFill>
                   <a:srgbClr val="98A2B3"/>
                 </a:solidFill>
@@ -22003,7 +22334,7 @@
           <a:bodyPr wrap="square" rtlCol="0" anchor="t"/>
           <a:lstStyle/>
           <a:p>
-            <a:pPr marL="0" indent="0">
+            <a:pPr indent="0" marL="0">
               <a:buNone/>
             </a:pPr>
             <a:r>
@@ -22042,7 +22373,7 @@
           <a:bodyPr wrap="square" rtlCol="0" anchor="t"/>
           <a:lstStyle/>
           <a:p>
-            <a:pPr marL="0" indent="0">
+            <a:pPr indent="0" marL="0">
               <a:lnSpc>
                 <a:spcPct val="114000"/>
               </a:lnSpc>
@@ -22111,11 +22442,11 @@
           <a:bodyPr wrap="square" rtlCol="0" anchor="ctr"/>
           <a:lstStyle/>
           <a:p>
-            <a:pPr marL="0" indent="0">
-              <a:buNone/>
-            </a:pPr>
-            <a:r>
-              <a:rPr lang="en-US" sz="800" b="1" kern="0" spc="110" dirty="0">
+            <a:pPr indent="0" marL="0">
+              <a:buNone/>
+            </a:pPr>
+            <a:r>
+              <a:rPr lang="en-US" sz="800" b="1" spc="110" kern="0" dirty="0">
                 <a:solidFill>
                   <a:srgbClr val="98A2B3"/>
                 </a:solidFill>
@@ -22150,7 +22481,7 @@
           <a:bodyPr wrap="square" rtlCol="0" anchor="t"/>
           <a:lstStyle/>
           <a:p>
-            <a:pPr marL="0" indent="0">
+            <a:pPr indent="0" marL="0">
               <a:buNone/>
             </a:pPr>
             <a:r>
@@ -22189,7 +22520,7 @@
           <a:bodyPr wrap="square" rtlCol="0" anchor="t"/>
           <a:lstStyle/>
           <a:p>
-            <a:pPr marL="0" indent="0">
+            <a:pPr indent="0" marL="0">
               <a:lnSpc>
                 <a:spcPct val="114000"/>
               </a:lnSpc>
@@ -22258,11 +22589,11 @@
           <a:bodyPr wrap="square" rtlCol="0" anchor="ctr"/>
           <a:lstStyle/>
           <a:p>
-            <a:pPr marL="0" indent="0">
-              <a:buNone/>
-            </a:pPr>
-            <a:r>
-              <a:rPr lang="en-US" sz="800" b="1" kern="0" spc="110" dirty="0">
+            <a:pPr indent="0" marL="0">
+              <a:buNone/>
+            </a:pPr>
+            <a:r>
+              <a:rPr lang="en-US" sz="800" b="1" spc="110" kern="0" dirty="0">
                 <a:solidFill>
                   <a:srgbClr val="98A2B3"/>
                 </a:solidFill>
@@ -22297,7 +22628,7 @@
           <a:bodyPr wrap="square" rtlCol="0" anchor="t"/>
           <a:lstStyle/>
           <a:p>
-            <a:pPr marL="0" indent="0">
+            <a:pPr indent="0" marL="0">
               <a:buNone/>
             </a:pPr>
             <a:r>
@@ -22336,7 +22667,7 @@
           <a:bodyPr wrap="square" rtlCol="0" anchor="t"/>
           <a:lstStyle/>
           <a:p>
-            <a:pPr marL="0" indent="0">
+            <a:pPr indent="0" marL="0">
               <a:lnSpc>
                 <a:spcPct val="114000"/>
               </a:lnSpc>
@@ -22378,7 +22709,7 @@
           <a:bodyPr wrap="square" rtlCol="0" anchor="ctr"/>
           <a:lstStyle/>
           <a:p>
-            <a:pPr marL="0" indent="0" algn="ctr">
+            <a:pPr algn="ctr" indent="0" marL="0">
               <a:buNone/>
             </a:pPr>
             <a:r>
@@ -22412,7 +22743,6 @@
         <a:solidFill>
           <a:srgbClr val="FFFFFF"/>
         </a:solidFill>
-        <a:effectLst/>
       </p:bgPr>
     </p:bg>
     <p:spTree>
@@ -22450,11 +22780,11 @@
           <a:bodyPr wrap="square" rtlCol="0" anchor="ctr"/>
           <a:lstStyle/>
           <a:p>
-            <a:pPr marL="0" indent="0">
-              <a:buNone/>
-            </a:pPr>
-            <a:r>
-              <a:rPr lang="en-US" sz="1000" b="1" kern="0" spc="120" dirty="0">
+            <a:pPr indent="0" marL="0">
+              <a:buNone/>
+            </a:pPr>
+            <a:r>
+              <a:rPr lang="en-US" sz="1000" b="1" spc="120" kern="0" dirty="0">
                 <a:solidFill>
                   <a:srgbClr val="1B305A"/>
                 </a:solidFill>
@@ -22489,11 +22819,11 @@
           <a:bodyPr wrap="square" rtlCol="0" anchor="ctr"/>
           <a:lstStyle/>
           <a:p>
-            <a:pPr marL="0" indent="0">
-              <a:buNone/>
-            </a:pPr>
-            <a:r>
-              <a:rPr lang="en-US" sz="850" b="1" kern="0" spc="160" dirty="0">
+            <a:pPr indent="0" marL="0">
+              <a:buNone/>
+            </a:pPr>
+            <a:r>
+              <a:rPr lang="en-US" sz="850" b="1" spc="160" kern="0" dirty="0">
                 <a:solidFill>
                   <a:srgbClr val="F5A310"/>
                 </a:solidFill>
@@ -22528,7 +22858,7 @@
           <a:bodyPr wrap="square" rtlCol="0" anchor="t"/>
           <a:lstStyle/>
           <a:p>
-            <a:pPr marL="0" indent="0">
+            <a:pPr indent="0" marL="0">
               <a:buNone/>
             </a:pPr>
             <a:r>
@@ -22607,7 +22937,7 @@
           <a:bodyPr wrap="square" rtlCol="0" anchor="t"/>
           <a:lstStyle/>
           <a:p>
-            <a:pPr marL="0" indent="0">
+            <a:pPr indent="0" marL="0">
               <a:lnSpc>
                 <a:spcPct val="120000"/>
               </a:lnSpc>
@@ -22669,7 +22999,7 @@
           <a:bodyPr wrap="square" rtlCol="0" anchor="ctr"/>
           <a:lstStyle/>
           <a:p>
-            <a:pPr marL="0" indent="0">
+            <a:pPr indent="0" marL="0">
               <a:buNone/>
             </a:pPr>
             <a:r>
@@ -22708,7 +23038,7 @@
           <a:bodyPr wrap="square" rtlCol="0" anchor="ctr"/>
           <a:lstStyle/>
           <a:p>
-            <a:pPr marL="0" indent="0" algn="ctr">
+            <a:pPr algn="ctr" indent="0" marL="0">
               <a:buNone/>
             </a:pPr>
             <a:r>
@@ -22747,7 +23077,7 @@
           <a:bodyPr wrap="square" rtlCol="0" anchor="ctr"/>
           <a:lstStyle/>
           <a:p>
-            <a:pPr marL="0" indent="0" algn="r">
+            <a:pPr algn="r" indent="0" marL="0">
               <a:buNone/>
             </a:pPr>
             <a:r>
@@ -22813,7 +23143,7 @@
           <a:bodyPr wrap="square" rtlCol="0" anchor="ctr"/>
           <a:lstStyle/>
           <a:p>
-            <a:pPr marL="0" indent="0">
+            <a:pPr indent="0" marL="0">
               <a:buNone/>
             </a:pPr>
             <a:r>
@@ -22852,11 +23182,11 @@
           <a:bodyPr wrap="square" rtlCol="0" anchor="t"/>
           <a:lstStyle/>
           <a:p>
-            <a:pPr marL="0" indent="0">
-              <a:buNone/>
-            </a:pPr>
-            <a:r>
-              <a:rPr lang="en-US" sz="820" b="1" kern="0" spc="100" dirty="0">
+            <a:pPr indent="0" marL="0">
+              <a:buNone/>
+            </a:pPr>
+            <a:r>
+              <a:rPr lang="en-US" sz="820" b="1" spc="100" kern="0" dirty="0">
                 <a:solidFill>
                   <a:srgbClr val="667085"/>
                 </a:solidFill>
@@ -22911,7 +23241,7 @@
           <a:bodyPr wrap="square" rtlCol="0" anchor="t"/>
           <a:lstStyle/>
           <a:p>
-            <a:pPr marL="0" indent="0">
+            <a:pPr indent="0" marL="0">
               <a:lnSpc>
                 <a:spcPct val="122000"/>
               </a:lnSpc>
@@ -22931,7 +23261,7 @@
             <a:endParaRPr lang="en-US" sz="940" dirty="0"/>
           </a:p>
           <a:p>
-            <a:pPr marL="0" indent="0">
+            <a:pPr indent="0" marL="0">
               <a:lnSpc>
                 <a:spcPct val="122000"/>
               </a:lnSpc>
@@ -22951,7 +23281,7 @@
             <a:endParaRPr lang="en-US" sz="940" dirty="0"/>
           </a:p>
           <a:p>
-            <a:pPr marL="0" indent="0">
+            <a:pPr indent="0" marL="0">
               <a:lnSpc>
                 <a:spcPct val="122000"/>
               </a:lnSpc>
@@ -22971,7 +23301,7 @@
             <a:endParaRPr lang="en-US" sz="940" dirty="0"/>
           </a:p>
           <a:p>
-            <a:pPr marL="0" indent="0">
+            <a:pPr indent="0" marL="0">
               <a:lnSpc>
                 <a:spcPct val="122000"/>
               </a:lnSpc>
@@ -22991,7 +23321,7 @@
             <a:endParaRPr lang="en-US" sz="940" dirty="0"/>
           </a:p>
           <a:p>
-            <a:pPr marL="0" indent="0">
+            <a:pPr indent="0" marL="0">
               <a:lnSpc>
                 <a:spcPct val="122000"/>
               </a:lnSpc>
@@ -23011,7 +23341,7 @@
             <a:endParaRPr lang="en-US" sz="940" dirty="0"/>
           </a:p>
           <a:p>
-            <a:pPr marL="0" indent="0">
+            <a:pPr indent="0" marL="0">
               <a:lnSpc>
                 <a:spcPct val="122000"/>
               </a:lnSpc>
@@ -23031,7 +23361,7 @@
             <a:endParaRPr lang="en-US" sz="940" dirty="0"/>
           </a:p>
           <a:p>
-            <a:pPr marL="0" indent="0">
+            <a:pPr indent="0" marL="0">
               <a:lnSpc>
                 <a:spcPct val="122000"/>
               </a:lnSpc>
@@ -23051,7 +23381,7 @@
             <a:endParaRPr lang="en-US" sz="940" dirty="0"/>
           </a:p>
           <a:p>
-            <a:pPr marL="0" indent="0">
+            <a:pPr indent="0" marL="0">
               <a:lnSpc>
                 <a:spcPct val="122000"/>
               </a:lnSpc>
@@ -23120,7 +23450,7 @@
           <a:bodyPr wrap="square" rtlCol="0" anchor="ctr"/>
           <a:lstStyle/>
           <a:p>
-            <a:pPr marL="0" indent="0">
+            <a:pPr indent="0" marL="0">
               <a:buNone/>
             </a:pPr>
             <a:r>
@@ -23159,11 +23489,11 @@
           <a:bodyPr wrap="square" rtlCol="0" anchor="t"/>
           <a:lstStyle/>
           <a:p>
-            <a:pPr marL="0" indent="0">
-              <a:buNone/>
-            </a:pPr>
-            <a:r>
-              <a:rPr lang="en-US" sz="820" b="1" kern="0" spc="100" dirty="0">
+            <a:pPr indent="0" marL="0">
+              <a:buNone/>
+            </a:pPr>
+            <a:r>
+              <a:rPr lang="en-US" sz="820" b="1" spc="100" kern="0" dirty="0">
                 <a:solidFill>
                   <a:srgbClr val="667085"/>
                 </a:solidFill>
@@ -23218,7 +23548,7 @@
           <a:bodyPr wrap="square" rtlCol="0" anchor="t"/>
           <a:lstStyle/>
           <a:p>
-            <a:pPr marL="0" indent="0">
+            <a:pPr indent="0" marL="0">
               <a:lnSpc>
                 <a:spcPct val="122000"/>
               </a:lnSpc>
@@ -23238,7 +23568,7 @@
             <a:endParaRPr lang="en-US" sz="940" dirty="0"/>
           </a:p>
           <a:p>
-            <a:pPr marL="0" indent="0">
+            <a:pPr indent="0" marL="0">
               <a:lnSpc>
                 <a:spcPct val="122000"/>
               </a:lnSpc>
@@ -23258,7 +23588,7 @@
             <a:endParaRPr lang="en-US" sz="940" dirty="0"/>
           </a:p>
           <a:p>
-            <a:pPr marL="0" indent="0">
+            <a:pPr indent="0" marL="0">
               <a:lnSpc>
                 <a:spcPct val="122000"/>
               </a:lnSpc>
@@ -23278,7 +23608,7 @@
             <a:endParaRPr lang="en-US" sz="940" dirty="0"/>
           </a:p>
           <a:p>
-            <a:pPr marL="0" indent="0">
+            <a:pPr indent="0" marL="0">
               <a:lnSpc>
                 <a:spcPct val="122000"/>
               </a:lnSpc>
@@ -23298,7 +23628,7 @@
             <a:endParaRPr lang="en-US" sz="940" dirty="0"/>
           </a:p>
           <a:p>
-            <a:pPr marL="0" indent="0">
+            <a:pPr indent="0" marL="0">
               <a:lnSpc>
                 <a:spcPct val="122000"/>
               </a:lnSpc>
@@ -23318,7 +23648,7 @@
             <a:endParaRPr lang="en-US" sz="940" dirty="0"/>
           </a:p>
           <a:p>
-            <a:pPr marL="0" indent="0">
+            <a:pPr indent="0" marL="0">
               <a:lnSpc>
                 <a:spcPct val="122000"/>
               </a:lnSpc>
@@ -23387,7 +23717,7 @@
           <a:bodyPr wrap="square" rtlCol="0" anchor="ctr"/>
           <a:lstStyle/>
           <a:p>
-            <a:pPr marL="0" indent="0">
+            <a:pPr indent="0" marL="0">
               <a:buNone/>
             </a:pPr>
             <a:r>
@@ -23426,11 +23756,11 @@
           <a:bodyPr wrap="square" rtlCol="0" anchor="t"/>
           <a:lstStyle/>
           <a:p>
-            <a:pPr marL="0" indent="0">
-              <a:buNone/>
-            </a:pPr>
-            <a:r>
-              <a:rPr lang="en-US" sz="820" b="1" kern="0" spc="100" dirty="0">
+            <a:pPr indent="0" marL="0">
+              <a:buNone/>
+            </a:pPr>
+            <a:r>
+              <a:rPr lang="en-US" sz="820" b="1" spc="100" kern="0" dirty="0">
                 <a:solidFill>
                   <a:srgbClr val="667085"/>
                 </a:solidFill>
@@ -23485,7 +23815,7 @@
           <a:bodyPr wrap="square" rtlCol="0" anchor="t"/>
           <a:lstStyle/>
           <a:p>
-            <a:pPr marL="0" indent="0">
+            <a:pPr indent="0" marL="0">
               <a:lnSpc>
                 <a:spcPct val="122000"/>
               </a:lnSpc>
@@ -23505,7 +23835,7 @@
             <a:endParaRPr lang="en-US" sz="940" dirty="0"/>
           </a:p>
           <a:p>
-            <a:pPr marL="0" indent="0">
+            <a:pPr indent="0" marL="0">
               <a:lnSpc>
                 <a:spcPct val="122000"/>
               </a:lnSpc>
@@ -23525,7 +23855,7 @@
             <a:endParaRPr lang="en-US" sz="940" dirty="0"/>
           </a:p>
           <a:p>
-            <a:pPr marL="0" indent="0">
+            <a:pPr indent="0" marL="0">
               <a:lnSpc>
                 <a:spcPct val="122000"/>
               </a:lnSpc>
@@ -23545,7 +23875,7 @@
             <a:endParaRPr lang="en-US" sz="940" dirty="0"/>
           </a:p>
           <a:p>
-            <a:pPr marL="0" indent="0">
+            <a:pPr indent="0" marL="0">
               <a:lnSpc>
                 <a:spcPct val="122000"/>
               </a:lnSpc>
@@ -23565,7 +23895,7 @@
             <a:endParaRPr lang="en-US" sz="940" dirty="0"/>
           </a:p>
           <a:p>
-            <a:pPr marL="0" indent="0">
+            <a:pPr indent="0" marL="0">
               <a:lnSpc>
                 <a:spcPct val="122000"/>
               </a:lnSpc>
@@ -23585,7 +23915,7 @@
             <a:endParaRPr lang="en-US" sz="940" dirty="0"/>
           </a:p>
           <a:p>
-            <a:pPr marL="0" indent="0">
+            <a:pPr indent="0" marL="0">
               <a:lnSpc>
                 <a:spcPct val="122000"/>
               </a:lnSpc>
@@ -23605,7 +23935,7 @@
             <a:endParaRPr lang="en-US" sz="940" dirty="0"/>
           </a:p>
           <a:p>
-            <a:pPr marL="0" indent="0">
+            <a:pPr indent="0" marL="0">
               <a:lnSpc>
                 <a:spcPct val="122000"/>
               </a:lnSpc>
@@ -23625,7 +23955,7 @@
             <a:endParaRPr lang="en-US" sz="940" dirty="0"/>
           </a:p>
           <a:p>
-            <a:pPr marL="0" indent="0">
+            <a:pPr indent="0" marL="0">
               <a:lnSpc>
                 <a:spcPct val="122000"/>
               </a:lnSpc>
@@ -23645,7 +23975,7 @@
             <a:endParaRPr lang="en-US" sz="940" dirty="0"/>
           </a:p>
           <a:p>
-            <a:pPr marL="0" indent="0">
+            <a:pPr indent="0" marL="0">
               <a:lnSpc>
                 <a:spcPct val="122000"/>
               </a:lnSpc>
@@ -23665,7 +23995,7 @@
             <a:endParaRPr lang="en-US" sz="940" dirty="0"/>
           </a:p>
           <a:p>
-            <a:pPr marL="0" indent="0">
+            <a:pPr indent="0" marL="0">
               <a:lnSpc>
                 <a:spcPct val="122000"/>
               </a:lnSpc>
@@ -23685,7 +24015,7 @@
             <a:endParaRPr lang="en-US" sz="940" dirty="0"/>
           </a:p>
           <a:p>
-            <a:pPr marL="0" indent="0">
+            <a:pPr indent="0" marL="0">
               <a:lnSpc>
                 <a:spcPct val="122000"/>
               </a:lnSpc>
@@ -23705,7 +24035,7 @@
             <a:endParaRPr lang="en-US" sz="940" dirty="0"/>
           </a:p>
           <a:p>
-            <a:pPr marL="0" indent="0">
+            <a:pPr indent="0" marL="0">
               <a:lnSpc>
                 <a:spcPct val="122000"/>
               </a:lnSpc>
@@ -23725,7 +24055,7 @@
             <a:endParaRPr lang="en-US" sz="940" dirty="0"/>
           </a:p>
           <a:p>
-            <a:pPr marL="0" indent="0">
+            <a:pPr indent="0" marL="0">
               <a:lnSpc>
                 <a:spcPct val="122000"/>
               </a:lnSpc>
@@ -23745,7 +24075,7 @@
             <a:endParaRPr lang="en-US" sz="940" dirty="0"/>
           </a:p>
           <a:p>
-            <a:pPr marL="0" indent="0">
+            <a:pPr indent="0" marL="0">
               <a:lnSpc>
                 <a:spcPct val="122000"/>
               </a:lnSpc>
@@ -23814,7 +24144,7 @@
           <a:bodyPr wrap="square" rtlCol="0" anchor="ctr"/>
           <a:lstStyle/>
           <a:p>
-            <a:pPr marL="0" indent="0">
+            <a:pPr indent="0" marL="0">
               <a:buNone/>
             </a:pPr>
             <a:r>
@@ -23853,11 +24183,11 @@
           <a:bodyPr wrap="square" rtlCol="0" anchor="t"/>
           <a:lstStyle/>
           <a:p>
-            <a:pPr marL="0" indent="0">
-              <a:buNone/>
-            </a:pPr>
-            <a:r>
-              <a:rPr lang="en-US" sz="820" b="1" kern="0" spc="100" dirty="0">
+            <a:pPr indent="0" marL="0">
+              <a:buNone/>
+            </a:pPr>
+            <a:r>
+              <a:rPr lang="en-US" sz="820" b="1" spc="100" kern="0" dirty="0">
                 <a:solidFill>
                   <a:srgbClr val="667085"/>
                 </a:solidFill>
@@ -23912,7 +24242,7 @@
           <a:bodyPr wrap="square" rtlCol="0" anchor="t"/>
           <a:lstStyle/>
           <a:p>
-            <a:pPr marL="0" indent="0">
+            <a:pPr indent="0" marL="0">
               <a:lnSpc>
                 <a:spcPct val="122000"/>
               </a:lnSpc>
@@ -23932,7 +24262,7 @@
             <a:endParaRPr lang="en-US" sz="940" dirty="0"/>
           </a:p>
           <a:p>
-            <a:pPr marL="0" indent="0">
+            <a:pPr indent="0" marL="0">
               <a:lnSpc>
                 <a:spcPct val="122000"/>
               </a:lnSpc>
@@ -23952,7 +24282,7 @@
             <a:endParaRPr lang="en-US" sz="940" dirty="0"/>
           </a:p>
           <a:p>
-            <a:pPr marL="0" indent="0">
+            <a:pPr indent="0" marL="0">
               <a:lnSpc>
                 <a:spcPct val="122000"/>
               </a:lnSpc>
@@ -23972,7 +24302,7 @@
             <a:endParaRPr lang="en-US" sz="940" dirty="0"/>
           </a:p>
           <a:p>
-            <a:pPr marL="0" indent="0">
+            <a:pPr indent="0" marL="0">
               <a:lnSpc>
                 <a:spcPct val="122000"/>
               </a:lnSpc>
@@ -23992,7 +24322,7 @@
             <a:endParaRPr lang="en-US" sz="940" dirty="0"/>
           </a:p>
           <a:p>
-            <a:pPr marL="0" indent="0">
+            <a:pPr indent="0" marL="0">
               <a:lnSpc>
                 <a:spcPct val="122000"/>
               </a:lnSpc>
@@ -24012,7 +24342,7 @@
             <a:endParaRPr lang="en-US" sz="940" dirty="0"/>
           </a:p>
           <a:p>
-            <a:pPr marL="0" indent="0">
+            <a:pPr indent="0" marL="0">
               <a:lnSpc>
                 <a:spcPct val="122000"/>
               </a:lnSpc>
@@ -24032,7 +24362,7 @@
             <a:endParaRPr lang="en-US" sz="940" dirty="0"/>
           </a:p>
           <a:p>
-            <a:pPr marL="0" indent="0">
+            <a:pPr indent="0" marL="0">
               <a:lnSpc>
                 <a:spcPct val="122000"/>
               </a:lnSpc>
@@ -24101,7 +24431,7 @@
           <a:bodyPr wrap="square" rtlCol="0" anchor="ctr"/>
           <a:lstStyle/>
           <a:p>
-            <a:pPr marL="0" indent="0">
+            <a:pPr indent="0" marL="0">
               <a:buNone/>
             </a:pPr>
             <a:r>
@@ -24140,11 +24470,11 @@
           <a:bodyPr wrap="square" rtlCol="0" anchor="t"/>
           <a:lstStyle/>
           <a:p>
-            <a:pPr marL="0" indent="0">
-              <a:buNone/>
-            </a:pPr>
-            <a:r>
-              <a:rPr lang="en-US" sz="820" b="1" kern="0" spc="100" dirty="0">
+            <a:pPr indent="0" marL="0">
+              <a:buNone/>
+            </a:pPr>
+            <a:r>
+              <a:rPr lang="en-US" sz="820" b="1" spc="100" kern="0" dirty="0">
                 <a:solidFill>
                   <a:srgbClr val="667085"/>
                 </a:solidFill>
@@ -24199,7 +24529,7 @@
           <a:bodyPr wrap="square" rtlCol="0" anchor="t"/>
           <a:lstStyle/>
           <a:p>
-            <a:pPr marL="0" indent="0">
+            <a:pPr indent="0" marL="0">
               <a:lnSpc>
                 <a:spcPct val="122000"/>
               </a:lnSpc>
@@ -24219,7 +24549,7 @@
             <a:endParaRPr lang="en-US" sz="940" dirty="0"/>
           </a:p>
           <a:p>
-            <a:pPr marL="0" indent="0">
+            <a:pPr indent="0" marL="0">
               <a:lnSpc>
                 <a:spcPct val="122000"/>
               </a:lnSpc>
@@ -24239,7 +24569,7 @@
             <a:endParaRPr lang="en-US" sz="940" dirty="0"/>
           </a:p>
           <a:p>
-            <a:pPr marL="0" indent="0">
+            <a:pPr indent="0" marL="0">
               <a:lnSpc>
                 <a:spcPct val="122000"/>
               </a:lnSpc>
@@ -24259,7 +24589,7 @@
             <a:endParaRPr lang="en-US" sz="940" dirty="0"/>
           </a:p>
           <a:p>
-            <a:pPr marL="0" indent="0">
+            <a:pPr indent="0" marL="0">
               <a:lnSpc>
                 <a:spcPct val="122000"/>
               </a:lnSpc>
@@ -24279,7 +24609,7 @@
             <a:endParaRPr lang="en-US" sz="940" dirty="0"/>
           </a:p>
           <a:p>
-            <a:pPr marL="0" indent="0">
+            <a:pPr indent="0" marL="0">
               <a:lnSpc>
                 <a:spcPct val="122000"/>
               </a:lnSpc>
@@ -24299,7 +24629,7 @@
             <a:endParaRPr lang="en-US" sz="940" dirty="0"/>
           </a:p>
           <a:p>
-            <a:pPr marL="0" indent="0">
+            <a:pPr indent="0" marL="0">
               <a:lnSpc>
                 <a:spcPct val="122000"/>
               </a:lnSpc>
@@ -24319,7 +24649,7 @@
             <a:endParaRPr lang="en-US" sz="940" dirty="0"/>
           </a:p>
           <a:p>
-            <a:pPr marL="0" indent="0">
+            <a:pPr indent="0" marL="0">
               <a:lnSpc>
                 <a:spcPct val="122000"/>
               </a:lnSpc>
@@ -24339,7 +24669,7 @@
             <a:endParaRPr lang="en-US" sz="940" dirty="0"/>
           </a:p>
           <a:p>
-            <a:pPr marL="0" indent="0">
+            <a:pPr indent="0" marL="0">
               <a:lnSpc>
                 <a:spcPct val="122000"/>
               </a:lnSpc>
@@ -24359,7 +24689,7 @@
             <a:endParaRPr lang="en-US" sz="940" dirty="0"/>
           </a:p>
           <a:p>
-            <a:pPr marL="0" indent="0">
+            <a:pPr indent="0" marL="0">
               <a:lnSpc>
                 <a:spcPct val="122000"/>
               </a:lnSpc>
@@ -24379,7 +24709,7 @@
             <a:endParaRPr lang="en-US" sz="940" dirty="0"/>
           </a:p>
           <a:p>
-            <a:pPr marL="0" indent="0">
+            <a:pPr indent="0" marL="0">
               <a:lnSpc>
                 <a:spcPct val="122000"/>
               </a:lnSpc>
@@ -24399,7 +24729,7 @@
             <a:endParaRPr lang="en-US" sz="940" dirty="0"/>
           </a:p>
           <a:p>
-            <a:pPr marL="0" indent="0">
+            <a:pPr indent="0" marL="0">
               <a:lnSpc>
                 <a:spcPct val="122000"/>
               </a:lnSpc>
@@ -24419,7 +24749,7 @@
             <a:endParaRPr lang="en-US" sz="940" dirty="0"/>
           </a:p>
           <a:p>
-            <a:pPr marL="0" indent="0">
+            <a:pPr indent="0" marL="0">
               <a:lnSpc>
                 <a:spcPct val="122000"/>
               </a:lnSpc>
@@ -24439,7 +24769,7 @@
             <a:endParaRPr lang="en-US" sz="940" dirty="0"/>
           </a:p>
           <a:p>
-            <a:pPr marL="0" indent="0">
+            <a:pPr indent="0" marL="0">
               <a:lnSpc>
                 <a:spcPct val="122000"/>
               </a:lnSpc>
@@ -24459,7 +24789,7 @@
             <a:endParaRPr lang="en-US" sz="940" dirty="0"/>
           </a:p>
           <a:p>
-            <a:pPr marL="0" indent="0">
+            <a:pPr indent="0" marL="0">
               <a:lnSpc>
                 <a:spcPct val="122000"/>
               </a:lnSpc>
@@ -24501,7 +24831,7 @@
           <a:bodyPr wrap="square" rtlCol="0" anchor="ctr"/>
           <a:lstStyle/>
           <a:p>
-            <a:pPr marL="0" indent="0">
+            <a:pPr indent="0" marL="0">
               <a:buNone/>
             </a:pPr>
             <a:r>
@@ -24535,7 +24865,6 @@
         <a:solidFill>
           <a:srgbClr val="FFFFFF"/>
         </a:solidFill>
-        <a:effectLst/>
       </p:bgPr>
     </p:bg>
     <p:spTree>
@@ -24573,11 +24902,11 @@
           <a:bodyPr wrap="square" rtlCol="0" anchor="ctr"/>
           <a:lstStyle/>
           <a:p>
-            <a:pPr marL="0" indent="0">
-              <a:buNone/>
-            </a:pPr>
-            <a:r>
-              <a:rPr lang="en-US" sz="1000" b="1" kern="0" spc="120" dirty="0">
+            <a:pPr indent="0" marL="0">
+              <a:buNone/>
+            </a:pPr>
+            <a:r>
+              <a:rPr lang="en-US" sz="1000" b="1" spc="120" kern="0" dirty="0">
                 <a:solidFill>
                   <a:srgbClr val="1B305A"/>
                 </a:solidFill>
@@ -24612,11 +24941,11 @@
           <a:bodyPr wrap="square" rtlCol="0" anchor="ctr"/>
           <a:lstStyle/>
           <a:p>
-            <a:pPr marL="0" indent="0">
-              <a:buNone/>
-            </a:pPr>
-            <a:r>
-              <a:rPr lang="en-US" sz="850" b="1" kern="0" spc="160" dirty="0">
+            <a:pPr indent="0" marL="0">
+              <a:buNone/>
+            </a:pPr>
+            <a:r>
+              <a:rPr lang="en-US" sz="850" b="1" spc="160" kern="0" dirty="0">
                 <a:solidFill>
                   <a:srgbClr val="F5A310"/>
                 </a:solidFill>
@@ -24651,7 +24980,7 @@
           <a:bodyPr wrap="square" rtlCol="0" anchor="t"/>
           <a:lstStyle/>
           <a:p>
-            <a:pPr marL="0" indent="0">
+            <a:pPr indent="0" marL="0">
               <a:buNone/>
             </a:pPr>
             <a:r>
@@ -24730,7 +25059,7 @@
           <a:bodyPr wrap="square" rtlCol="0" anchor="t"/>
           <a:lstStyle/>
           <a:p>
-            <a:pPr marL="0" indent="0">
+            <a:pPr indent="0" marL="0">
               <a:lnSpc>
                 <a:spcPct val="120000"/>
               </a:lnSpc>
@@ -24792,7 +25121,7 @@
           <a:bodyPr wrap="square" rtlCol="0" anchor="ctr"/>
           <a:lstStyle/>
           <a:p>
-            <a:pPr marL="0" indent="0">
+            <a:pPr indent="0" marL="0">
               <a:buNone/>
             </a:pPr>
             <a:r>
@@ -24831,7 +25160,7 @@
           <a:bodyPr wrap="square" rtlCol="0" anchor="ctr"/>
           <a:lstStyle/>
           <a:p>
-            <a:pPr marL="0" indent="0" algn="ctr">
+            <a:pPr algn="ctr" indent="0" marL="0">
               <a:buNone/>
             </a:pPr>
             <a:r>
@@ -24870,7 +25199,7 @@
           <a:bodyPr wrap="square" rtlCol="0" anchor="ctr"/>
           <a:lstStyle/>
           <a:p>
-            <a:pPr marL="0" indent="0" algn="r">
+            <a:pPr algn="r" indent="0" marL="0">
               <a:buNone/>
             </a:pPr>
             <a:r>
@@ -24936,7 +25265,7 @@
           <a:bodyPr wrap="square" rtlCol="0" anchor="t"/>
           <a:lstStyle/>
           <a:p>
-            <a:pPr marL="0" indent="0">
+            <a:pPr indent="0" marL="0">
               <a:buNone/>
             </a:pPr>
             <a:r>
@@ -24975,7 +25304,7 @@
           <a:bodyPr wrap="square" rtlCol="0" anchor="t"/>
           <a:lstStyle/>
           <a:p>
-            <a:pPr marL="0" indent="0">
+            <a:pPr indent="0" marL="0">
               <a:lnSpc>
                 <a:spcPct val="110000"/>
               </a:lnSpc>
@@ -25037,7 +25366,7 @@
           <a:bodyPr wrap="square" rtlCol="0" anchor="t"/>
           <a:lstStyle/>
           <a:p>
-            <a:pPr marL="0" indent="0">
+            <a:pPr indent="0" marL="0">
               <a:lnSpc>
                 <a:spcPct val="110000"/>
               </a:lnSpc>
@@ -25054,119 +25383,131 @@
               </a:rPr>
               <a:t>Web &amp; tablet</a:t>
             </a:r>
-            <a:endParaRPr lang="en-US" sz="1000" dirty="0"/>
-          </a:p>
-          <a:p>
-            <a:pPr marL="0" indent="0">
+            <a:pPr indent="0" marL="0">
               <a:lnSpc>
                 <a:spcPct val="110000"/>
               </a:lnSpc>
               <a:buNone/>
             </a:pPr>
-            <a:r>
-              <a:rPr lang="en-US" sz="880" dirty="0">
-                <a:solidFill>
-                  <a:srgbClr val="667085"/>
-                </a:solidFill>
-                <a:latin typeface="Segoe UI" pitchFamily="34" charset="0"/>
-                <a:ea typeface="Segoe UI" pitchFamily="34" charset="-122"/>
-                <a:cs typeface="Segoe UI" pitchFamily="34" charset="-120"/>
-              </a:rPr>
-              <a:t>Role-aware screens for 14 roles, tablet-first at the nurse station</a:t>
-            </a:r>
             <a:endParaRPr lang="en-US" sz="1000" dirty="0"/>
           </a:p>
-        </p:txBody>
-      </p:sp>
-      <p:sp>
-        <p:nvSpPr>
-          <p:cNvPr id="17" name="Text 15"/>
-          <p:cNvSpPr/>
-          <p:nvPr/>
-        </p:nvSpPr>
-        <p:spPr>
-          <a:xfrm>
-            <a:off x="6051194" y="2112264"/>
-            <a:ext cx="2539898" cy="762000"/>
-          </a:xfrm>
-          <a:prstGeom prst="rect">
-            <a:avLst/>
-          </a:prstGeom>
-          <a:noFill/>
-          <a:ln/>
-        </p:spPr>
-        <p:txBody>
-          <a:bodyPr wrap="square" rtlCol="0" anchor="t"/>
-          <a:lstStyle/>
-          <a:p>
-            <a:pPr marL="0" indent="0">
+          <a:p>
+            <a:pPr indent="0" marL="0">
               <a:lnSpc>
                 <a:spcPct val="110000"/>
               </a:lnSpc>
               <a:buNone/>
             </a:pPr>
             <a:r>
-              <a:rPr lang="en-US" sz="1000" b="1" dirty="0">
-                <a:solidFill>
-                  <a:srgbClr val="101828"/>
-                </a:solidFill>
-                <a:latin typeface="Segoe UI" pitchFamily="34" charset="0"/>
-                <a:ea typeface="Segoe UI" pitchFamily="34" charset="-122"/>
-                <a:cs typeface="Segoe UI" pitchFamily="34" charset="-120"/>
-              </a:rPr>
-              <a:t>Offline queue</a:t>
+              <a:rPr lang="en-US" sz="880" dirty="0">
+                <a:solidFill>
+                  <a:srgbClr val="667085"/>
+                </a:solidFill>
+                <a:latin typeface="Segoe UI" pitchFamily="34" charset="0"/>
+                <a:ea typeface="Segoe UI" pitchFamily="34" charset="-122"/>
+                <a:cs typeface="Segoe UI" pitchFamily="34" charset="-120"/>
+              </a:rPr>
+              <a:t>Role-aware screens for 14 roles, tablet-first at the nurse station</a:t>
             </a:r>
             <a:endParaRPr lang="en-US" sz="1000" dirty="0"/>
           </a:p>
-          <a:p>
-            <a:pPr marL="0" indent="0">
+        </p:txBody>
+      </p:sp>
+      <p:sp>
+        <p:nvSpPr>
+          <p:cNvPr id="17" name="Text 15"/>
+          <p:cNvSpPr/>
+          <p:nvPr/>
+        </p:nvSpPr>
+        <p:spPr>
+          <a:xfrm>
+            <a:off x="6051194" y="2112264"/>
+            <a:ext cx="2539898" cy="762000"/>
+          </a:xfrm>
+          <a:prstGeom prst="rect">
+            <a:avLst/>
+          </a:prstGeom>
+          <a:noFill/>
+          <a:ln/>
+        </p:spPr>
+        <p:txBody>
+          <a:bodyPr wrap="square" rtlCol="0" anchor="t"/>
+          <a:lstStyle/>
+          <a:p>
+            <a:pPr indent="0" marL="0">
               <a:lnSpc>
                 <a:spcPct val="110000"/>
               </a:lnSpc>
               <a:buNone/>
             </a:pPr>
             <a:r>
-              <a:rPr lang="en-US" sz="880" dirty="0">
-                <a:solidFill>
-                  <a:srgbClr val="667085"/>
-                </a:solidFill>
-                <a:latin typeface="Segoe UI" pitchFamily="34" charset="0"/>
-                <a:ea typeface="Segoe UI" pitchFamily="34" charset="-122"/>
-                <a:cs typeface="Segoe UI" pitchFamily="34" charset="-120"/>
-              </a:rPr>
-              <a:t>Writes survive a dropped connection and sync when it returns</a:t>
-            </a:r>
-            <a:endParaRPr lang="en-US" sz="1000" dirty="0"/>
-          </a:p>
-        </p:txBody>
-      </p:sp>
-      <p:sp>
-        <p:nvSpPr>
-          <p:cNvPr id="18" name="Text 16"/>
-          <p:cNvSpPr/>
-          <p:nvPr/>
-        </p:nvSpPr>
-        <p:spPr>
-          <a:xfrm>
-            <a:off x="8737397" y="2112264"/>
-            <a:ext cx="2539898" cy="762000"/>
-          </a:xfrm>
-          <a:prstGeom prst="rect">
-            <a:avLst/>
-          </a:prstGeom>
-          <a:noFill/>
-          <a:ln/>
-        </p:spPr>
-        <p:txBody>
-          <a:bodyPr wrap="square" rtlCol="0" anchor="t"/>
-          <a:lstStyle/>
-          <a:p>
-            <a:pPr marL="0" indent="0">
+              <a:rPr lang="en-US" sz="1000" b="1" dirty="0">
+                <a:solidFill>
+                  <a:srgbClr val="101828"/>
+                </a:solidFill>
+                <a:latin typeface="Segoe UI" pitchFamily="34" charset="0"/>
+                <a:ea typeface="Segoe UI" pitchFamily="34" charset="-122"/>
+                <a:cs typeface="Segoe UI" pitchFamily="34" charset="-120"/>
+              </a:rPr>
+              <a:t>Offline queue</a:t>
+            </a:r>
+            <a:pPr indent="0" marL="0">
               <a:lnSpc>
                 <a:spcPct val="110000"/>
               </a:lnSpc>
               <a:buNone/>
             </a:pPr>
+            <a:endParaRPr lang="en-US" sz="1000" dirty="0"/>
+          </a:p>
+          <a:p>
+            <a:pPr indent="0" marL="0">
+              <a:lnSpc>
+                <a:spcPct val="110000"/>
+              </a:lnSpc>
+              <a:buNone/>
+            </a:pPr>
+            <a:r>
+              <a:rPr lang="en-US" sz="880" dirty="0">
+                <a:solidFill>
+                  <a:srgbClr val="667085"/>
+                </a:solidFill>
+                <a:latin typeface="Segoe UI" pitchFamily="34" charset="0"/>
+                <a:ea typeface="Segoe UI" pitchFamily="34" charset="-122"/>
+                <a:cs typeface="Segoe UI" pitchFamily="34" charset="-120"/>
+              </a:rPr>
+              <a:t>Writes survive a dropped connection and sync when it returns</a:t>
+            </a:r>
+            <a:endParaRPr lang="en-US" sz="1000" dirty="0"/>
+          </a:p>
+        </p:txBody>
+      </p:sp>
+      <p:sp>
+        <p:nvSpPr>
+          <p:cNvPr id="18" name="Text 16"/>
+          <p:cNvSpPr/>
+          <p:nvPr/>
+        </p:nvSpPr>
+        <p:spPr>
+          <a:xfrm>
+            <a:off x="8737397" y="2112264"/>
+            <a:ext cx="2539898" cy="762000"/>
+          </a:xfrm>
+          <a:prstGeom prst="rect">
+            <a:avLst/>
+          </a:prstGeom>
+          <a:noFill/>
+          <a:ln/>
+        </p:spPr>
+        <p:txBody>
+          <a:bodyPr wrap="square" rtlCol="0" anchor="t"/>
+          <a:lstStyle/>
+          <a:p>
+            <a:pPr indent="0" marL="0">
+              <a:lnSpc>
+                <a:spcPct val="110000"/>
+              </a:lnSpc>
+              <a:buNone/>
+            </a:pPr>
             <a:r>
               <a:rPr lang="en-US" sz="1000" b="1" dirty="0">
                 <a:solidFill>
@@ -25178,10 +25519,16 @@
               </a:rPr>
               <a:t>WhatsApp</a:t>
             </a:r>
+            <a:pPr indent="0" marL="0">
+              <a:lnSpc>
+                <a:spcPct val="110000"/>
+              </a:lnSpc>
+              <a:buNone/>
+            </a:pPr>
             <a:endParaRPr lang="en-US" sz="1000" dirty="0"/>
           </a:p>
           <a:p>
-            <a:pPr marL="0" indent="0">
+            <a:pPr indent="0" marL="0">
               <a:lnSpc>
                 <a:spcPct val="110000"/>
               </a:lnSpc>
@@ -25250,7 +25597,7 @@
           <a:bodyPr wrap="square" rtlCol="0" anchor="t"/>
           <a:lstStyle/>
           <a:p>
-            <a:pPr marL="0" indent="0">
+            <a:pPr indent="0" marL="0">
               <a:buNone/>
             </a:pPr>
             <a:r>
@@ -25289,7 +25636,7 @@
           <a:bodyPr wrap="square" rtlCol="0" anchor="t"/>
           <a:lstStyle/>
           <a:p>
-            <a:pPr marL="0" indent="0">
+            <a:pPr indent="0" marL="0">
               <a:lnSpc>
                 <a:spcPct val="110000"/>
               </a:lnSpc>
@@ -25351,7 +25698,7 @@
           <a:bodyPr wrap="square" rtlCol="0" anchor="t"/>
           <a:lstStyle/>
           <a:p>
-            <a:pPr marL="0" indent="0">
+            <a:pPr indent="0" marL="0">
               <a:lnSpc>
                 <a:spcPct val="110000"/>
               </a:lnSpc>
@@ -25368,119 +25715,131 @@
               </a:rPr>
               <a:t>Single AI chokepoint</a:t>
             </a:r>
-            <a:endParaRPr lang="en-US" sz="1000" dirty="0"/>
-          </a:p>
-          <a:p>
-            <a:pPr marL="0" indent="0">
+            <a:pPr indent="0" marL="0">
               <a:lnSpc>
                 <a:spcPct val="110000"/>
               </a:lnSpc>
               <a:buNone/>
             </a:pPr>
-            <a:r>
-              <a:rPr lang="en-US" sz="880" dirty="0">
-                <a:solidFill>
-                  <a:srgbClr val="667085"/>
-                </a:solidFill>
-                <a:latin typeface="Segoe UI" pitchFamily="34" charset="0"/>
-                <a:ea typeface="Segoe UI" pitchFamily="34" charset="-122"/>
-                <a:cs typeface="Segoe UI" pitchFamily="34" charset="-120"/>
-              </a:rPr>
-              <a:t>102 server functions; provider keys never reach the client</a:t>
-            </a:r>
             <a:endParaRPr lang="en-US" sz="1000" dirty="0"/>
           </a:p>
-        </p:txBody>
-      </p:sp>
-      <p:sp>
-        <p:nvSpPr>
-          <p:cNvPr id="24" name="Text 22"/>
-          <p:cNvSpPr/>
-          <p:nvPr/>
-        </p:nvSpPr>
-        <p:spPr>
-          <a:xfrm>
-            <a:off x="6051194" y="3294888"/>
-            <a:ext cx="2539898" cy="762000"/>
-          </a:xfrm>
-          <a:prstGeom prst="rect">
-            <a:avLst/>
-          </a:prstGeom>
-          <a:noFill/>
-          <a:ln/>
-        </p:spPr>
-        <p:txBody>
-          <a:bodyPr wrap="square" rtlCol="0" anchor="t"/>
-          <a:lstStyle/>
-          <a:p>
-            <a:pPr marL="0" indent="0">
+          <a:p>
+            <a:pPr indent="0" marL="0">
               <a:lnSpc>
                 <a:spcPct val="110000"/>
               </a:lnSpc>
               <a:buNone/>
             </a:pPr>
             <a:r>
-              <a:rPr lang="en-US" sz="1000" b="1" dirty="0">
-                <a:solidFill>
-                  <a:srgbClr val="101828"/>
-                </a:solidFill>
-                <a:latin typeface="Segoe UI" pitchFamily="34" charset="0"/>
-                <a:ea typeface="Segoe UI" pitchFamily="34" charset="-122"/>
-                <a:cs typeface="Segoe UI" pitchFamily="34" charset="-120"/>
-              </a:rPr>
-              <a:t>Prompt registry &amp; cost attribution</a:t>
+              <a:rPr lang="en-US" sz="880" dirty="0">
+                <a:solidFill>
+                  <a:srgbClr val="667085"/>
+                </a:solidFill>
+                <a:latin typeface="Segoe UI" pitchFamily="34" charset="0"/>
+                <a:ea typeface="Segoe UI" pitchFamily="34" charset="-122"/>
+                <a:cs typeface="Segoe UI" pitchFamily="34" charset="-120"/>
+              </a:rPr>
+              <a:t>107 server functions; provider keys never reach the client</a:t>
             </a:r>
             <a:endParaRPr lang="en-US" sz="1000" dirty="0"/>
           </a:p>
-          <a:p>
-            <a:pPr marL="0" indent="0">
+        </p:txBody>
+      </p:sp>
+      <p:sp>
+        <p:nvSpPr>
+          <p:cNvPr id="24" name="Text 22"/>
+          <p:cNvSpPr/>
+          <p:nvPr/>
+        </p:nvSpPr>
+        <p:spPr>
+          <a:xfrm>
+            <a:off x="6051194" y="3294888"/>
+            <a:ext cx="2539898" cy="762000"/>
+          </a:xfrm>
+          <a:prstGeom prst="rect">
+            <a:avLst/>
+          </a:prstGeom>
+          <a:noFill/>
+          <a:ln/>
+        </p:spPr>
+        <p:txBody>
+          <a:bodyPr wrap="square" rtlCol="0" anchor="t"/>
+          <a:lstStyle/>
+          <a:p>
+            <a:pPr indent="0" marL="0">
               <a:lnSpc>
                 <a:spcPct val="110000"/>
               </a:lnSpc>
               <a:buNone/>
             </a:pPr>
             <a:r>
-              <a:rPr lang="en-US" sz="880" dirty="0">
-                <a:solidFill>
-                  <a:srgbClr val="667085"/>
-                </a:solidFill>
-                <a:latin typeface="Segoe UI" pitchFamily="34" charset="0"/>
-                <a:ea typeface="Segoe UI" pitchFamily="34" charset="-122"/>
-                <a:cs typeface="Segoe UI" pitchFamily="34" charset="-120"/>
-              </a:rPr>
-              <a:t>Every call versioned, costed and attributable</a:t>
-            </a:r>
-            <a:endParaRPr lang="en-US" sz="1000" dirty="0"/>
-          </a:p>
-        </p:txBody>
-      </p:sp>
-      <p:sp>
-        <p:nvSpPr>
-          <p:cNvPr id="25" name="Text 23"/>
-          <p:cNvSpPr/>
-          <p:nvPr/>
-        </p:nvSpPr>
-        <p:spPr>
-          <a:xfrm>
-            <a:off x="8737397" y="3294888"/>
-            <a:ext cx="2539898" cy="762000"/>
-          </a:xfrm>
-          <a:prstGeom prst="rect">
-            <a:avLst/>
-          </a:prstGeom>
-          <a:noFill/>
-          <a:ln/>
-        </p:spPr>
-        <p:txBody>
-          <a:bodyPr wrap="square" rtlCol="0" anchor="t"/>
-          <a:lstStyle/>
-          <a:p>
-            <a:pPr marL="0" indent="0">
+              <a:rPr lang="en-US" sz="1000" b="1" dirty="0">
+                <a:solidFill>
+                  <a:srgbClr val="101828"/>
+                </a:solidFill>
+                <a:latin typeface="Segoe UI" pitchFamily="34" charset="0"/>
+                <a:ea typeface="Segoe UI" pitchFamily="34" charset="-122"/>
+                <a:cs typeface="Segoe UI" pitchFamily="34" charset="-120"/>
+              </a:rPr>
+              <a:t>Prompt registry &amp; cost attribution</a:t>
+            </a:r>
+            <a:pPr indent="0" marL="0">
               <a:lnSpc>
                 <a:spcPct val="110000"/>
               </a:lnSpc>
               <a:buNone/>
             </a:pPr>
+            <a:endParaRPr lang="en-US" sz="1000" dirty="0"/>
+          </a:p>
+          <a:p>
+            <a:pPr indent="0" marL="0">
+              <a:lnSpc>
+                <a:spcPct val="110000"/>
+              </a:lnSpc>
+              <a:buNone/>
+            </a:pPr>
+            <a:r>
+              <a:rPr lang="en-US" sz="880" dirty="0">
+                <a:solidFill>
+                  <a:srgbClr val="667085"/>
+                </a:solidFill>
+                <a:latin typeface="Segoe UI" pitchFamily="34" charset="0"/>
+                <a:ea typeface="Segoe UI" pitchFamily="34" charset="-122"/>
+                <a:cs typeface="Segoe UI" pitchFamily="34" charset="-120"/>
+              </a:rPr>
+              <a:t>Every call versioned, costed and attributable</a:t>
+            </a:r>
+            <a:endParaRPr lang="en-US" sz="1000" dirty="0"/>
+          </a:p>
+        </p:txBody>
+      </p:sp>
+      <p:sp>
+        <p:nvSpPr>
+          <p:cNvPr id="25" name="Text 23"/>
+          <p:cNvSpPr/>
+          <p:nvPr/>
+        </p:nvSpPr>
+        <p:spPr>
+          <a:xfrm>
+            <a:off x="8737397" y="3294888"/>
+            <a:ext cx="2539898" cy="762000"/>
+          </a:xfrm>
+          <a:prstGeom prst="rect">
+            <a:avLst/>
+          </a:prstGeom>
+          <a:noFill/>
+          <a:ln/>
+        </p:spPr>
+        <p:txBody>
+          <a:bodyPr wrap="square" rtlCol="0" anchor="t"/>
+          <a:lstStyle/>
+          <a:p>
+            <a:pPr indent="0" marL="0">
+              <a:lnSpc>
+                <a:spcPct val="110000"/>
+              </a:lnSpc>
+              <a:buNone/>
+            </a:pPr>
             <a:r>
               <a:rPr lang="en-US" sz="1000" b="1" dirty="0">
                 <a:solidFill>
@@ -25492,10 +25851,16 @@
               </a:rPr>
               <a:t>Deterministic safety guard</a:t>
             </a:r>
+            <a:pPr indent="0" marL="0">
+              <a:lnSpc>
+                <a:spcPct val="110000"/>
+              </a:lnSpc>
+              <a:buNone/>
+            </a:pPr>
             <a:endParaRPr lang="en-US" sz="1000" dirty="0"/>
           </a:p>
           <a:p>
-            <a:pPr marL="0" indent="0">
+            <a:pPr indent="0" marL="0">
               <a:lnSpc>
                 <a:spcPct val="110000"/>
               </a:lnSpc>
@@ -25564,7 +25929,7 @@
           <a:bodyPr wrap="square" rtlCol="0" anchor="t"/>
           <a:lstStyle/>
           <a:p>
-            <a:pPr marL="0" indent="0">
+            <a:pPr indent="0" marL="0">
               <a:buNone/>
             </a:pPr>
             <a:r>
@@ -25603,7 +25968,7 @@
           <a:bodyPr wrap="square" rtlCol="0" anchor="t"/>
           <a:lstStyle/>
           <a:p>
-            <a:pPr marL="0" indent="0">
+            <a:pPr indent="0" marL="0">
               <a:lnSpc>
                 <a:spcPct val="110000"/>
               </a:lnSpc>
@@ -25665,7 +26030,7 @@
           <a:bodyPr wrap="square" rtlCol="0" anchor="t"/>
           <a:lstStyle/>
           <a:p>
-            <a:pPr marL="0" indent="0">
+            <a:pPr indent="0" marL="0">
               <a:lnSpc>
                 <a:spcPct val="110000"/>
               </a:lnSpc>
@@ -25682,67 +26047,31 @@
               </a:rPr>
               <a:t>One Postgres schema</a:t>
             </a:r>
-            <a:endParaRPr lang="en-US" sz="1000" dirty="0"/>
-          </a:p>
-          <a:p>
-            <a:pPr marL="0" indent="0">
+            <a:pPr indent="0" marL="0">
               <a:lnSpc>
                 <a:spcPct val="110000"/>
               </a:lnSpc>
               <a:buNone/>
             </a:pPr>
-            <a:r>
-              <a:rPr lang="en-US" sz="880" dirty="0">
-                <a:solidFill>
-                  <a:srgbClr val="667085"/>
-                </a:solidFill>
-                <a:latin typeface="Segoe UI" pitchFamily="34" charset="0"/>
-                <a:ea typeface="Segoe UI" pitchFamily="34" charset="-122"/>
-                <a:cs typeface="Segoe UI" pitchFamily="34" charset="-120"/>
-              </a:rPr>
-              <a:t>one encounter spine</a:t>
-            </a:r>
             <a:endParaRPr lang="en-US" sz="1000" dirty="0"/>
           </a:p>
-        </p:txBody>
-      </p:sp>
-      <p:sp>
-        <p:nvSpPr>
-          <p:cNvPr id="31" name="Text 29"/>
-          <p:cNvSpPr/>
-          <p:nvPr/>
-        </p:nvSpPr>
-        <p:spPr>
-          <a:xfrm>
-            <a:off x="6051194" y="4477512"/>
-            <a:ext cx="2539898" cy="762000"/>
-          </a:xfrm>
-          <a:prstGeom prst="rect">
-            <a:avLst/>
-          </a:prstGeom>
-          <a:noFill/>
-          <a:ln/>
-        </p:spPr>
-        <p:txBody>
-          <a:bodyPr wrap="square" rtlCol="0" anchor="t"/>
-          <a:lstStyle/>
-          <a:p>
-            <a:pPr marL="0" indent="0">
+          <a:p>
+            <a:pPr indent="0" marL="0">
               <a:lnSpc>
                 <a:spcPct val="110000"/>
               </a:lnSpc>
               <a:buNone/>
             </a:pPr>
             <a:r>
-              <a:rPr lang="en-US" sz="1000" b="1" dirty="0">
-                <a:solidFill>
-                  <a:srgbClr val="101828"/>
-                </a:solidFill>
-                <a:latin typeface="Segoe UI" pitchFamily="34" charset="0"/>
-                <a:ea typeface="Segoe UI" pitchFamily="34" charset="-122"/>
-                <a:cs typeface="Segoe UI" pitchFamily="34" charset="-120"/>
-              </a:rPr>
-              <a:t>Tenant isolation</a:t>
+              <a:rPr lang="en-US" sz="880" dirty="0">
+                <a:solidFill>
+                  <a:srgbClr val="667085"/>
+                </a:solidFill>
+                <a:latin typeface="Segoe UI" pitchFamily="34" charset="0"/>
+                <a:ea typeface="Segoe UI" pitchFamily="34" charset="-122"/>
+                <a:cs typeface="Segoe UI" pitchFamily="34" charset="-120"/>
+              </a:rPr>
+              <a:t>555 tables, 612 migrations, one encounter spine</a:t>
             </a:r>
             <a:endParaRPr lang="en-US" sz="1000" dirty="0"/>
           </a:p>
@@ -25750,13 +26079,13 @@
       </p:sp>
       <p:sp>
         <p:nvSpPr>
-          <p:cNvPr id="32" name="Text 30"/>
-          <p:cNvSpPr/>
-          <p:nvPr/>
-        </p:nvSpPr>
-        <p:spPr>
-          <a:xfrm>
-            <a:off x="8737397" y="4477512"/>
+          <p:cNvPr id="31" name="Text 29"/>
+          <p:cNvSpPr/>
+          <p:nvPr/>
+        </p:nvSpPr>
+        <p:spPr>
+          <a:xfrm>
+            <a:off x="6051194" y="4477512"/>
             <a:ext cx="2539898" cy="762000"/>
           </a:xfrm>
           <a:prstGeom prst="rect">
@@ -25769,7 +26098,7 @@
           <a:bodyPr wrap="square" rtlCol="0" anchor="t"/>
           <a:lstStyle/>
           <a:p>
-            <a:pPr marL="0" indent="0">
+            <a:pPr indent="0" marL="0">
               <a:lnSpc>
                 <a:spcPct val="110000"/>
               </a:lnSpc>
@@ -25784,17 +26113,91 @@
                 <a:ea typeface="Segoe UI" pitchFamily="34" charset="-122"/>
                 <a:cs typeface="Segoe UI" pitchFamily="34" charset="-120"/>
               </a:rPr>
-              <a:t>PHI protection &amp; audit</a:t>
-            </a:r>
-            <a:endParaRPr lang="en-US" sz="1000" dirty="0"/>
-          </a:p>
-          <a:p>
-            <a:pPr marL="0" indent="0">
+              <a:t>Tenant isolation</a:t>
+            </a:r>
+            <a:pPr indent="0" marL="0">
               <a:lnSpc>
                 <a:spcPct val="110000"/>
               </a:lnSpc>
               <a:buNone/>
             </a:pPr>
+            <a:endParaRPr lang="en-US" sz="1000" dirty="0"/>
+          </a:p>
+          <a:p>
+            <a:pPr indent="0" marL="0">
+              <a:lnSpc>
+                <a:spcPct val="110000"/>
+              </a:lnSpc>
+              <a:buNone/>
+            </a:pPr>
+            <a:r>
+              <a:rPr lang="en-US" sz="880" dirty="0">
+                <a:solidFill>
+                  <a:srgbClr val="667085"/>
+                </a:solidFill>
+                <a:latin typeface="Segoe UI" pitchFamily="34" charset="0"/>
+                <a:ea typeface="Segoe UI" pitchFamily="34" charset="-122"/>
+                <a:cs typeface="Segoe UI" pitchFamily="34" charset="-120"/>
+              </a:rPr>
+              <a:t>550 tables row-level secured, 1011 policies</a:t>
+            </a:r>
+            <a:endParaRPr lang="en-US" sz="1000" dirty="0"/>
+          </a:p>
+        </p:txBody>
+      </p:sp>
+      <p:sp>
+        <p:nvSpPr>
+          <p:cNvPr id="32" name="Text 30"/>
+          <p:cNvSpPr/>
+          <p:nvPr/>
+        </p:nvSpPr>
+        <p:spPr>
+          <a:xfrm>
+            <a:off x="8737397" y="4477512"/>
+            <a:ext cx="2539898" cy="762000"/>
+          </a:xfrm>
+          <a:prstGeom prst="rect">
+            <a:avLst/>
+          </a:prstGeom>
+          <a:noFill/>
+          <a:ln/>
+        </p:spPr>
+        <p:txBody>
+          <a:bodyPr wrap="square" rtlCol="0" anchor="t"/>
+          <a:lstStyle/>
+          <a:p>
+            <a:pPr indent="0" marL="0">
+              <a:lnSpc>
+                <a:spcPct val="110000"/>
+              </a:lnSpc>
+              <a:buNone/>
+            </a:pPr>
+            <a:r>
+              <a:rPr lang="en-US" sz="1000" b="1" dirty="0">
+                <a:solidFill>
+                  <a:srgbClr val="101828"/>
+                </a:solidFill>
+                <a:latin typeface="Segoe UI" pitchFamily="34" charset="0"/>
+                <a:ea typeface="Segoe UI" pitchFamily="34" charset="-122"/>
+                <a:cs typeface="Segoe UI" pitchFamily="34" charset="-120"/>
+              </a:rPr>
+              <a:t>PHI protection &amp; audit</a:t>
+            </a:r>
+            <a:pPr indent="0" marL="0">
+              <a:lnSpc>
+                <a:spcPct val="110000"/>
+              </a:lnSpc>
+              <a:buNone/>
+            </a:pPr>
+            <a:endParaRPr lang="en-US" sz="1000" dirty="0"/>
+          </a:p>
+          <a:p>
+            <a:pPr indent="0" marL="0">
+              <a:lnSpc>
+                <a:spcPct val="110000"/>
+              </a:lnSpc>
+              <a:buNone/>
+            </a:pPr>
             <a:r>
               <a:rPr lang="en-US" sz="880" dirty="0">
                 <a:solidFill>
@@ -25831,7 +26234,7 @@
           <a:bodyPr wrap="square" rtlCol="0" anchor="ctr"/>
           <a:lstStyle/>
           <a:p>
-            <a:pPr marL="0" indent="0">
+            <a:pPr indent="0" marL="0">
               <a:lnSpc>
                 <a:spcPct val="120000"/>
               </a:lnSpc>
@@ -25868,7 +26271,6 @@
         <a:solidFill>
           <a:srgbClr val="FFFFFF"/>
         </a:solidFill>
-        <a:effectLst/>
       </p:bgPr>
     </p:bg>
     <p:spTree>
@@ -25906,11 +26308,11 @@
           <a:bodyPr wrap="square" rtlCol="0" anchor="ctr"/>
           <a:lstStyle/>
           <a:p>
-            <a:pPr marL="0" indent="0">
-              <a:buNone/>
-            </a:pPr>
-            <a:r>
-              <a:rPr lang="en-US" sz="1000" b="1" kern="0" spc="120" dirty="0">
+            <a:pPr indent="0" marL="0">
+              <a:buNone/>
+            </a:pPr>
+            <a:r>
+              <a:rPr lang="en-US" sz="1000" b="1" spc="120" kern="0" dirty="0">
                 <a:solidFill>
                   <a:srgbClr val="1B305A"/>
                 </a:solidFill>
@@ -25945,11 +26347,11 @@
           <a:bodyPr wrap="square" rtlCol="0" anchor="ctr"/>
           <a:lstStyle/>
           <a:p>
-            <a:pPr marL="0" indent="0">
-              <a:buNone/>
-            </a:pPr>
-            <a:r>
-              <a:rPr lang="en-US" sz="850" b="1" kern="0" spc="160" dirty="0">
+            <a:pPr indent="0" marL="0">
+              <a:buNone/>
+            </a:pPr>
+            <a:r>
+              <a:rPr lang="en-US" sz="850" b="1" spc="160" kern="0" dirty="0">
                 <a:solidFill>
                   <a:srgbClr val="F5A310"/>
                 </a:solidFill>
@@ -25984,7 +26386,7 @@
           <a:bodyPr wrap="square" rtlCol="0" anchor="t"/>
           <a:lstStyle/>
           <a:p>
-            <a:pPr marL="0" indent="0">
+            <a:pPr indent="0" marL="0">
               <a:buNone/>
             </a:pPr>
             <a:r>
@@ -26063,7 +26465,7 @@
           <a:bodyPr wrap="square" rtlCol="0" anchor="t"/>
           <a:lstStyle/>
           <a:p>
-            <a:pPr marL="0" indent="0">
+            <a:pPr indent="0" marL="0">
               <a:lnSpc>
                 <a:spcPct val="120000"/>
               </a:lnSpc>
@@ -26125,7 +26527,7 @@
           <a:bodyPr wrap="square" rtlCol="0" anchor="ctr"/>
           <a:lstStyle/>
           <a:p>
-            <a:pPr marL="0" indent="0">
+            <a:pPr indent="0" marL="0">
               <a:buNone/>
             </a:pPr>
             <a:r>
@@ -26164,7 +26566,7 @@
           <a:bodyPr wrap="square" rtlCol="0" anchor="ctr"/>
           <a:lstStyle/>
           <a:p>
-            <a:pPr marL="0" indent="0" algn="ctr">
+            <a:pPr algn="ctr" indent="0" marL="0">
               <a:buNone/>
             </a:pPr>
             <a:r>
@@ -26203,7 +26605,7 @@
           <a:bodyPr wrap="square" rtlCol="0" anchor="ctr"/>
           <a:lstStyle/>
           <a:p>
-            <a:pPr marL="0" indent="0" algn="r">
+            <a:pPr algn="r" indent="0" marL="0">
               <a:buNone/>
             </a:pPr>
             <a:r>
@@ -26289,7 +26691,7 @@
           <a:bodyPr wrap="square" rtlCol="0" anchor="ctr"/>
           <a:lstStyle/>
           <a:p>
-            <a:pPr marL="0" indent="0">
+            <a:pPr indent="0" marL="0">
               <a:buNone/>
             </a:pPr>
             <a:r>
@@ -26328,7 +26730,7 @@
           <a:bodyPr wrap="square" rtlCol="0" anchor="t"/>
           <a:lstStyle/>
           <a:p>
-            <a:pPr marL="0" indent="0">
+            <a:pPr indent="0" marL="0">
               <a:lnSpc>
                 <a:spcPct val="112000"/>
               </a:lnSpc>
@@ -26417,7 +26819,7 @@
           <a:bodyPr wrap="square" rtlCol="0" anchor="ctr"/>
           <a:lstStyle/>
           <a:p>
-            <a:pPr marL="0" indent="0">
+            <a:pPr indent="0" marL="0">
               <a:buNone/>
             </a:pPr>
             <a:r>
@@ -26456,7 +26858,7 @@
           <a:bodyPr wrap="square" rtlCol="0" anchor="t"/>
           <a:lstStyle/>
           <a:p>
-            <a:pPr marL="0" indent="0">
+            <a:pPr indent="0" marL="0">
               <a:lnSpc>
                 <a:spcPct val="112000"/>
               </a:lnSpc>
@@ -26545,7 +26947,7 @@
           <a:bodyPr wrap="square" rtlCol="0" anchor="ctr"/>
           <a:lstStyle/>
           <a:p>
-            <a:pPr marL="0" indent="0">
+            <a:pPr indent="0" marL="0">
               <a:buNone/>
             </a:pPr>
             <a:r>
@@ -26584,7 +26986,7 @@
           <a:bodyPr wrap="square" rtlCol="0" anchor="t"/>
           <a:lstStyle/>
           <a:p>
-            <a:pPr marL="0" indent="0">
+            <a:pPr indent="0" marL="0">
               <a:lnSpc>
                 <a:spcPct val="112000"/>
               </a:lnSpc>
@@ -26673,7 +27075,7 @@
           <a:bodyPr wrap="square" rtlCol="0" anchor="ctr"/>
           <a:lstStyle/>
           <a:p>
-            <a:pPr marL="0" indent="0">
+            <a:pPr indent="0" marL="0">
               <a:buNone/>
             </a:pPr>
             <a:r>
@@ -26712,7 +27114,7 @@
           <a:bodyPr wrap="square" rtlCol="0" anchor="t"/>
           <a:lstStyle/>
           <a:p>
-            <a:pPr marL="0" indent="0">
+            <a:pPr indent="0" marL="0">
               <a:lnSpc>
                 <a:spcPct val="112000"/>
               </a:lnSpc>
@@ -26801,7 +27203,7 @@
           <a:bodyPr wrap="square" rtlCol="0" anchor="ctr"/>
           <a:lstStyle/>
           <a:p>
-            <a:pPr marL="0" indent="0">
+            <a:pPr indent="0" marL="0">
               <a:buNone/>
             </a:pPr>
             <a:r>
@@ -26840,7 +27242,7 @@
           <a:bodyPr wrap="square" rtlCol="0" anchor="t"/>
           <a:lstStyle/>
           <a:p>
-            <a:pPr marL="0" indent="0">
+            <a:pPr indent="0" marL="0">
               <a:lnSpc>
                 <a:spcPct val="112000"/>
               </a:lnSpc>
@@ -26929,7 +27331,7 @@
           <a:bodyPr wrap="square" rtlCol="0" anchor="ctr"/>
           <a:lstStyle/>
           <a:p>
-            <a:pPr marL="0" indent="0">
+            <a:pPr indent="0" marL="0">
               <a:buNone/>
             </a:pPr>
             <a:r>
@@ -26968,7 +27370,7 @@
           <a:bodyPr wrap="square" rtlCol="0" anchor="t"/>
           <a:lstStyle/>
           <a:p>
-            <a:pPr marL="0" indent="0">
+            <a:pPr indent="0" marL="0">
               <a:lnSpc>
                 <a:spcPct val="112000"/>
               </a:lnSpc>
@@ -27057,7 +27459,7 @@
           <a:bodyPr wrap="square" rtlCol="0" anchor="ctr"/>
           <a:lstStyle/>
           <a:p>
-            <a:pPr marL="0" indent="0">
+            <a:pPr indent="0" marL="0">
               <a:buNone/>
             </a:pPr>
             <a:r>
@@ -27096,7 +27498,7 @@
           <a:bodyPr wrap="square" rtlCol="0" anchor="t"/>
           <a:lstStyle/>
           <a:p>
-            <a:pPr marL="0" indent="0">
+            <a:pPr indent="0" marL="0">
               <a:lnSpc>
                 <a:spcPct val="112000"/>
               </a:lnSpc>
@@ -27185,7 +27587,7 @@
           <a:bodyPr wrap="square" rtlCol="0" anchor="ctr"/>
           <a:lstStyle/>
           <a:p>
-            <a:pPr marL="0" indent="0">
+            <a:pPr indent="0" marL="0">
               <a:buNone/>
             </a:pPr>
             <a:r>
@@ -27197,7 +27599,7 @@
                 <a:ea typeface="Segoe UI" pitchFamily="34" charset="-122"/>
                 <a:cs typeface="Segoe UI" pitchFamily="34" charset="-120"/>
               </a:rPr>
-              <a:t>23 Indian languages</a:t>
+              <a:t>24 Indian languages</a:t>
             </a:r>
             <a:endParaRPr lang="en-US" sz="1150" dirty="0"/>
           </a:p>
@@ -27224,7 +27626,7 @@
           <a:bodyPr wrap="square" rtlCol="0" anchor="t"/>
           <a:lstStyle/>
           <a:p>
-            <a:pPr marL="0" indent="0">
+            <a:pPr indent="0" marL="0">
               <a:lnSpc>
                 <a:spcPct val="112000"/>
               </a:lnSpc>
@@ -27313,7 +27715,7 @@
           <a:bodyPr wrap="square" rtlCol="0" anchor="ctr"/>
           <a:lstStyle/>
           <a:p>
-            <a:pPr marL="0" indent="0">
+            <a:pPr indent="0" marL="0">
               <a:buNone/>
             </a:pPr>
             <a:r>
@@ -27352,7 +27754,7 @@
           <a:bodyPr wrap="square" rtlCol="0" anchor="t"/>
           <a:lstStyle/>
           <a:p>
-            <a:pPr marL="0" indent="0">
+            <a:pPr indent="0" marL="0">
               <a:lnSpc>
                 <a:spcPct val="112000"/>
               </a:lnSpc>
@@ -27389,7 +27791,6 @@
         <a:solidFill>
           <a:srgbClr val="FFFFFF"/>
         </a:solidFill>
-        <a:effectLst/>
       </p:bgPr>
     </p:bg>
     <p:spTree>
@@ -27427,11 +27828,11 @@
           <a:bodyPr wrap="square" rtlCol="0" anchor="ctr"/>
           <a:lstStyle/>
           <a:p>
-            <a:pPr marL="0" indent="0">
-              <a:buNone/>
-            </a:pPr>
-            <a:r>
-              <a:rPr lang="en-US" sz="1000" b="1" kern="0" spc="120" dirty="0">
+            <a:pPr indent="0" marL="0">
+              <a:buNone/>
+            </a:pPr>
+            <a:r>
+              <a:rPr lang="en-US" sz="1000" b="1" spc="120" kern="0" dirty="0">
                 <a:solidFill>
                   <a:srgbClr val="1B305A"/>
                 </a:solidFill>
@@ -27466,11 +27867,11 @@
           <a:bodyPr wrap="square" rtlCol="0" anchor="ctr"/>
           <a:lstStyle/>
           <a:p>
-            <a:pPr marL="0" indent="0">
-              <a:buNone/>
-            </a:pPr>
-            <a:r>
-              <a:rPr lang="en-US" sz="850" b="1" kern="0" spc="160" dirty="0">
+            <a:pPr indent="0" marL="0">
+              <a:buNone/>
+            </a:pPr>
+            <a:r>
+              <a:rPr lang="en-US" sz="850" b="1" spc="160" kern="0" dirty="0">
                 <a:solidFill>
                   <a:srgbClr val="F5A310"/>
                 </a:solidFill>
@@ -27505,7 +27906,7 @@
           <a:bodyPr wrap="square" rtlCol="0" anchor="t"/>
           <a:lstStyle/>
           <a:p>
-            <a:pPr marL="0" indent="0">
+            <a:pPr indent="0" marL="0">
               <a:buNone/>
             </a:pPr>
             <a:r>
@@ -27584,7 +27985,7 @@
           <a:bodyPr wrap="square" rtlCol="0" anchor="t"/>
           <a:lstStyle/>
           <a:p>
-            <a:pPr marL="0" indent="0">
+            <a:pPr indent="0" marL="0">
               <a:lnSpc>
                 <a:spcPct val="120000"/>
               </a:lnSpc>
@@ -27646,7 +28047,7 @@
           <a:bodyPr wrap="square" rtlCol="0" anchor="ctr"/>
           <a:lstStyle/>
           <a:p>
-            <a:pPr marL="0" indent="0">
+            <a:pPr indent="0" marL="0">
               <a:buNone/>
             </a:pPr>
             <a:r>
@@ -27685,7 +28086,7 @@
           <a:bodyPr wrap="square" rtlCol="0" anchor="ctr"/>
           <a:lstStyle/>
           <a:p>
-            <a:pPr marL="0" indent="0" algn="ctr">
+            <a:pPr algn="ctr" indent="0" marL="0">
               <a:buNone/>
             </a:pPr>
             <a:r>
@@ -27724,7 +28125,7 @@
           <a:bodyPr wrap="square" rtlCol="0" anchor="ctr"/>
           <a:lstStyle/>
           <a:p>
-            <a:pPr marL="0" indent="0" algn="r">
+            <a:pPr algn="r" indent="0" marL="0">
               <a:buNone/>
             </a:pPr>
             <a:r>
@@ -27790,7 +28191,7 @@
           <a:bodyPr wrap="square" rtlCol="0" anchor="t"/>
           <a:lstStyle/>
           <a:p>
-            <a:pPr marL="0" indent="0">
+            <a:pPr indent="0" marL="0">
               <a:buNone/>
             </a:pPr>
             <a:r>
@@ -27829,7 +28230,7 @@
           <a:bodyPr wrap="square" rtlCol="0" anchor="t"/>
           <a:lstStyle/>
           <a:p>
-            <a:pPr marL="0" indent="0">
+            <a:pPr indent="0" marL="0">
               <a:lnSpc>
                 <a:spcPct val="114000"/>
               </a:lnSpc>
@@ -27844,7 +28245,7 @@
                 <a:ea typeface="Segoe UI" pitchFamily="34" charset="-122"/>
                 <a:cs typeface="Segoe UI" pitchFamily="34" charset="-120"/>
               </a:rPr>
-              <a:t>68 catalogued AI features wired into 94 call sites inside the screens where the work already happens — not a separate assistant a doctor has to remember to open.</a:t>
+              <a:t>70 catalogued AI features wired into 95 call sites inside the screens where the work already happens — not a separate assistant a doctor has to remember to open.</a:t>
             </a:r>
             <a:endParaRPr lang="en-US" sz="1050" dirty="0"/>
           </a:p>
@@ -27898,7 +28299,7 @@
           <a:bodyPr wrap="square" rtlCol="0" anchor="t"/>
           <a:lstStyle/>
           <a:p>
-            <a:pPr marL="0" indent="0">
+            <a:pPr indent="0" marL="0">
               <a:buNone/>
             </a:pPr>
             <a:r>
@@ -27937,7 +28338,7 @@
           <a:bodyPr wrap="square" rtlCol="0" anchor="t"/>
           <a:lstStyle/>
           <a:p>
-            <a:pPr marL="0" indent="0">
+            <a:pPr indent="0" marL="0">
               <a:lnSpc>
                 <a:spcPct val="114000"/>
               </a:lnSpc>
@@ -28006,7 +28407,7 @@
           <a:bodyPr wrap="square" rtlCol="0" anchor="t"/>
           <a:lstStyle/>
           <a:p>
-            <a:pPr marL="0" indent="0">
+            <a:pPr indent="0" marL="0">
               <a:buNone/>
             </a:pPr>
             <a:r>
@@ -28045,7 +28446,7 @@
           <a:bodyPr wrap="square" rtlCol="0" anchor="t"/>
           <a:lstStyle/>
           <a:p>
-            <a:pPr marL="0" indent="0">
+            <a:pPr indent="0" marL="0">
               <a:lnSpc>
                 <a:spcPct val="114000"/>
               </a:lnSpc>
@@ -28114,7 +28515,7 @@
           <a:bodyPr wrap="square" rtlCol="0" anchor="t"/>
           <a:lstStyle/>
           <a:p>
-            <a:pPr marL="0" indent="0">
+            <a:pPr indent="0" marL="0">
               <a:buNone/>
             </a:pPr>
             <a:r>
@@ -28153,7 +28554,7 @@
           <a:bodyPr wrap="square" rtlCol="0" anchor="t"/>
           <a:lstStyle/>
           <a:p>
-            <a:pPr marL="0" indent="0">
+            <a:pPr indent="0" marL="0">
               <a:lnSpc>
                 <a:spcPct val="114000"/>
               </a:lnSpc>
@@ -28222,7 +28623,7 @@
           <a:bodyPr wrap="square" rtlCol="0" anchor="t"/>
           <a:lstStyle/>
           <a:p>
-            <a:pPr marL="0" indent="0">
+            <a:pPr indent="0" marL="0">
               <a:buNone/>
             </a:pPr>
             <a:r>
@@ -28261,7 +28662,7 @@
           <a:bodyPr wrap="square" rtlCol="0" anchor="t"/>
           <a:lstStyle/>
           <a:p>
-            <a:pPr marL="0" indent="0">
+            <a:pPr indent="0" marL="0">
               <a:lnSpc>
                 <a:spcPct val="114000"/>
               </a:lnSpc>
@@ -28298,7 +28699,6 @@
         <a:solidFill>
           <a:srgbClr val="FFFFFF"/>
         </a:solidFill>
-        <a:effectLst/>
       </p:bgPr>
     </p:bg>
     <p:spTree>
@@ -28336,11 +28736,11 @@
           <a:bodyPr wrap="square" rtlCol="0" anchor="ctr"/>
           <a:lstStyle/>
           <a:p>
-            <a:pPr marL="0" indent="0">
-              <a:buNone/>
-            </a:pPr>
-            <a:r>
-              <a:rPr lang="en-US" sz="1000" b="1" kern="0" spc="120" dirty="0">
+            <a:pPr indent="0" marL="0">
+              <a:buNone/>
+            </a:pPr>
+            <a:r>
+              <a:rPr lang="en-US" sz="1000" b="1" spc="120" kern="0" dirty="0">
                 <a:solidFill>
                   <a:srgbClr val="1B305A"/>
                 </a:solidFill>
@@ -28375,11 +28775,11 @@
           <a:bodyPr wrap="square" rtlCol="0" anchor="ctr"/>
           <a:lstStyle/>
           <a:p>
-            <a:pPr marL="0" indent="0">
-              <a:buNone/>
-            </a:pPr>
-            <a:r>
-              <a:rPr lang="en-US" sz="850" b="1" kern="0" spc="160" dirty="0">
+            <a:pPr indent="0" marL="0">
+              <a:buNone/>
+            </a:pPr>
+            <a:r>
+              <a:rPr lang="en-US" sz="850" b="1" spc="160" kern="0" dirty="0">
                 <a:solidFill>
                   <a:srgbClr val="F5A310"/>
                 </a:solidFill>
@@ -28414,7 +28814,7 @@
           <a:bodyPr wrap="square" rtlCol="0" anchor="t"/>
           <a:lstStyle/>
           <a:p>
-            <a:pPr marL="0" indent="0">
+            <a:pPr indent="0" marL="0">
               <a:buNone/>
             </a:pPr>
             <a:r>
@@ -28493,7 +28893,7 @@
           <a:bodyPr wrap="square" rtlCol="0" anchor="t"/>
           <a:lstStyle/>
           <a:p>
-            <a:pPr marL="0" indent="0">
+            <a:pPr indent="0" marL="0">
               <a:lnSpc>
                 <a:spcPct val="120000"/>
               </a:lnSpc>
@@ -28555,7 +28955,7 @@
           <a:bodyPr wrap="square" rtlCol="0" anchor="ctr"/>
           <a:lstStyle/>
           <a:p>
-            <a:pPr marL="0" indent="0">
+            <a:pPr indent="0" marL="0">
               <a:buNone/>
             </a:pPr>
             <a:r>
@@ -28594,7 +28994,7 @@
           <a:bodyPr wrap="square" rtlCol="0" anchor="ctr"/>
           <a:lstStyle/>
           <a:p>
-            <a:pPr marL="0" indent="0" algn="ctr">
+            <a:pPr algn="ctr" indent="0" marL="0">
               <a:buNone/>
             </a:pPr>
             <a:r>
@@ -28633,7 +29033,7 @@
           <a:bodyPr wrap="square" rtlCol="0" anchor="ctr"/>
           <a:lstStyle/>
           <a:p>
-            <a:pPr marL="0" indent="0" algn="r">
+            <a:pPr algn="r" indent="0" marL="0">
               <a:buNone/>
             </a:pPr>
             <a:r>
@@ -28653,7 +29053,7 @@
       </p:sp>
       <p:graphicFrame>
         <p:nvGraphicFramePr>
-          <p:cNvPr id="12" name="Table 0"/>
+          <p:cNvPr id="10" name="Table 0"/>
           <p:cNvGraphicFramePr>
             <a:graphicFrameLocks noGrp="1"/>
           </p:cNvGraphicFramePr>
@@ -28667,48 +29067,18 @@
         </p:nvGraphicFramePr>
         <p:xfrm>
           <a:off x="566928" y="1965960"/>
-          <a:ext cx="5943600" cy="2279904"/>
+          <a:ext cx="5943600" cy="914400"/>
         </p:xfrm>
         <a:graphic>
           <a:graphicData uri="http://schemas.openxmlformats.org/drawingml/2006/table">
             <a:tbl>
               <a:tblPr/>
               <a:tblGrid>
-                <a:gridCol w="2139696">
-                  <a:extLst>
-                    <a:ext uri="{9D8B030D-6E8A-4147-A177-3AD203B41FA5}">
-                      <a16:colId xmlns:a16="http://schemas.microsoft.com/office/drawing/2014/main" val="20000"/>
-                    </a:ext>
-                  </a:extLst>
-                </a:gridCol>
-                <a:gridCol w="950976">
-                  <a:extLst>
-                    <a:ext uri="{9D8B030D-6E8A-4147-A177-3AD203B41FA5}">
-                      <a16:colId xmlns:a16="http://schemas.microsoft.com/office/drawing/2014/main" val="20001"/>
-                    </a:ext>
-                  </a:extLst>
-                </a:gridCol>
-                <a:gridCol w="950976">
-                  <a:extLst>
-                    <a:ext uri="{9D8B030D-6E8A-4147-A177-3AD203B41FA5}">
-                      <a16:colId xmlns:a16="http://schemas.microsoft.com/office/drawing/2014/main" val="20002"/>
-                    </a:ext>
-                  </a:extLst>
-                </a:gridCol>
-                <a:gridCol w="950976">
-                  <a:extLst>
-                    <a:ext uri="{9D8B030D-6E8A-4147-A177-3AD203B41FA5}">
-                      <a16:colId xmlns:a16="http://schemas.microsoft.com/office/drawing/2014/main" val="20003"/>
-                    </a:ext>
-                  </a:extLst>
-                </a:gridCol>
-                <a:gridCol w="950976">
-                  <a:extLst>
-                    <a:ext uri="{9D8B030D-6E8A-4147-A177-3AD203B41FA5}">
-                      <a16:colId xmlns:a16="http://schemas.microsoft.com/office/drawing/2014/main" val="20004"/>
-                    </a:ext>
-                  </a:extLst>
-                </a:gridCol>
+                <a:gridCol w="2139696"/>
+                <a:gridCol w="950976"/>
+                <a:gridCol w="950976"/>
+                <a:gridCol w="950976"/>
+                <a:gridCol w="950976"/>
               </a:tblGrid>
               <a:tr h="310896">
                 <a:tc>
@@ -28716,7 +29086,7 @@
                     <a:bodyPr/>
                     <a:lstStyle/>
                     <a:p>
-                      <a:pPr marL="0" indent="0" algn="l">
+                      <a:pPr algn="l" indent="0" marL="0">
                         <a:buNone/>
                       </a:pPr>
                       <a:r>
@@ -28737,7 +29107,7 @@
                       </a:endParaRPr>
                     </a:p>
                   </a:txBody>
-                  <a:tcPr marT="54864" marB="54864" anchor="ctr">
+                  <a:tcPr marL="91440" marR="91440" marT="54864" marB="54864" anchor="ctr">
                     <a:lnL w="9525" cap="flat" cmpd="sng" algn="ctr">
                       <a:solidFill>
                         <a:srgbClr val="E4E7EC"/>
@@ -28784,7 +29154,7 @@
                     <a:bodyPr/>
                     <a:lstStyle/>
                     <a:p>
-                      <a:pPr marL="0" indent="0" algn="ctr">
+                      <a:pPr algn="ctr" indent="0" marL="0">
                         <a:buNone/>
                       </a:pPr>
                       <a:r>
@@ -28805,7 +29175,7 @@
                       </a:endParaRPr>
                     </a:p>
                   </a:txBody>
-                  <a:tcPr marT="54864" marB="54864" anchor="ctr">
+                  <a:tcPr marL="91440" marR="91440" marT="54864" marB="54864" anchor="ctr">
                     <a:lnL w="9525" cap="flat" cmpd="sng" algn="ctr">
                       <a:solidFill>
                         <a:srgbClr val="E4E7EC"/>
@@ -28852,7 +29222,7 @@
                     <a:bodyPr/>
                     <a:lstStyle/>
                     <a:p>
-                      <a:pPr marL="0" indent="0" algn="ctr">
+                      <a:pPr algn="ctr" indent="0" marL="0">
                         <a:buNone/>
                       </a:pPr>
                       <a:r>
@@ -28873,7 +29243,7 @@
                       </a:endParaRPr>
                     </a:p>
                   </a:txBody>
-                  <a:tcPr marT="54864" marB="54864" anchor="ctr">
+                  <a:tcPr marL="91440" marR="91440" marT="54864" marB="54864" anchor="ctr">
                     <a:lnL w="9525" cap="flat" cmpd="sng" algn="ctr">
                       <a:solidFill>
                         <a:srgbClr val="E4E7EC"/>
@@ -28920,7 +29290,7 @@
                     <a:bodyPr/>
                     <a:lstStyle/>
                     <a:p>
-                      <a:pPr marL="0" indent="0" algn="ctr">
+                      <a:pPr algn="ctr" indent="0" marL="0">
                         <a:buNone/>
                       </a:pPr>
                       <a:r>
@@ -28941,7 +29311,7 @@
                       </a:endParaRPr>
                     </a:p>
                   </a:txBody>
-                  <a:tcPr marT="54864" marB="54864" anchor="ctr">
+                  <a:tcPr marL="91440" marR="91440" marT="54864" marB="54864" anchor="ctr">
                     <a:lnL w="9525" cap="flat" cmpd="sng" algn="ctr">
                       <a:solidFill>
                         <a:srgbClr val="E4E7EC"/>
@@ -28988,7 +29358,7 @@
                     <a:bodyPr/>
                     <a:lstStyle/>
                     <a:p>
-                      <a:pPr marL="0" indent="0" algn="ctr">
+                      <a:pPr algn="ctr" indent="0" marL="0">
                         <a:buNone/>
                       </a:pPr>
                       <a:r>
@@ -29009,7 +29379,7 @@
                       </a:endParaRPr>
                     </a:p>
                   </a:txBody>
-                  <a:tcPr marT="54864" marB="54864" anchor="ctr">
+                  <a:tcPr marL="91440" marR="91440" marT="54864" marB="54864" anchor="ctr">
                     <a:lnL w="9525" cap="flat" cmpd="sng" algn="ctr">
                       <a:solidFill>
                         <a:srgbClr val="E4E7EC"/>
@@ -29051,11 +29421,6 @@
                     </a:solidFill>
                   </a:tcPr>
                 </a:tc>
-                <a:extLst>
-                  <a:ext uri="{0D108BD9-81ED-4DB2-BD59-A6C34878D82A}">
-                    <a16:rowId xmlns:a16="http://schemas.microsoft.com/office/drawing/2014/main" val="10000"/>
-                  </a:ext>
-                </a:extLst>
               </a:tr>
               <a:tr h="310896">
                 <a:tc>
@@ -29063,7 +29428,7 @@
                     <a:bodyPr/>
                     <a:lstStyle/>
                     <a:p>
-                      <a:pPr marL="0" indent="0" algn="l">
+                      <a:pPr algn="l" indent="0" marL="0">
                         <a:buNone/>
                       </a:pPr>
                       <a:r>
@@ -29084,7 +29449,7 @@
                       </a:endParaRPr>
                     </a:p>
                   </a:txBody>
-                  <a:tcPr marT="54864" marB="54864" anchor="ctr">
+                  <a:tcPr marL="91440" marR="91440" marT="54864" marB="54864" anchor="ctr">
                     <a:lnL w="9525" cap="flat" cmpd="sng" algn="ctr">
                       <a:solidFill>
                         <a:srgbClr val="E4E7EC"/>
@@ -29131,7 +29496,7 @@
                     <a:bodyPr/>
                     <a:lstStyle/>
                     <a:p>
-                      <a:pPr marL="0" indent="0" algn="ctr">
+                      <a:pPr algn="ctr" indent="0" marL="0">
                         <a:buNone/>
                       </a:pPr>
                       <a:r>
@@ -29152,7 +29517,7 @@
                       </a:endParaRPr>
                     </a:p>
                   </a:txBody>
-                  <a:tcPr marT="54864" marB="54864" anchor="ctr">
+                  <a:tcPr marL="91440" marR="91440" marT="54864" marB="54864" anchor="ctr">
                     <a:lnL w="9525" cap="flat" cmpd="sng" algn="ctr">
                       <a:solidFill>
                         <a:srgbClr val="E4E7EC"/>
@@ -29199,7 +29564,7 @@
                     <a:bodyPr/>
                     <a:lstStyle/>
                     <a:p>
-                      <a:pPr marL="0" indent="0" algn="ctr">
+                      <a:pPr algn="ctr" indent="0" marL="0">
                         <a:buNone/>
                       </a:pPr>
                       <a:r>
@@ -29220,7 +29585,7 @@
                       </a:endParaRPr>
                     </a:p>
                   </a:txBody>
-                  <a:tcPr marT="54864" marB="54864" anchor="ctr">
+                  <a:tcPr marL="91440" marR="91440" marT="54864" marB="54864" anchor="ctr">
                     <a:lnL w="9525" cap="flat" cmpd="sng" algn="ctr">
                       <a:solidFill>
                         <a:srgbClr val="E4E7EC"/>
@@ -29267,7 +29632,7 @@
                     <a:bodyPr/>
                     <a:lstStyle/>
                     <a:p>
-                      <a:pPr marL="0" indent="0" algn="ctr">
+                      <a:pPr algn="ctr" indent="0" marL="0">
                         <a:buNone/>
                       </a:pPr>
                       <a:r>
@@ -29288,7 +29653,7 @@
                       </a:endParaRPr>
                     </a:p>
                   </a:txBody>
-                  <a:tcPr marT="54864" marB="54864" anchor="ctr">
+                  <a:tcPr marL="91440" marR="91440" marT="54864" marB="54864" anchor="ctr">
                     <a:lnL w="9525" cap="flat" cmpd="sng" algn="ctr">
                       <a:solidFill>
                         <a:srgbClr val="E4E7EC"/>
@@ -29335,7 +29700,7 @@
                     <a:bodyPr/>
                     <a:lstStyle/>
                     <a:p>
-                      <a:pPr marL="0" indent="0" algn="ctr">
+                      <a:pPr algn="ctr" indent="0" marL="0">
                         <a:buNone/>
                       </a:pPr>
                       <a:r>
@@ -29356,7 +29721,7 @@
                       </a:endParaRPr>
                     </a:p>
                   </a:txBody>
-                  <a:tcPr marT="54864" marB="54864" anchor="ctr">
+                  <a:tcPr marL="91440" marR="91440" marT="54864" marB="54864" anchor="ctr">
                     <a:lnL w="9525" cap="flat" cmpd="sng" algn="ctr">
                       <a:solidFill>
                         <a:srgbClr val="E4E7EC"/>
@@ -29398,11 +29763,6 @@
                     </a:solidFill>
                   </a:tcPr>
                 </a:tc>
-                <a:extLst>
-                  <a:ext uri="{0D108BD9-81ED-4DB2-BD59-A6C34878D82A}">
-                    <a16:rowId xmlns:a16="http://schemas.microsoft.com/office/drawing/2014/main" val="10001"/>
-                  </a:ext>
-                </a:extLst>
               </a:tr>
               <a:tr h="310896">
                 <a:tc>
@@ -29410,7 +29770,7 @@
                     <a:bodyPr/>
                     <a:lstStyle/>
                     <a:p>
-                      <a:pPr marL="0" indent="0" algn="l">
+                      <a:pPr algn="l" indent="0" marL="0">
                         <a:buNone/>
                       </a:pPr>
                       <a:r>
@@ -29431,7 +29791,7 @@
                       </a:endParaRPr>
                     </a:p>
                   </a:txBody>
-                  <a:tcPr marT="54864" marB="54864" anchor="ctr">
+                  <a:tcPr marL="91440" marR="91440" marT="54864" marB="54864" anchor="ctr">
                     <a:lnL w="9525" cap="flat" cmpd="sng" algn="ctr">
                       <a:solidFill>
                         <a:srgbClr val="E4E7EC"/>
@@ -29478,7 +29838,7 @@
                     <a:bodyPr/>
                     <a:lstStyle/>
                     <a:p>
-                      <a:pPr marL="0" indent="0" algn="ctr">
+                      <a:pPr algn="ctr" indent="0" marL="0">
                         <a:buNone/>
                       </a:pPr>
                       <a:r>
@@ -29499,7 +29859,7 @@
                       </a:endParaRPr>
                     </a:p>
                   </a:txBody>
-                  <a:tcPr marT="54864" marB="54864" anchor="ctr">
+                  <a:tcPr marL="91440" marR="91440" marT="54864" marB="54864" anchor="ctr">
                     <a:lnL w="9525" cap="flat" cmpd="sng" algn="ctr">
                       <a:solidFill>
                         <a:srgbClr val="E4E7EC"/>
@@ -29546,7 +29906,7 @@
                     <a:bodyPr/>
                     <a:lstStyle/>
                     <a:p>
-                      <a:pPr marL="0" indent="0" algn="ctr">
+                      <a:pPr algn="ctr" indent="0" marL="0">
                         <a:buNone/>
                       </a:pPr>
                       <a:r>
@@ -29567,7 +29927,7 @@
                       </a:endParaRPr>
                     </a:p>
                   </a:txBody>
-                  <a:tcPr marT="54864" marB="54864" anchor="ctr">
+                  <a:tcPr marL="91440" marR="91440" marT="54864" marB="54864" anchor="ctr">
                     <a:lnL w="9525" cap="flat" cmpd="sng" algn="ctr">
                       <a:solidFill>
                         <a:srgbClr val="E4E7EC"/>
@@ -29614,7 +29974,7 @@
                     <a:bodyPr/>
                     <a:lstStyle/>
                     <a:p>
-                      <a:pPr marL="0" indent="0" algn="ctr">
+                      <a:pPr algn="ctr" indent="0" marL="0">
                         <a:buNone/>
                       </a:pPr>
                       <a:r>
@@ -29635,7 +29995,7 @@
                       </a:endParaRPr>
                     </a:p>
                   </a:txBody>
-                  <a:tcPr marT="54864" marB="54864" anchor="ctr">
+                  <a:tcPr marL="91440" marR="91440" marT="54864" marB="54864" anchor="ctr">
                     <a:lnL w="9525" cap="flat" cmpd="sng" algn="ctr">
                       <a:solidFill>
                         <a:srgbClr val="E4E7EC"/>
@@ -29682,7 +30042,7 @@
                     <a:bodyPr/>
                     <a:lstStyle/>
                     <a:p>
-                      <a:pPr marL="0" indent="0" algn="ctr">
+                      <a:pPr algn="ctr" indent="0" marL="0">
                         <a:buNone/>
                       </a:pPr>
                       <a:r>
@@ -29703,7 +30063,7 @@
                       </a:endParaRPr>
                     </a:p>
                   </a:txBody>
-                  <a:tcPr marT="54864" marB="54864" anchor="ctr">
+                  <a:tcPr marL="91440" marR="91440" marT="54864" marB="54864" anchor="ctr">
                     <a:lnL w="9525" cap="flat" cmpd="sng" algn="ctr">
                       <a:solidFill>
                         <a:srgbClr val="E4E7EC"/>
@@ -29745,11 +30105,6 @@
                     </a:solidFill>
                   </a:tcPr>
                 </a:tc>
-                <a:extLst>
-                  <a:ext uri="{0D108BD9-81ED-4DB2-BD59-A6C34878D82A}">
-                    <a16:rowId xmlns:a16="http://schemas.microsoft.com/office/drawing/2014/main" val="10002"/>
-                  </a:ext>
-                </a:extLst>
               </a:tr>
               <a:tr h="310896">
                 <a:tc>
@@ -29757,7 +30112,7 @@
                     <a:bodyPr/>
                     <a:lstStyle/>
                     <a:p>
-                      <a:pPr marL="0" indent="0" algn="l">
+                      <a:pPr algn="l" indent="0" marL="0">
                         <a:buNone/>
                       </a:pPr>
                       <a:r>
@@ -29778,7 +30133,7 @@
                       </a:endParaRPr>
                     </a:p>
                   </a:txBody>
-                  <a:tcPr marT="54864" marB="54864" anchor="ctr">
+                  <a:tcPr marL="91440" marR="91440" marT="54864" marB="54864" anchor="ctr">
                     <a:lnL w="9525" cap="flat" cmpd="sng" algn="ctr">
                       <a:solidFill>
                         <a:srgbClr val="E4E7EC"/>
@@ -29825,7 +30180,7 @@
                     <a:bodyPr/>
                     <a:lstStyle/>
                     <a:p>
-                      <a:pPr marL="0" indent="0" algn="ctr">
+                      <a:pPr algn="ctr" indent="0" marL="0">
                         <a:buNone/>
                       </a:pPr>
                       <a:r>
@@ -29846,7 +30201,7 @@
                       </a:endParaRPr>
                     </a:p>
                   </a:txBody>
-                  <a:tcPr marT="54864" marB="54864" anchor="ctr">
+                  <a:tcPr marL="91440" marR="91440" marT="54864" marB="54864" anchor="ctr">
                     <a:lnL w="9525" cap="flat" cmpd="sng" algn="ctr">
                       <a:solidFill>
                         <a:srgbClr val="E4E7EC"/>
@@ -29893,7 +30248,7 @@
                     <a:bodyPr/>
                     <a:lstStyle/>
                     <a:p>
-                      <a:pPr marL="0" indent="0" algn="ctr">
+                      <a:pPr algn="ctr" indent="0" marL="0">
                         <a:buNone/>
                       </a:pPr>
                       <a:r>
@@ -29914,7 +30269,7 @@
                       </a:endParaRPr>
                     </a:p>
                   </a:txBody>
-                  <a:tcPr marT="54864" marB="54864" anchor="ctr">
+                  <a:tcPr marL="91440" marR="91440" marT="54864" marB="54864" anchor="ctr">
                     <a:lnL w="9525" cap="flat" cmpd="sng" algn="ctr">
                       <a:solidFill>
                         <a:srgbClr val="E4E7EC"/>
@@ -29961,7 +30316,7 @@
                     <a:bodyPr/>
                     <a:lstStyle/>
                     <a:p>
-                      <a:pPr marL="0" indent="0" algn="ctr">
+                      <a:pPr algn="ctr" indent="0" marL="0">
                         <a:buNone/>
                       </a:pPr>
                       <a:r>
@@ -29982,7 +30337,7 @@
                       </a:endParaRPr>
                     </a:p>
                   </a:txBody>
-                  <a:tcPr marT="54864" marB="54864" anchor="ctr">
+                  <a:tcPr marL="91440" marR="91440" marT="54864" marB="54864" anchor="ctr">
                     <a:lnL w="9525" cap="flat" cmpd="sng" algn="ctr">
                       <a:solidFill>
                         <a:srgbClr val="E4E7EC"/>
@@ -30029,7 +30384,7 @@
                     <a:bodyPr/>
                     <a:lstStyle/>
                     <a:p>
-                      <a:pPr marL="0" indent="0" algn="ctr">
+                      <a:pPr algn="ctr" indent="0" marL="0">
                         <a:buNone/>
                       </a:pPr>
                       <a:r>
@@ -30050,7 +30405,7 @@
                       </a:endParaRPr>
                     </a:p>
                   </a:txBody>
-                  <a:tcPr marT="54864" marB="54864" anchor="ctr">
+                  <a:tcPr marL="91440" marR="91440" marT="54864" marB="54864" anchor="ctr">
                     <a:lnL w="9525" cap="flat" cmpd="sng" algn="ctr">
                       <a:solidFill>
                         <a:srgbClr val="E4E7EC"/>
@@ -30092,11 +30447,6 @@
                     </a:solidFill>
                   </a:tcPr>
                 </a:tc>
-                <a:extLst>
-                  <a:ext uri="{0D108BD9-81ED-4DB2-BD59-A6C34878D82A}">
-                    <a16:rowId xmlns:a16="http://schemas.microsoft.com/office/drawing/2014/main" val="10003"/>
-                  </a:ext>
-                </a:extLst>
               </a:tr>
               <a:tr h="310896">
                 <a:tc>
@@ -30104,7 +30454,7 @@
                     <a:bodyPr/>
                     <a:lstStyle/>
                     <a:p>
-                      <a:pPr marL="0" indent="0" algn="l">
+                      <a:pPr algn="l" indent="0" marL="0">
                         <a:buNone/>
                       </a:pPr>
                       <a:r>
@@ -30125,7 +30475,7 @@
                       </a:endParaRPr>
                     </a:p>
                   </a:txBody>
-                  <a:tcPr marT="54864" marB="54864" anchor="ctr">
+                  <a:tcPr marL="91440" marR="91440" marT="54864" marB="54864" anchor="ctr">
                     <a:lnL w="9525" cap="flat" cmpd="sng" algn="ctr">
                       <a:solidFill>
                         <a:srgbClr val="E4E7EC"/>
@@ -30172,7 +30522,7 @@
                     <a:bodyPr/>
                     <a:lstStyle/>
                     <a:p>
-                      <a:pPr marL="0" indent="0" algn="ctr">
+                      <a:pPr algn="ctr" indent="0" marL="0">
                         <a:buNone/>
                       </a:pPr>
                       <a:r>
@@ -30193,7 +30543,7 @@
                       </a:endParaRPr>
                     </a:p>
                   </a:txBody>
-                  <a:tcPr marT="54864" marB="54864" anchor="ctr">
+                  <a:tcPr marL="91440" marR="91440" marT="54864" marB="54864" anchor="ctr">
                     <a:lnL w="9525" cap="flat" cmpd="sng" algn="ctr">
                       <a:solidFill>
                         <a:srgbClr val="E4E7EC"/>
@@ -30240,7 +30590,7 @@
                     <a:bodyPr/>
                     <a:lstStyle/>
                     <a:p>
-                      <a:pPr marL="0" indent="0" algn="ctr">
+                      <a:pPr algn="ctr" indent="0" marL="0">
                         <a:buNone/>
                       </a:pPr>
                       <a:r>
@@ -30261,7 +30611,7 @@
                       </a:endParaRPr>
                     </a:p>
                   </a:txBody>
-                  <a:tcPr marT="54864" marB="54864" anchor="ctr">
+                  <a:tcPr marL="91440" marR="91440" marT="54864" marB="54864" anchor="ctr">
                     <a:lnL w="9525" cap="flat" cmpd="sng" algn="ctr">
                       <a:solidFill>
                         <a:srgbClr val="E4E7EC"/>
@@ -30308,7 +30658,7 @@
                     <a:bodyPr/>
                     <a:lstStyle/>
                     <a:p>
-                      <a:pPr marL="0" indent="0" algn="ctr">
+                      <a:pPr algn="ctr" indent="0" marL="0">
                         <a:buNone/>
                       </a:pPr>
                       <a:r>
@@ -30329,7 +30679,7 @@
                       </a:endParaRPr>
                     </a:p>
                   </a:txBody>
-                  <a:tcPr marT="54864" marB="54864" anchor="ctr">
+                  <a:tcPr marL="91440" marR="91440" marT="54864" marB="54864" anchor="ctr">
                     <a:lnL w="9525" cap="flat" cmpd="sng" algn="ctr">
                       <a:solidFill>
                         <a:srgbClr val="E4E7EC"/>
@@ -30376,7 +30726,7 @@
                     <a:bodyPr/>
                     <a:lstStyle/>
                     <a:p>
-                      <a:pPr marL="0" indent="0" algn="ctr">
+                      <a:pPr algn="ctr" indent="0" marL="0">
                         <a:buNone/>
                       </a:pPr>
                       <a:r>
@@ -30397,7 +30747,7 @@
                       </a:endParaRPr>
                     </a:p>
                   </a:txBody>
-                  <a:tcPr marT="54864" marB="54864" anchor="ctr">
+                  <a:tcPr marL="91440" marR="91440" marT="54864" marB="54864" anchor="ctr">
                     <a:lnL w="9525" cap="flat" cmpd="sng" algn="ctr">
                       <a:solidFill>
                         <a:srgbClr val="E4E7EC"/>
@@ -30439,11 +30789,6 @@
                     </a:solidFill>
                   </a:tcPr>
                 </a:tc>
-                <a:extLst>
-                  <a:ext uri="{0D108BD9-81ED-4DB2-BD59-A6C34878D82A}">
-                    <a16:rowId xmlns:a16="http://schemas.microsoft.com/office/drawing/2014/main" val="10004"/>
-                  </a:ext>
-                </a:extLst>
               </a:tr>
               <a:tr h="310896">
                 <a:tc>
@@ -30451,7 +30796,7 @@
                     <a:bodyPr/>
                     <a:lstStyle/>
                     <a:p>
-                      <a:pPr marL="0" indent="0" algn="l">
+                      <a:pPr algn="l" indent="0" marL="0">
                         <a:buNone/>
                       </a:pPr>
                       <a:r>
@@ -30472,7 +30817,7 @@
                       </a:endParaRPr>
                     </a:p>
                   </a:txBody>
-                  <a:tcPr marT="54864" marB="54864" anchor="ctr">
+                  <a:tcPr marL="91440" marR="91440" marT="54864" marB="54864" anchor="ctr">
                     <a:lnL w="9525" cap="flat" cmpd="sng" algn="ctr">
                       <a:solidFill>
                         <a:srgbClr val="E4E7EC"/>
@@ -30519,7 +30864,7 @@
                     <a:bodyPr/>
                     <a:lstStyle/>
                     <a:p>
-                      <a:pPr marL="0" indent="0" algn="ctr">
+                      <a:pPr algn="ctr" indent="0" marL="0">
                         <a:buNone/>
                       </a:pPr>
                       <a:r>
@@ -30540,7 +30885,7 @@
                       </a:endParaRPr>
                     </a:p>
                   </a:txBody>
-                  <a:tcPr marT="54864" marB="54864" anchor="ctr">
+                  <a:tcPr marL="91440" marR="91440" marT="54864" marB="54864" anchor="ctr">
                     <a:lnL w="9525" cap="flat" cmpd="sng" algn="ctr">
                       <a:solidFill>
                         <a:srgbClr val="E4E7EC"/>
@@ -30587,7 +30932,7 @@
                     <a:bodyPr/>
                     <a:lstStyle/>
                     <a:p>
-                      <a:pPr marL="0" indent="0" algn="ctr">
+                      <a:pPr algn="ctr" indent="0" marL="0">
                         <a:buNone/>
                       </a:pPr>
                       <a:r>
@@ -30608,7 +30953,7 @@
                       </a:endParaRPr>
                     </a:p>
                   </a:txBody>
-                  <a:tcPr marT="54864" marB="54864" anchor="ctr">
+                  <a:tcPr marL="91440" marR="91440" marT="54864" marB="54864" anchor="ctr">
                     <a:lnL w="9525" cap="flat" cmpd="sng" algn="ctr">
                       <a:solidFill>
                         <a:srgbClr val="E4E7EC"/>
@@ -30655,7 +31000,7 @@
                     <a:bodyPr/>
                     <a:lstStyle/>
                     <a:p>
-                      <a:pPr marL="0" indent="0" algn="ctr">
+                      <a:pPr algn="ctr" indent="0" marL="0">
                         <a:buNone/>
                       </a:pPr>
                       <a:r>
@@ -30676,7 +31021,7 @@
                       </a:endParaRPr>
                     </a:p>
                   </a:txBody>
-                  <a:tcPr marT="54864" marB="54864" anchor="ctr">
+                  <a:tcPr marL="91440" marR="91440" marT="54864" marB="54864" anchor="ctr">
                     <a:lnL w="9525" cap="flat" cmpd="sng" algn="ctr">
                       <a:solidFill>
                         <a:srgbClr val="E4E7EC"/>
@@ -30723,7 +31068,7 @@
                     <a:bodyPr/>
                     <a:lstStyle/>
                     <a:p>
-                      <a:pPr marL="0" indent="0" algn="ctr">
+                      <a:pPr algn="ctr" indent="0" marL="0">
                         <a:buNone/>
                       </a:pPr>
                       <a:r>
@@ -30744,7 +31089,7 @@
                       </a:endParaRPr>
                     </a:p>
                   </a:txBody>
-                  <a:tcPr marT="54864" marB="54864" anchor="ctr">
+                  <a:tcPr marL="91440" marR="91440" marT="54864" marB="54864" anchor="ctr">
                     <a:lnL w="9525" cap="flat" cmpd="sng" algn="ctr">
                       <a:solidFill>
                         <a:srgbClr val="E4E7EC"/>
@@ -30786,11 +31131,6 @@
                     </a:solidFill>
                   </a:tcPr>
                 </a:tc>
-                <a:extLst>
-                  <a:ext uri="{0D108BD9-81ED-4DB2-BD59-A6C34878D82A}">
-                    <a16:rowId xmlns:a16="http://schemas.microsoft.com/office/drawing/2014/main" val="10005"/>
-                  </a:ext>
-                </a:extLst>
               </a:tr>
               <a:tr h="310896">
                 <a:tc>
@@ -30798,7 +31138,7 @@
                     <a:bodyPr/>
                     <a:lstStyle/>
                     <a:p>
-                      <a:pPr marL="0" indent="0" algn="l">
+                      <a:pPr algn="l" indent="0" marL="0">
                         <a:buNone/>
                       </a:pPr>
                       <a:r>
@@ -30819,7 +31159,7 @@
                       </a:endParaRPr>
                     </a:p>
                   </a:txBody>
-                  <a:tcPr marT="54864" marB="54864" anchor="ctr">
+                  <a:tcPr marL="91440" marR="91440" marT="54864" marB="54864" anchor="ctr">
                     <a:lnL w="9525" cap="flat" cmpd="sng" algn="ctr">
                       <a:solidFill>
                         <a:srgbClr val="E4E7EC"/>
@@ -30866,7 +31206,7 @@
                     <a:bodyPr/>
                     <a:lstStyle/>
                     <a:p>
-                      <a:pPr marL="0" indent="0" algn="ctr">
+                      <a:pPr algn="ctr" indent="0" marL="0">
                         <a:buNone/>
                       </a:pPr>
                       <a:r>
@@ -30887,7 +31227,7 @@
                       </a:endParaRPr>
                     </a:p>
                   </a:txBody>
-                  <a:tcPr marT="54864" marB="54864" anchor="ctr">
+                  <a:tcPr marL="91440" marR="91440" marT="54864" marB="54864" anchor="ctr">
                     <a:lnL w="9525" cap="flat" cmpd="sng" algn="ctr">
                       <a:solidFill>
                         <a:srgbClr val="E4E7EC"/>
@@ -30934,7 +31274,7 @@
                     <a:bodyPr/>
                     <a:lstStyle/>
                     <a:p>
-                      <a:pPr marL="0" indent="0" algn="ctr">
+                      <a:pPr algn="ctr" indent="0" marL="0">
                         <a:buNone/>
                       </a:pPr>
                       <a:r>
@@ -30955,7 +31295,7 @@
                       </a:endParaRPr>
                     </a:p>
                   </a:txBody>
-                  <a:tcPr marT="54864" marB="54864" anchor="ctr">
+                  <a:tcPr marL="91440" marR="91440" marT="54864" marB="54864" anchor="ctr">
                     <a:lnL w="9525" cap="flat" cmpd="sng" algn="ctr">
                       <a:solidFill>
                         <a:srgbClr val="E4E7EC"/>
@@ -31002,7 +31342,7 @@
                     <a:bodyPr/>
                     <a:lstStyle/>
                     <a:p>
-                      <a:pPr marL="0" indent="0" algn="ctr">
+                      <a:pPr algn="ctr" indent="0" marL="0">
                         <a:buNone/>
                       </a:pPr>
                       <a:r>
@@ -31023,7 +31363,7 @@
                       </a:endParaRPr>
                     </a:p>
                   </a:txBody>
-                  <a:tcPr marT="54864" marB="54864" anchor="ctr">
+                  <a:tcPr marL="91440" marR="91440" marT="54864" marB="54864" anchor="ctr">
                     <a:lnL w="9525" cap="flat" cmpd="sng" algn="ctr">
                       <a:solidFill>
                         <a:srgbClr val="E4E7EC"/>
@@ -31070,7 +31410,7 @@
                     <a:bodyPr/>
                     <a:lstStyle/>
                     <a:p>
-                      <a:pPr marL="0" indent="0" algn="ctr">
+                      <a:pPr algn="ctr" indent="0" marL="0">
                         <a:buNone/>
                       </a:pPr>
                       <a:r>
@@ -31091,7 +31431,7 @@
                       </a:endParaRPr>
                     </a:p>
                   </a:txBody>
-                  <a:tcPr marT="54864" marB="54864" anchor="ctr">
+                  <a:tcPr marL="91440" marR="91440" marT="54864" marB="54864" anchor="ctr">
                     <a:lnL w="9525" cap="flat" cmpd="sng" algn="ctr">
                       <a:solidFill>
                         <a:srgbClr val="E4E7EC"/>
@@ -31133,11 +31473,6 @@
                     </a:solidFill>
                   </a:tcPr>
                 </a:tc>
-                <a:extLst>
-                  <a:ext uri="{0D108BD9-81ED-4DB2-BD59-A6C34878D82A}">
-                    <a16:rowId xmlns:a16="http://schemas.microsoft.com/office/drawing/2014/main" val="10006"/>
-                  </a:ext>
-                </a:extLst>
               </a:tr>
             </a:tbl>
           </a:graphicData>
@@ -31211,7 +31546,7 @@
           <a:bodyPr wrap="square" rtlCol="0" anchor="ctr"/>
           <a:lstStyle/>
           <a:p>
-            <a:pPr marL="0" indent="0">
+            <a:pPr indent="0" marL="0">
               <a:lnSpc>
                 <a:spcPct val="122000"/>
               </a:lnSpc>
@@ -31280,7 +31615,7 @@
           <a:bodyPr wrap="square" rtlCol="0" anchor="t"/>
           <a:lstStyle/>
           <a:p>
-            <a:pPr marL="0" indent="0">
+            <a:pPr indent="0" marL="0">
               <a:buNone/>
             </a:pPr>
             <a:r>
@@ -31338,7 +31673,7 @@
                 <a:ea typeface="Segoe UI" pitchFamily="34" charset="-122"/>
                 <a:cs typeface="Segoe UI" pitchFamily="34" charset="-120"/>
               </a:rPr>
-              <a:t>A 546-table schema where a ward charge, a lab result and a claim line already refer to the same encounter</a:t>
+              <a:t>A 555-table schema where a ward charge, a lab result and a claim line already refer to the same encounter</a:t>
             </a:r>
             <a:endParaRPr lang="en-US" sz="1050" dirty="0"/>
           </a:p>
@@ -31362,7 +31697,7 @@
                 <a:ea typeface="Segoe UI" pitchFamily="34" charset="-122"/>
                 <a:cs typeface="Segoe UI" pitchFamily="34" charset="-120"/>
               </a:rPr>
-              <a:t>973 tenant-isolation policies, written before the first customer rather than retrofitted after the first breach</a:t>
+              <a:t>1011 tenant-isolation policies, written before the first customer rather than retrofitted after the first breach</a:t>
             </a:r>
             <a:endParaRPr lang="en-US" sz="1050" dirty="0"/>
           </a:p>
@@ -31437,7 +31772,7 @@
           <a:bodyPr wrap="square" rtlCol="0" anchor="ctr"/>
           <a:lstStyle/>
           <a:p>
-            <a:pPr marL="0" indent="0">
+            <a:pPr indent="0" marL="0">
               <a:buNone/>
             </a:pPr>
             <a:r>
@@ -31756,299 +32091,4 @@
     </a:ext>
   </a:extLst>
 </a:theme>
-</file>
-
-<file path=ppt/theme/theme2.xml><?xml version="1.0" encoding="utf-8"?>
-<a:theme xmlns:a="http://schemas.openxmlformats.org/drawingml/2006/main" name="Office Theme">
-  <a:themeElements>
-    <a:clrScheme name="Office">
-      <a:dk1>
-        <a:sysClr val="windowText" lastClr="000000"/>
-      </a:dk1>
-      <a:lt1>
-        <a:sysClr val="window" lastClr="FFFFFF"/>
-      </a:lt1>
-      <a:dk2>
-        <a:srgbClr val="44546A"/>
-      </a:dk2>
-      <a:lt2>
-        <a:srgbClr val="E7E6E6"/>
-      </a:lt2>
-      <a:accent1>
-        <a:srgbClr val="4472C4"/>
-      </a:accent1>
-      <a:accent2>
-        <a:srgbClr val="ED7D31"/>
-      </a:accent2>
-      <a:accent3>
-        <a:srgbClr val="A5A5A5"/>
-      </a:accent3>
-      <a:accent4>
-        <a:srgbClr val="FFC000"/>
-      </a:accent4>
-      <a:accent5>
-        <a:srgbClr val="5B9BD5"/>
-      </a:accent5>
-      <a:accent6>
-        <a:srgbClr val="70AD47"/>
-      </a:accent6>
-      <a:hlink>
-        <a:srgbClr val="0563C1"/>
-      </a:hlink>
-      <a:folHlink>
-        <a:srgbClr val="954F72"/>
-      </a:folHlink>
-    </a:clrScheme>
-    <a:fontScheme name="Office">
-      <a:majorFont>
-        <a:latin typeface="Calibri Light" panose="020F0302020204030204"/>
-        <a:ea typeface=""/>
-        <a:cs typeface=""/>
-        <a:font script="Jpan" typeface="游ゴシック Light"/>
-        <a:font script="Hang" typeface="맑은 고딕"/>
-        <a:font script="Hans" typeface="等线 Light"/>
-        <a:font script="Hant" typeface="新細明體"/>
-        <a:font script="Arab" typeface="Times New Roman"/>
-        <a:font script="Hebr" typeface="Times New Roman"/>
-        <a:font script="Thai" typeface="Angsana New"/>
-        <a:font script="Ethi" typeface="Nyala"/>
-        <a:font script="Beng" typeface="Vrinda"/>
-        <a:font script="Gujr" typeface="Shruti"/>
-        <a:font script="Khmr" typeface="MoolBoran"/>
-        <a:font script="Knda" typeface="Tunga"/>
-        <a:font script="Guru" typeface="Raavi"/>
-        <a:font script="Cans" typeface="Euphemia"/>
-        <a:font script="Cher" typeface="Plantagenet Cherokee"/>
-        <a:font script="Yiii" typeface="Microsoft Yi Baiti"/>
-        <a:font script="Tibt" typeface="Microsoft Himalaya"/>
-        <a:font script="Thaa" typeface="MV Boli"/>
-        <a:font script="Deva" typeface="Mangal"/>
-        <a:font script="Telu" typeface="Gautami"/>
-        <a:font script="Taml" typeface="Latha"/>
-        <a:font script="Syrc" typeface="Estrangelo Edessa"/>
-        <a:font script="Orya" typeface="Kalinga"/>
-        <a:font script="Mlym" typeface="Kartika"/>
-        <a:font script="Laoo" typeface="DokChampa"/>
-        <a:font script="Sinh" typeface="Iskoola Pota"/>
-        <a:font script="Mong" typeface="Mongolian Baiti"/>
-        <a:font script="Viet" typeface="Times New Roman"/>
-        <a:font script="Uigh" typeface="Microsoft Uighur"/>
-        <a:font script="Geor" typeface="Sylfaen"/>
-        <a:font script="Armn" typeface="Arial"/>
-        <a:font script="Bugi" typeface="Leelawadee UI"/>
-        <a:font script="Bopo" typeface="Microsoft JhengHei"/>
-        <a:font script="Java" typeface="Javanese Text"/>
-        <a:font script="Lisu" typeface="Segoe UI"/>
-        <a:font script="Mymr" typeface="Myanmar Text"/>
-        <a:font script="Nkoo" typeface="Ebrima"/>
-        <a:font script="Olck" typeface="Nirmala UI"/>
-        <a:font script="Osma" typeface="Ebrima"/>
-        <a:font script="Phag" typeface="Phagspa"/>
-        <a:font script="Syrn" typeface="Estrangelo Edessa"/>
-        <a:font script="Syrj" typeface="Estrangelo Edessa"/>
-        <a:font script="Syre" typeface="Estrangelo Edessa"/>
-        <a:font script="Sora" typeface="Nirmala UI"/>
-        <a:font script="Tale" typeface="Microsoft Tai Le"/>
-        <a:font script="Talu" typeface="Microsoft New Tai Lue"/>
-        <a:font script="Tfng" typeface="Ebrima"/>
-      </a:majorFont>
-      <a:minorFont>
-        <a:latin typeface="Calibri" panose="020F0502020204030204"/>
-        <a:ea typeface=""/>
-        <a:cs typeface=""/>
-        <a:font script="Jpan" typeface="游ゴシック"/>
-        <a:font script="Hang" typeface="맑은 고딕"/>
-        <a:font script="Hans" typeface="等线"/>
-        <a:font script="Hant" typeface="新細明體"/>
-        <a:font script="Arab" typeface="Arial"/>
-        <a:font script="Hebr" typeface="Arial"/>
-        <a:font script="Thai" typeface="Cordia New"/>
-        <a:font script="Ethi" typeface="Nyala"/>
-        <a:font script="Beng" typeface="Vrinda"/>
-        <a:font script="Gujr" typeface="Shruti"/>
-        <a:font script="Khmr" typeface="DaunPenh"/>
-        <a:font script="Knda" typeface="Tunga"/>
-        <a:font script="Guru" typeface="Raavi"/>
-        <a:font script="Cans" typeface="Euphemia"/>
-        <a:font script="Cher" typeface="Plantagenet Cherokee"/>
-        <a:font script="Yiii" typeface="Microsoft Yi Baiti"/>
-        <a:font script="Tibt" typeface="Microsoft Himalaya"/>
-        <a:font script="Thaa" typeface="MV Boli"/>
-        <a:font script="Deva" typeface="Mangal"/>
-        <a:font script="Telu" typeface="Gautami"/>
-        <a:font script="Taml" typeface="Latha"/>
-        <a:font script="Syrc" typeface="Estrangelo Edessa"/>
-        <a:font script="Orya" typeface="Kalinga"/>
-        <a:font script="Mlym" typeface="Kartika"/>
-        <a:font script="Laoo" typeface="DokChampa"/>
-        <a:font script="Sinh" typeface="Iskoola Pota"/>
-        <a:font script="Mong" typeface="Mongolian Baiti"/>
-        <a:font script="Viet" typeface="Arial"/>
-        <a:font script="Uigh" typeface="Microsoft Uighur"/>
-        <a:font script="Geor" typeface="Sylfaen"/>
-        <a:font script="Armn" typeface="Arial"/>
-        <a:font script="Bugi" typeface="Leelawadee UI"/>
-        <a:font script="Bopo" typeface="Microsoft JhengHei"/>
-        <a:font script="Java" typeface="Javanese Text"/>
-        <a:font script="Lisu" typeface="Segoe UI"/>
-        <a:font script="Mymr" typeface="Myanmar Text"/>
-        <a:font script="Nkoo" typeface="Ebrima"/>
-        <a:font script="Olck" typeface="Nirmala UI"/>
-        <a:font script="Osma" typeface="Ebrima"/>
-        <a:font script="Phag" typeface="Phagspa"/>
-        <a:font script="Syrn" typeface="Estrangelo Edessa"/>
-        <a:font script="Syrj" typeface="Estrangelo Edessa"/>
-        <a:font script="Syre" typeface="Estrangelo Edessa"/>
-        <a:font script="Sora" typeface="Nirmala UI"/>
-        <a:font script="Tale" typeface="Microsoft Tai Le"/>
-        <a:font script="Talu" typeface="Microsoft New Tai Lue"/>
-        <a:font script="Tfng" typeface="Ebrima"/>
-      </a:minorFont>
-    </a:fontScheme>
-    <a:fmtScheme name="Office">
-      <a:fillStyleLst>
-        <a:solidFill>
-          <a:schemeClr val="phClr"/>
-        </a:solidFill>
-        <a:gradFill rotWithShape="1">
-          <a:gsLst>
-            <a:gs pos="0">
-              <a:schemeClr val="phClr">
-                <a:lumMod val="110000"/>
-                <a:satMod val="105000"/>
-                <a:tint val="67000"/>
-              </a:schemeClr>
-            </a:gs>
-            <a:gs pos="50000">
-              <a:schemeClr val="phClr">
-                <a:lumMod val="105000"/>
-                <a:satMod val="103000"/>
-                <a:tint val="73000"/>
-              </a:schemeClr>
-            </a:gs>
-            <a:gs pos="100000">
-              <a:schemeClr val="phClr">
-                <a:lumMod val="105000"/>
-                <a:satMod val="109000"/>
-                <a:tint val="81000"/>
-              </a:schemeClr>
-            </a:gs>
-          </a:gsLst>
-          <a:lin ang="5400000" scaled="0"/>
-        </a:gradFill>
-        <a:gradFill rotWithShape="1">
-          <a:gsLst>
-            <a:gs pos="0">
-              <a:schemeClr val="phClr">
-                <a:satMod val="103000"/>
-                <a:lumMod val="102000"/>
-                <a:tint val="94000"/>
-              </a:schemeClr>
-            </a:gs>
-            <a:gs pos="50000">
-              <a:schemeClr val="phClr">
-                <a:satMod val="110000"/>
-                <a:lumMod val="100000"/>
-                <a:shade val="100000"/>
-              </a:schemeClr>
-            </a:gs>
-            <a:gs pos="100000">
-              <a:schemeClr val="phClr">
-                <a:lumMod val="99000"/>
-                <a:satMod val="120000"/>
-                <a:shade val="78000"/>
-              </a:schemeClr>
-            </a:gs>
-          </a:gsLst>
-          <a:lin ang="5400000" scaled="0"/>
-        </a:gradFill>
-      </a:fillStyleLst>
-      <a:lnStyleLst>
-        <a:ln w="6350" cap="flat" cmpd="sng" algn="ctr">
-          <a:solidFill>
-            <a:schemeClr val="phClr"/>
-          </a:solidFill>
-          <a:prstDash val="solid"/>
-          <a:miter lim="800000"/>
-        </a:ln>
-        <a:ln w="12700" cap="flat" cmpd="sng" algn="ctr">
-          <a:solidFill>
-            <a:schemeClr val="phClr"/>
-          </a:solidFill>
-          <a:prstDash val="solid"/>
-          <a:miter lim="800000"/>
-        </a:ln>
-        <a:ln w="19050" cap="flat" cmpd="sng" algn="ctr">
-          <a:solidFill>
-            <a:schemeClr val="phClr"/>
-          </a:solidFill>
-          <a:prstDash val="solid"/>
-          <a:miter lim="800000"/>
-        </a:ln>
-      </a:lnStyleLst>
-      <a:effectStyleLst>
-        <a:effectStyle>
-          <a:effectLst/>
-        </a:effectStyle>
-        <a:effectStyle>
-          <a:effectLst/>
-        </a:effectStyle>
-        <a:effectStyle>
-          <a:effectLst>
-            <a:outerShdw blurRad="57150" dist="19050" dir="5400000" algn="ctr" rotWithShape="0">
-              <a:srgbClr val="000000">
-                <a:alpha val="63000"/>
-              </a:srgbClr>
-            </a:outerShdw>
-          </a:effectLst>
-        </a:effectStyle>
-      </a:effectStyleLst>
-      <a:bgFillStyleLst>
-        <a:solidFill>
-          <a:schemeClr val="phClr"/>
-        </a:solidFill>
-        <a:solidFill>
-          <a:schemeClr val="phClr">
-            <a:tint val="95000"/>
-            <a:satMod val="170000"/>
-          </a:schemeClr>
-        </a:solidFill>
-        <a:gradFill rotWithShape="1">
-          <a:gsLst>
-            <a:gs pos="0">
-              <a:schemeClr val="phClr">
-                <a:tint val="93000"/>
-                <a:satMod val="150000"/>
-                <a:shade val="98000"/>
-                <a:lumMod val="102000"/>
-              </a:schemeClr>
-            </a:gs>
-            <a:gs pos="50000">
-              <a:schemeClr val="phClr">
-                <a:tint val="98000"/>
-                <a:satMod val="130000"/>
-                <a:shade val="90000"/>
-                <a:lumMod val="103000"/>
-              </a:schemeClr>
-            </a:gs>
-            <a:gs pos="100000">
-              <a:schemeClr val="phClr">
-                <a:shade val="63000"/>
-                <a:satMod val="120000"/>
-              </a:schemeClr>
-            </a:gs>
-          </a:gsLst>
-          <a:lin ang="5400000" scaled="0"/>
-        </a:gradFill>
-      </a:bgFillStyleLst>
-    </a:fmtScheme>
-  </a:themeElements>
-  <a:objectDefaults/>
-  <a:extraClrSchemeLst/>
-  <a:extLst>
-    <a:ext uri="{05A4C25C-085E-4340-85A3-A5531E510DB2}">
-      <thm15:themeFamily xmlns:thm15="http://schemas.microsoft.com/office/thememl/2012/main" name="Office Theme" id="{62F939B6-93AF-4DB8-9C6B-D6C7DFDC589F}" vid="{4A3C46E8-61CC-4603-A589-7422A47A8E4A}"/>
-    </a:ext>
-  </a:extLst>
-</a:theme>
 </file>